--- a/slides/pptx/week-05.pptx
+++ b/slides/pptx/week-05.pptx
@@ -12,9 +12,10 @@
     <p:sldId id="260" r:id="rId6"/>
     <p:sldId id="261" r:id="rId7"/>
     <p:sldId id="262" r:id="rId8"/>
+    <p:sldId id="263" r:id="rId9"/>
   </p:sldIdLst>
   <p:notesMasterIdLst>
-    <p:notesMasterId r:id="rId9"/>
+    <p:notesMasterId r:id="rId10"/>
   </p:notesMasterIdLst>
   <p:sldSz cx="12191695" cy="6858000"/>
   <p:notesSz cx="6858000" cy="12191695"/>
@@ -1078,6 +1079,94 @@
 </p:notes>
 </file>
 
+<file path=ppt/notesSlides/notesSlide8.xml><?xml version="1.0" encoding="utf-8"?>
+<p:notes xmlns:a="http://schemas.openxmlformats.org/drawingml/2006/main" xmlns:r="http://schemas.openxmlformats.org/officeDocument/2006/relationships" xmlns:p="http://schemas.openxmlformats.org/presentationml/2006/main">
+  <p:cSld>
+    <p:spTree>
+      <p:nvGrpSpPr>
+        <p:cNvPr id="1" name=""/>
+        <p:cNvGrpSpPr/>
+        <p:nvPr/>
+      </p:nvGrpSpPr>
+      <p:grpSpPr>
+        <a:xfrm>
+          <a:off x="0" y="0"/>
+          <a:ext cx="0" cy="0"/>
+          <a:chOff x="0" y="0"/>
+          <a:chExt cx="0" cy="0"/>
+        </a:xfrm>
+      </p:grpSpPr>
+      <p:sp>
+        <p:nvSpPr>
+          <p:cNvPr id="2" name="Slide Image Placeholder 1"/>
+          <p:cNvSpPr>
+            <a:spLocks noGrp="1" noRot="1" noChangeAspect="1"/>
+          </p:cNvSpPr>
+          <p:nvPr>
+            <p:ph type="sldImg"/>
+          </p:nvPr>
+        </p:nvSpPr>
+        <p:spPr/>
+      </p:sp>
+      <p:sp>
+        <p:nvSpPr>
+          <p:cNvPr id="3" name="Notes Placeholder 2"/>
+          <p:cNvSpPr>
+            <a:spLocks noGrp="1"/>
+          </p:cNvSpPr>
+          <p:nvPr>
+            <p:ph type="body" idx="1"/>
+          </p:nvPr>
+        </p:nvSpPr>
+        <p:spPr/>
+        <p:txBody>
+          <a:bodyPr/>
+          <a:lstStyle/>
+          <a:p>
+            <a:r>
+              <a:rPr lang="en-US" dirty="0"/>
+              <a:t/>
+            </a:r>
+            <a:endParaRPr lang="en-US" dirty="0"/>
+          </a:p>
+        </p:txBody>
+      </p:sp>
+      <p:sp>
+        <p:nvSpPr>
+          <p:cNvPr id="4" name="Slide Number Placeholder 3"/>
+          <p:cNvSpPr>
+            <a:spLocks noGrp="1"/>
+          </p:cNvSpPr>
+          <p:nvPr>
+            <p:ph type="sldNum" sz="quarter" idx="10"/>
+          </p:nvPr>
+        </p:nvSpPr>
+        <p:spPr/>
+        <p:txBody>
+          <a:bodyPr/>
+          <a:lstStyle/>
+          <a:p>
+            <a:fld id="{F7021451-1387-4CA6-816F-3879F97B5CBC}" type="slidenum">
+              <a:rPr lang="en-US"/>
+              <a:t>8</a:t>
+            </a:fld>
+            <a:endParaRPr lang="en-US"/>
+          </a:p>
+        </p:txBody>
+      </p:sp>
+    </p:spTree>
+    <p:extLst>
+      <p:ext uri="{BB962C8B-B14F-4D97-AF65-F5344CB8AC3E}">
+        <p14:creationId xmlns:p14="http://schemas.microsoft.com/office/powerpoint/2010/main" val="1024086991"/>
+      </p:ext>
+    </p:extLst>
+  </p:cSld>
+  <p:clrMapOvr>
+    <a:masterClrMapping/>
+  </p:clrMapOvr>
+</p:notes>
+</file>
+
 <file path=ppt/slideLayouts/slideLayout1.xml><?xml version="1.0" encoding="utf-8"?>
 <p:sldLayout xmlns:a="http://schemas.openxmlformats.org/drawingml/2006/main" xmlns:r="http://schemas.openxmlformats.org/officeDocument/2006/relationships" xmlns:p="http://schemas.openxmlformats.org/presentationml/2006/main" preserve="1">
   <p:cSld name="DEFAULT">
@@ -3988,6 +4077,548 @@
 <file path=ppt/slides/slide7.xml><?xml version="1.0" encoding="utf-8"?>
 <p:sld xmlns:a="http://schemas.openxmlformats.org/drawingml/2006/main" xmlns:r="http://schemas.openxmlformats.org/officeDocument/2006/relationships" xmlns:p="http://schemas.openxmlformats.org/presentationml/2006/main">
   <p:cSld name="Slide 7">
+    <p:bg>
+      <p:bgPr>
+        <a:solidFill>
+          <a:srgbClr val="FFFFFF"/>
+        </a:solidFill>
+      </p:bgPr>
+    </p:bg>
+    <p:spTree>
+      <p:nvGrpSpPr>
+        <p:cNvPr id="1" name=""/>
+        <p:cNvGrpSpPr/>
+        <p:nvPr/>
+      </p:nvGrpSpPr>
+      <p:grpSpPr>
+        <a:xfrm>
+          <a:off x="0" y="0"/>
+          <a:ext cx="0" cy="0"/>
+          <a:chOff x="0" y="0"/>
+          <a:chExt cx="0" cy="0"/>
+        </a:xfrm>
+      </p:grpSpPr>
+      <p:sp>
+        <p:nvSpPr>
+          <p:cNvPr id="2" name="Text 0"/>
+          <p:cNvSpPr/>
+          <p:nvPr/>
+        </p:nvSpPr>
+        <p:spPr>
+          <a:xfrm>
+            <a:off x="640080" y="640080"/>
+            <a:ext cx="10058400" cy="320040"/>
+          </a:xfrm>
+          <a:prstGeom prst="rect">
+            <a:avLst/>
+          </a:prstGeom>
+          <a:noFill/>
+          <a:ln/>
+        </p:spPr>
+        <p:txBody>
+          <a:bodyPr wrap="square" rtlCol="0" anchor="ctr"/>
+          <a:lstStyle/>
+          <a:p>
+            <a:pPr indent="0" marL="0">
+              <a:buNone/>
+            </a:pPr>
+            <a:r>
+              <a:rPr lang="en-US" sz="1300" b="1" spc="300" kern="0" dirty="0">
+                <a:solidFill>
+                  <a:srgbClr val="7A3B2E"/>
+                </a:solidFill>
+                <a:latin typeface="Calibri" pitchFamily="34" charset="0"/>
+                <a:ea typeface="Calibri" pitchFamily="34" charset="-122"/>
+                <a:cs typeface="Calibri" pitchFamily="34" charset="-120"/>
+              </a:rPr>
+              <a:t>HOW THIS WEEK CONNECTS</a:t>
+            </a:r>
+            <a:endParaRPr lang="en-US" sz="1300" dirty="0"/>
+          </a:p>
+        </p:txBody>
+      </p:sp>
+      <p:sp>
+        <p:nvSpPr>
+          <p:cNvPr id="3" name="Text 1"/>
+          <p:cNvSpPr/>
+          <p:nvPr/>
+        </p:nvSpPr>
+        <p:spPr>
+          <a:xfrm>
+            <a:off x="640080" y="987552"/>
+            <a:ext cx="10058400" cy="640080"/>
+          </a:xfrm>
+          <a:prstGeom prst="rect">
+            <a:avLst/>
+          </a:prstGeom>
+          <a:noFill/>
+          <a:ln/>
+        </p:spPr>
+        <p:txBody>
+          <a:bodyPr wrap="square" rtlCol="0" anchor="ctr"/>
+          <a:lstStyle/>
+          <a:p>
+            <a:pPr indent="0" marL="0">
+              <a:buNone/>
+            </a:pPr>
+            <a:r>
+              <a:rPr lang="en-US" sz="2800" b="1" dirty="0">
+                <a:solidFill>
+                  <a:srgbClr val="1A1A1A"/>
+                </a:solidFill>
+                <a:latin typeface="Cambria" pitchFamily="34" charset="0"/>
+                <a:ea typeface="Cambria" pitchFamily="34" charset="-122"/>
+                <a:cs typeface="Cambria" pitchFamily="34" charset="-120"/>
+              </a:rPr>
+              <a:t>The course's through-lines</a:t>
+            </a:r>
+            <a:endParaRPr lang="en-US" sz="2800" dirty="0"/>
+          </a:p>
+        </p:txBody>
+      </p:sp>
+      <p:sp>
+        <p:nvSpPr>
+          <p:cNvPr id="4" name="Shape 2"/>
+          <p:cNvSpPr/>
+          <p:nvPr/>
+        </p:nvSpPr>
+        <p:spPr>
+          <a:xfrm>
+            <a:off x="640080" y="2057400"/>
+            <a:ext cx="457200" cy="457200"/>
+          </a:xfrm>
+          <a:prstGeom prst="roundRect">
+            <a:avLst>
+              <a:gd name="adj" fmla="val 16000"/>
+            </a:avLst>
+          </a:prstGeom>
+          <a:solidFill>
+            <a:srgbClr val="7A3B2E"/>
+          </a:solidFill>
+          <a:ln/>
+        </p:spPr>
+      </p:sp>
+      <p:sp>
+        <p:nvSpPr>
+          <p:cNvPr id="5" name="Text 3"/>
+          <p:cNvSpPr/>
+          <p:nvPr/>
+        </p:nvSpPr>
+        <p:spPr>
+          <a:xfrm>
+            <a:off x="640080" y="2057400"/>
+            <a:ext cx="457200" cy="457200"/>
+          </a:xfrm>
+          <a:prstGeom prst="rect">
+            <a:avLst/>
+          </a:prstGeom>
+          <a:noFill/>
+          <a:ln/>
+        </p:spPr>
+        <p:txBody>
+          <a:bodyPr wrap="square" rtlCol="0" anchor="ctr"/>
+          <a:lstStyle/>
+          <a:p>
+            <a:pPr algn="ctr" indent="0" marL="0">
+              <a:buNone/>
+            </a:pPr>
+            <a:r>
+              <a:rPr lang="en-US" sz="2000" b="1" dirty="0">
+                <a:solidFill>
+                  <a:srgbClr val="FFFFFF"/>
+                </a:solidFill>
+                <a:latin typeface="Cambria" pitchFamily="34" charset="0"/>
+                <a:ea typeface="Cambria" pitchFamily="34" charset="-122"/>
+                <a:cs typeface="Cambria" pitchFamily="34" charset="-120"/>
+              </a:rPr>
+              <a:t>1</a:t>
+            </a:r>
+            <a:endParaRPr lang="en-US" sz="2000" dirty="0"/>
+          </a:p>
+        </p:txBody>
+      </p:sp>
+      <p:sp>
+        <p:nvSpPr>
+          <p:cNvPr id="6" name="Text 4"/>
+          <p:cNvSpPr/>
+          <p:nvPr/>
+        </p:nvSpPr>
+        <p:spPr>
+          <a:xfrm>
+            <a:off x="1371600" y="2020824"/>
+            <a:ext cx="10332720" cy="411480"/>
+          </a:xfrm>
+          <a:prstGeom prst="rect">
+            <a:avLst/>
+          </a:prstGeom>
+          <a:noFill/>
+          <a:ln/>
+        </p:spPr>
+        <p:txBody>
+          <a:bodyPr wrap="square" rtlCol="0" anchor="ctr"/>
+          <a:lstStyle/>
+          <a:p>
+            <a:pPr indent="0" marL="0">
+              <a:buNone/>
+            </a:pPr>
+            <a:r>
+              <a:rPr lang="en-US" sz="1900" b="1" dirty="0">
+                <a:solidFill>
+                  <a:srgbClr val="7A3B2E"/>
+                </a:solidFill>
+                <a:latin typeface="Cambria" pitchFamily="34" charset="0"/>
+                <a:ea typeface="Cambria" pitchFamily="34" charset="-122"/>
+                <a:cs typeface="Cambria" pitchFamily="34" charset="-120"/>
+              </a:rPr>
+              <a:t>Beyond counting (the payoff)</a:t>
+            </a:r>
+            <a:endParaRPr lang="en-US" sz="1900" dirty="0"/>
+          </a:p>
+        </p:txBody>
+      </p:sp>
+      <p:sp>
+        <p:nvSpPr>
+          <p:cNvPr id="7" name="Text 5"/>
+          <p:cNvSpPr/>
+          <p:nvPr/>
+        </p:nvSpPr>
+        <p:spPr>
+          <a:xfrm>
+            <a:off x="1371600" y="2441448"/>
+            <a:ext cx="10332720" cy="914400"/>
+          </a:xfrm>
+          <a:prstGeom prst="rect">
+            <a:avLst/>
+          </a:prstGeom>
+          <a:noFill/>
+          <a:ln/>
+        </p:spPr>
+        <p:txBody>
+          <a:bodyPr wrap="square" rtlCol="0" anchor="t">
+            <a:spAutoFit/>
+          </a:bodyPr>
+          <a:lstStyle/>
+          <a:p>
+            <a:pPr indent="0" marL="0">
+              <a:lnSpc>
+                <a:spcPct val="112000"/>
+              </a:lnSpc>
+              <a:buNone/>
+            </a:pPr>
+            <a:r>
+              <a:rPr lang="en-US" sz="1450" dirty="0">
+                <a:solidFill>
+                  <a:srgbClr val="1A1A1A"/>
+                </a:solidFill>
+                <a:latin typeface="Calibri" pitchFamily="34" charset="0"/>
+                <a:ea typeface="Calibri" pitchFamily="34" charset="-122"/>
+                <a:cs typeface="Calibri" pitchFamily="34" charset="-120"/>
+              </a:rPr>
+              <a:t>The same she/he question from Week 2, now embedded, clusters counting could not see.</a:t>
+            </a:r>
+            <a:endParaRPr lang="en-US" sz="1450" dirty="0"/>
+          </a:p>
+        </p:txBody>
+      </p:sp>
+      <p:sp>
+        <p:nvSpPr>
+          <p:cNvPr id="8" name="Shape 6"/>
+          <p:cNvSpPr/>
+          <p:nvPr/>
+        </p:nvSpPr>
+        <p:spPr>
+          <a:xfrm>
+            <a:off x="640080" y="3520440"/>
+            <a:ext cx="457200" cy="457200"/>
+          </a:xfrm>
+          <a:prstGeom prst="roundRect">
+            <a:avLst>
+              <a:gd name="adj" fmla="val 16000"/>
+            </a:avLst>
+          </a:prstGeom>
+          <a:solidFill>
+            <a:srgbClr val="3F6F5F"/>
+          </a:solidFill>
+          <a:ln/>
+        </p:spPr>
+      </p:sp>
+      <p:sp>
+        <p:nvSpPr>
+          <p:cNvPr id="9" name="Text 7"/>
+          <p:cNvSpPr/>
+          <p:nvPr/>
+        </p:nvSpPr>
+        <p:spPr>
+          <a:xfrm>
+            <a:off x="640080" y="3520440"/>
+            <a:ext cx="457200" cy="457200"/>
+          </a:xfrm>
+          <a:prstGeom prst="rect">
+            <a:avLst/>
+          </a:prstGeom>
+          <a:noFill/>
+          <a:ln/>
+        </p:spPr>
+        <p:txBody>
+          <a:bodyPr wrap="square" rtlCol="0" anchor="ctr"/>
+          <a:lstStyle/>
+          <a:p>
+            <a:pPr algn="ctr" indent="0" marL="0">
+              <a:buNone/>
+            </a:pPr>
+            <a:r>
+              <a:rPr lang="en-US" sz="2000" b="1" dirty="0">
+                <a:solidFill>
+                  <a:srgbClr val="FFFFFF"/>
+                </a:solidFill>
+                <a:latin typeface="Cambria" pitchFamily="34" charset="0"/>
+                <a:ea typeface="Cambria" pitchFamily="34" charset="-122"/>
+                <a:cs typeface="Cambria" pitchFamily="34" charset="-120"/>
+              </a:rPr>
+              <a:t>2</a:t>
+            </a:r>
+            <a:endParaRPr lang="en-US" sz="2000" dirty="0"/>
+          </a:p>
+        </p:txBody>
+      </p:sp>
+      <p:sp>
+        <p:nvSpPr>
+          <p:cNvPr id="10" name="Text 8"/>
+          <p:cNvSpPr/>
+          <p:nvPr/>
+        </p:nvSpPr>
+        <p:spPr>
+          <a:xfrm>
+            <a:off x="1371600" y="3483864"/>
+            <a:ext cx="10332720" cy="411480"/>
+          </a:xfrm>
+          <a:prstGeom prst="rect">
+            <a:avLst/>
+          </a:prstGeom>
+          <a:noFill/>
+          <a:ln/>
+        </p:spPr>
+        <p:txBody>
+          <a:bodyPr wrap="square" rtlCol="0" anchor="ctr"/>
+          <a:lstStyle/>
+          <a:p>
+            <a:pPr indent="0" marL="0">
+              <a:buNone/>
+            </a:pPr>
+            <a:r>
+              <a:rPr lang="en-US" sz="1900" b="1" dirty="0">
+                <a:solidFill>
+                  <a:srgbClr val="3F6F5F"/>
+                </a:solidFill>
+                <a:latin typeface="Cambria" pitchFamily="34" charset="0"/>
+                <a:ea typeface="Cambria" pitchFamily="34" charset="-122"/>
+                <a:cs typeface="Cambria" pitchFamily="34" charset="-120"/>
+              </a:rPr>
+              <a:t>Every chart is a choice</a:t>
+            </a:r>
+            <a:endParaRPr lang="en-US" sz="1900" dirty="0"/>
+          </a:p>
+        </p:txBody>
+      </p:sp>
+      <p:sp>
+        <p:nvSpPr>
+          <p:cNvPr id="11" name="Text 9"/>
+          <p:cNvSpPr/>
+          <p:nvPr/>
+        </p:nvSpPr>
+        <p:spPr>
+          <a:xfrm>
+            <a:off x="1371600" y="3904488"/>
+            <a:ext cx="10332720" cy="914400"/>
+          </a:xfrm>
+          <a:prstGeom prst="rect">
+            <a:avLst/>
+          </a:prstGeom>
+          <a:noFill/>
+          <a:ln/>
+        </p:spPr>
+        <p:txBody>
+          <a:bodyPr wrap="square" rtlCol="0" anchor="t">
+            <a:spAutoFit/>
+          </a:bodyPr>
+          <a:lstStyle/>
+          <a:p>
+            <a:pPr indent="0" marL="0">
+              <a:lnSpc>
+                <a:spcPct val="112000"/>
+              </a:lnSpc>
+              <a:buNone/>
+            </a:pPr>
+            <a:r>
+              <a:rPr lang="en-US" sz="1450" dirty="0">
+                <a:solidFill>
+                  <a:srgbClr val="1A1A1A"/>
+                </a:solidFill>
+                <a:latin typeface="Calibri" pitchFamily="34" charset="0"/>
+                <a:ea typeface="Calibri" pitchFamily="34" charset="-122"/>
+                <a:cs typeface="Calibri" pitchFamily="34" charset="-120"/>
+              </a:rPr>
+              <a:t>PCA vs t-SNE rearranges the same data; the picture made a decision.</a:t>
+            </a:r>
+            <a:endParaRPr lang="en-US" sz="1450" dirty="0"/>
+          </a:p>
+        </p:txBody>
+      </p:sp>
+      <p:sp>
+        <p:nvSpPr>
+          <p:cNvPr id="12" name="Shape 10"/>
+          <p:cNvSpPr/>
+          <p:nvPr/>
+        </p:nvSpPr>
+        <p:spPr>
+          <a:xfrm>
+            <a:off x="640080" y="4983480"/>
+            <a:ext cx="457200" cy="457200"/>
+          </a:xfrm>
+          <a:prstGeom prst="roundRect">
+            <a:avLst>
+              <a:gd name="adj" fmla="val 16000"/>
+            </a:avLst>
+          </a:prstGeom>
+          <a:solidFill>
+            <a:srgbClr val="B9852F"/>
+          </a:solidFill>
+          <a:ln/>
+        </p:spPr>
+      </p:sp>
+      <p:sp>
+        <p:nvSpPr>
+          <p:cNvPr id="13" name="Text 11"/>
+          <p:cNvSpPr/>
+          <p:nvPr/>
+        </p:nvSpPr>
+        <p:spPr>
+          <a:xfrm>
+            <a:off x="640080" y="4983480"/>
+            <a:ext cx="457200" cy="457200"/>
+          </a:xfrm>
+          <a:prstGeom prst="rect">
+            <a:avLst/>
+          </a:prstGeom>
+          <a:noFill/>
+          <a:ln/>
+        </p:spPr>
+        <p:txBody>
+          <a:bodyPr wrap="square" rtlCol="0" anchor="ctr"/>
+          <a:lstStyle/>
+          <a:p>
+            <a:pPr algn="ctr" indent="0" marL="0">
+              <a:buNone/>
+            </a:pPr>
+            <a:r>
+              <a:rPr lang="en-US" sz="2000" b="1" dirty="0">
+                <a:solidFill>
+                  <a:srgbClr val="FFFFFF"/>
+                </a:solidFill>
+                <a:latin typeface="Cambria" pitchFamily="34" charset="0"/>
+                <a:ea typeface="Cambria" pitchFamily="34" charset="-122"/>
+                <a:cs typeface="Cambria" pitchFamily="34" charset="-120"/>
+              </a:rPr>
+              <a:t>3</a:t>
+            </a:r>
+            <a:endParaRPr lang="en-US" sz="2000" dirty="0"/>
+          </a:p>
+        </p:txBody>
+      </p:sp>
+      <p:sp>
+        <p:nvSpPr>
+          <p:cNvPr id="14" name="Text 12"/>
+          <p:cNvSpPr/>
+          <p:nvPr/>
+        </p:nvSpPr>
+        <p:spPr>
+          <a:xfrm>
+            <a:off x="1371600" y="4946904"/>
+            <a:ext cx="10332720" cy="411480"/>
+          </a:xfrm>
+          <a:prstGeom prst="rect">
+            <a:avLst/>
+          </a:prstGeom>
+          <a:noFill/>
+          <a:ln/>
+        </p:spPr>
+        <p:txBody>
+          <a:bodyPr wrap="square" rtlCol="0" anchor="ctr"/>
+          <a:lstStyle/>
+          <a:p>
+            <a:pPr indent="0" marL="0">
+              <a:buNone/>
+            </a:pPr>
+            <a:r>
+              <a:rPr lang="en-US" sz="1900" b="1" dirty="0">
+                <a:solidFill>
+                  <a:srgbClr val="B9852F"/>
+                </a:solidFill>
+                <a:latin typeface="Cambria" pitchFamily="34" charset="0"/>
+                <a:ea typeface="Cambria" pitchFamily="34" charset="-122"/>
+                <a:cs typeface="Cambria" pitchFamily="34" charset="-120"/>
+              </a:rPr>
+              <a:t>Whose data</a:t>
+            </a:r>
+            <a:endParaRPr lang="en-US" sz="1900" dirty="0"/>
+          </a:p>
+        </p:txBody>
+      </p:sp>
+      <p:sp>
+        <p:nvSpPr>
+          <p:cNvPr id="15" name="Text 13"/>
+          <p:cNvSpPr/>
+          <p:nvPr/>
+        </p:nvSpPr>
+        <p:spPr>
+          <a:xfrm>
+            <a:off x="1371600" y="5367528"/>
+            <a:ext cx="10332720" cy="914400"/>
+          </a:xfrm>
+          <a:prstGeom prst="rect">
+            <a:avLst/>
+          </a:prstGeom>
+          <a:noFill/>
+          <a:ln/>
+        </p:spPr>
+        <p:txBody>
+          <a:bodyPr wrap="square" rtlCol="0" anchor="t">
+            <a:spAutoFit/>
+          </a:bodyPr>
+          <a:lstStyle/>
+          <a:p>
+            <a:pPr indent="0" marL="0">
+              <a:lnSpc>
+                <a:spcPct val="112000"/>
+              </a:lnSpc>
+              <a:buNone/>
+            </a:pPr>
+            <a:r>
+              <a:rPr lang="en-US" sz="1450" dirty="0">
+                <a:solidFill>
+                  <a:srgbClr val="1A1A1A"/>
+                </a:solidFill>
+                <a:latin typeface="Calibri" pitchFamily="34" charset="0"/>
+                <a:ea typeface="Calibri" pitchFamily="34" charset="-122"/>
+                <a:cs typeface="Calibri" pitchFamily="34" charset="-120"/>
+              </a:rPr>
+              <a:t>Embeddings mirror the corpus, discovery (Soni/Klein) or laundered bias (Caliskan)?</a:t>
+            </a:r>
+            <a:endParaRPr lang="en-US" sz="1450" dirty="0"/>
+          </a:p>
+        </p:txBody>
+      </p:sp>
+    </p:spTree>
+  </p:cSld>
+  <p:clrMapOvr>
+    <a:masterClrMapping/>
+  </p:clrMapOvr>
+</p:sld>
+</file>
+
+<file path=ppt/slides/slide8.xml><?xml version="1.0" encoding="utf-8"?>
+<p:sld xmlns:a="http://schemas.openxmlformats.org/drawingml/2006/main" xmlns:r="http://schemas.openxmlformats.org/officeDocument/2006/relationships" xmlns:p="http://schemas.openxmlformats.org/presentationml/2006/main">
+  <p:cSld name="Slide 8">
     <p:bg>
       <p:bgPr>
         <a:solidFill>

--- a/slides/pptx/week-05.pptx
+++ b/slides/pptx/week-05.pptx
@@ -2245,7 +2245,7 @@
                 <a:ea typeface="Calibri" pitchFamily="34" charset="-122"/>
                 <a:cs typeface="Calibri" pitchFamily="34" charset="-120"/>
               </a:rPr>
-              <a:t>A debate, two readings of one fact: embeddings encode the associations in a corpus.</a:t>
+              <a:t>A debate, two readings of one discovery: embedding space contains directions.</a:t>
             </a:r>
             <a:endParaRPr lang="en-US" sz="1900" dirty="0"/>
           </a:p>
@@ -2421,7 +2421,7 @@
                 <a:ea typeface="Calibri" pitchFamily="34" charset="-122"/>
                 <a:cs typeface="Calibri" pitchFamily="34" charset="-120"/>
               </a:rPr>
-              <a:t>To Caliskan et al. (2017) that's a warning, a model trained on human text launders human prejudice. To Soni, Klein &amp; Eisenstein (2021) the same mirror is a method, embeddings on abolitionist newspapers reveal which papers led the movement's language. The room decides: when is reading a corpus's associations a discovery, and when is it laundering bias?</a:t>
+              <a:t>Kozlowski, Taddy &amp; Evans (2019) find a rich–poor axis in embedding space and read it as the cultural structure of social class, measurable across a century. Bolukbasi et al. (2016) find the same kind of direction, a gender axis pairing men with "programmer" and women with "homemaker," and read it as prejudice to remove. Identical technique, opposite verdicts. The room decides: when is a dimension found in a corpus a discovery about culture, and when is it the corpus's own bias read back?</a:t>
             </a:r>
             <a:endParaRPr lang="en-US" sz="2000" dirty="0"/>
           </a:p>
@@ -3181,7 +3181,7 @@
                 <a:ea typeface="Calibri" pitchFamily="34" charset="-122"/>
                 <a:cs typeface="Calibri" pitchFamily="34" charset="-120"/>
               </a:rPr>
-              <a:t>The beyond-counting moment: put Week 2 beside today. There you counted adjectives near she vs. he; now embed those descriptions and watch them cluster. Same question, two tools, the second visibly richer. Name the idea: an item becomes a vector, position learned from the company it keeps.</a:t>
+              <a:t>The beyond-counting moment: put Week 2 beside today. There you counted the words around an axis you care about; now embed them and watch them cluster. Run it on something the room enjoys, a beloved artist's songs sorted by mood and era, and groupings appear that counting couldn't see. Same question, two tools, the second visibly richer. Name the idea: an item becomes a vector, position learned from the company it keeps.</a:t>
             </a:r>
             <a:endParaRPr lang="en-US" sz="1250" dirty="0"/>
           </a:p>
@@ -3760,7 +3760,7 @@
                 <a:ea typeface="Calibri" pitchFamily="34" charset="-122"/>
                 <a:cs typeface="Calibri" pitchFamily="34" charset="-120"/>
               </a:rPr>
-              <a:t>Alammar, The Illustrated Word2Vec, plus the debate: Soni/Klein, How Words Lead to Justice vs. Caliskan et al. (2017)</a:t>
+              <a:t>Alammar, The Illustrated Word2Vec, plus the debate: Kozlowski/Taddy/Evans, The Geometry of Culture (ASR 2019) vs. Bolukbasi et al. (2016)</a:t>
             </a:r>
             <a:endParaRPr lang="en-US" sz="1400" dirty="0"/>
           </a:p>
@@ -3860,7 +3860,7 @@
                 <a:ea typeface="Calibri" pitchFamily="34" charset="-122"/>
                 <a:cs typeface="Calibri" pitchFamily="34" charset="-120"/>
               </a:rPr>
-              <a:t>Garg et al. (PNAS 2018); Anderson et al., Spotify diversity</a:t>
+              <a:t>The second pairing: Caliskan et al. (2017) vs. Soni/Klein, How Words Lead to Justice; Anderson et al., Spotify diversity</a:t>
             </a:r>
             <a:endParaRPr lang="en-US" sz="1400" dirty="0"/>
           </a:p>
@@ -4314,7 +4314,7 @@
                 <a:ea typeface="Calibri" pitchFamily="34" charset="-122"/>
                 <a:cs typeface="Calibri" pitchFamily="34" charset="-120"/>
               </a:rPr>
-              <a:t>The same she/he question from Week 2, now embedded, clusters counting could not see.</a:t>
+              <a:t>The same counting question from Week 2, now embedded: clusters counting could not see.</a:t>
             </a:r>
             <a:endParaRPr lang="en-US" sz="1450" dirty="0"/>
           </a:p>
@@ -4602,7 +4602,7 @@
                 <a:ea typeface="Calibri" pitchFamily="34" charset="-122"/>
                 <a:cs typeface="Calibri" pitchFamily="34" charset="-120"/>
               </a:rPr>
-              <a:t>Embeddings mirror the corpus, discovery (Soni/Klein) or laundered bias (Caliskan)?</a:t>
+              <a:t>A direction found in the corpus: cultural discovery (Kozlowski) or encoded prejudice (Bolukbasi)?</a:t>
             </a:r>
             <a:endParaRPr lang="en-US" sz="1450" dirty="0"/>
           </a:p>

--- a/slides/pptx/week-05.pptx
+++ b/slides/pptx/week-05.pptx
@@ -13,9 +13,13 @@
     <p:sldId id="261" r:id="rId7"/>
     <p:sldId id="262" r:id="rId8"/>
     <p:sldId id="263" r:id="rId9"/>
+    <p:sldId id="264" r:id="rId10"/>
+    <p:sldId id="265" r:id="rId11"/>
+    <p:sldId id="266" r:id="rId12"/>
+    <p:sldId id="267" r:id="rId13"/>
   </p:sldIdLst>
   <p:notesMasterIdLst>
-    <p:notesMasterId r:id="rId10"/>
+    <p:notesMasterId r:id="rId14"/>
   </p:notesMasterIdLst>
   <p:sldSz cx="12191695" cy="6858000"/>
   <p:notesSz cx="6858000" cy="12191695"/>
@@ -551,6 +555,270 @@
 </p:notes>
 </file>
 
+<file path=ppt/notesSlides/notesSlide10.xml><?xml version="1.0" encoding="utf-8"?>
+<p:notes xmlns:a="http://schemas.openxmlformats.org/drawingml/2006/main" xmlns:r="http://schemas.openxmlformats.org/officeDocument/2006/relationships" xmlns:p="http://schemas.openxmlformats.org/presentationml/2006/main">
+  <p:cSld>
+    <p:spTree>
+      <p:nvGrpSpPr>
+        <p:cNvPr id="1" name=""/>
+        <p:cNvGrpSpPr/>
+        <p:nvPr/>
+      </p:nvGrpSpPr>
+      <p:grpSpPr>
+        <a:xfrm>
+          <a:off x="0" y="0"/>
+          <a:ext cx="0" cy="0"/>
+          <a:chOff x="0" y="0"/>
+          <a:chExt cx="0" cy="0"/>
+        </a:xfrm>
+      </p:grpSpPr>
+      <p:sp>
+        <p:nvSpPr>
+          <p:cNvPr id="2" name="Slide Image Placeholder 1"/>
+          <p:cNvSpPr>
+            <a:spLocks noGrp="1" noRot="1" noChangeAspect="1"/>
+          </p:cNvSpPr>
+          <p:nvPr>
+            <p:ph type="sldImg"/>
+          </p:nvPr>
+        </p:nvSpPr>
+        <p:spPr/>
+      </p:sp>
+      <p:sp>
+        <p:nvSpPr>
+          <p:cNvPr id="3" name="Notes Placeholder 2"/>
+          <p:cNvSpPr>
+            <a:spLocks noGrp="1"/>
+          </p:cNvSpPr>
+          <p:nvPr>
+            <p:ph type="body" idx="1"/>
+          </p:nvPr>
+        </p:nvSpPr>
+        <p:spPr/>
+        <p:txBody>
+          <a:bodyPr/>
+          <a:lstStyle/>
+          <a:p>
+            <a:r>
+              <a:rPr lang="en-US" dirty="0"/>
+              <a:t/>
+            </a:r>
+            <a:endParaRPr lang="en-US" dirty="0"/>
+          </a:p>
+        </p:txBody>
+      </p:sp>
+      <p:sp>
+        <p:nvSpPr>
+          <p:cNvPr id="4" name="Slide Number Placeholder 3"/>
+          <p:cNvSpPr>
+            <a:spLocks noGrp="1"/>
+          </p:cNvSpPr>
+          <p:nvPr>
+            <p:ph type="sldNum" sz="quarter" idx="10"/>
+          </p:nvPr>
+        </p:nvSpPr>
+        <p:spPr/>
+        <p:txBody>
+          <a:bodyPr/>
+          <a:lstStyle/>
+          <a:p>
+            <a:fld id="{F7021451-1387-4CA6-816F-3879F97B5CBC}" type="slidenum">
+              <a:rPr lang="en-US"/>
+              <a:t>10</a:t>
+            </a:fld>
+            <a:endParaRPr lang="en-US"/>
+          </a:p>
+        </p:txBody>
+      </p:sp>
+    </p:spTree>
+    <p:extLst>
+      <p:ext uri="{BB962C8B-B14F-4D97-AF65-F5344CB8AC3E}">
+        <p14:creationId xmlns:p14="http://schemas.microsoft.com/office/powerpoint/2010/main" val="1024086991"/>
+      </p:ext>
+    </p:extLst>
+  </p:cSld>
+  <p:clrMapOvr>
+    <a:masterClrMapping/>
+  </p:clrMapOvr>
+</p:notes>
+</file>
+
+<file path=ppt/notesSlides/notesSlide11.xml><?xml version="1.0" encoding="utf-8"?>
+<p:notes xmlns:a="http://schemas.openxmlformats.org/drawingml/2006/main" xmlns:r="http://schemas.openxmlformats.org/officeDocument/2006/relationships" xmlns:p="http://schemas.openxmlformats.org/presentationml/2006/main">
+  <p:cSld>
+    <p:spTree>
+      <p:nvGrpSpPr>
+        <p:cNvPr id="1" name=""/>
+        <p:cNvGrpSpPr/>
+        <p:nvPr/>
+      </p:nvGrpSpPr>
+      <p:grpSpPr>
+        <a:xfrm>
+          <a:off x="0" y="0"/>
+          <a:ext cx="0" cy="0"/>
+          <a:chOff x="0" y="0"/>
+          <a:chExt cx="0" cy="0"/>
+        </a:xfrm>
+      </p:grpSpPr>
+      <p:sp>
+        <p:nvSpPr>
+          <p:cNvPr id="2" name="Slide Image Placeholder 1"/>
+          <p:cNvSpPr>
+            <a:spLocks noGrp="1" noRot="1" noChangeAspect="1"/>
+          </p:cNvSpPr>
+          <p:nvPr>
+            <p:ph type="sldImg"/>
+          </p:nvPr>
+        </p:nvSpPr>
+        <p:spPr/>
+      </p:sp>
+      <p:sp>
+        <p:nvSpPr>
+          <p:cNvPr id="3" name="Notes Placeholder 2"/>
+          <p:cNvSpPr>
+            <a:spLocks noGrp="1"/>
+          </p:cNvSpPr>
+          <p:nvPr>
+            <p:ph type="body" idx="1"/>
+          </p:nvPr>
+        </p:nvSpPr>
+        <p:spPr/>
+        <p:txBody>
+          <a:bodyPr/>
+          <a:lstStyle/>
+          <a:p>
+            <a:r>
+              <a:rPr lang="en-US" dirty="0"/>
+              <a:t/>
+            </a:r>
+            <a:endParaRPr lang="en-US" dirty="0"/>
+          </a:p>
+        </p:txBody>
+      </p:sp>
+      <p:sp>
+        <p:nvSpPr>
+          <p:cNvPr id="4" name="Slide Number Placeholder 3"/>
+          <p:cNvSpPr>
+            <a:spLocks noGrp="1"/>
+          </p:cNvSpPr>
+          <p:nvPr>
+            <p:ph type="sldNum" sz="quarter" idx="10"/>
+          </p:nvPr>
+        </p:nvSpPr>
+        <p:spPr/>
+        <p:txBody>
+          <a:bodyPr/>
+          <a:lstStyle/>
+          <a:p>
+            <a:fld id="{F7021451-1387-4CA6-816F-3879F97B5CBC}" type="slidenum">
+              <a:rPr lang="en-US"/>
+              <a:t>11</a:t>
+            </a:fld>
+            <a:endParaRPr lang="en-US"/>
+          </a:p>
+        </p:txBody>
+      </p:sp>
+    </p:spTree>
+    <p:extLst>
+      <p:ext uri="{BB962C8B-B14F-4D97-AF65-F5344CB8AC3E}">
+        <p14:creationId xmlns:p14="http://schemas.microsoft.com/office/powerpoint/2010/main" val="1024086991"/>
+      </p:ext>
+    </p:extLst>
+  </p:cSld>
+  <p:clrMapOvr>
+    <a:masterClrMapping/>
+  </p:clrMapOvr>
+</p:notes>
+</file>
+
+<file path=ppt/notesSlides/notesSlide12.xml><?xml version="1.0" encoding="utf-8"?>
+<p:notes xmlns:a="http://schemas.openxmlformats.org/drawingml/2006/main" xmlns:r="http://schemas.openxmlformats.org/officeDocument/2006/relationships" xmlns:p="http://schemas.openxmlformats.org/presentationml/2006/main">
+  <p:cSld>
+    <p:spTree>
+      <p:nvGrpSpPr>
+        <p:cNvPr id="1" name=""/>
+        <p:cNvGrpSpPr/>
+        <p:nvPr/>
+      </p:nvGrpSpPr>
+      <p:grpSpPr>
+        <a:xfrm>
+          <a:off x="0" y="0"/>
+          <a:ext cx="0" cy="0"/>
+          <a:chOff x="0" y="0"/>
+          <a:chExt cx="0" cy="0"/>
+        </a:xfrm>
+      </p:grpSpPr>
+      <p:sp>
+        <p:nvSpPr>
+          <p:cNvPr id="2" name="Slide Image Placeholder 1"/>
+          <p:cNvSpPr>
+            <a:spLocks noGrp="1" noRot="1" noChangeAspect="1"/>
+          </p:cNvSpPr>
+          <p:nvPr>
+            <p:ph type="sldImg"/>
+          </p:nvPr>
+        </p:nvSpPr>
+        <p:spPr/>
+      </p:sp>
+      <p:sp>
+        <p:nvSpPr>
+          <p:cNvPr id="3" name="Notes Placeholder 2"/>
+          <p:cNvSpPr>
+            <a:spLocks noGrp="1"/>
+          </p:cNvSpPr>
+          <p:nvPr>
+            <p:ph type="body" idx="1"/>
+          </p:nvPr>
+        </p:nvSpPr>
+        <p:spPr/>
+        <p:txBody>
+          <a:bodyPr/>
+          <a:lstStyle/>
+          <a:p>
+            <a:r>
+              <a:rPr lang="en-US" dirty="0"/>
+              <a:t/>
+            </a:r>
+            <a:endParaRPr lang="en-US" dirty="0"/>
+          </a:p>
+        </p:txBody>
+      </p:sp>
+      <p:sp>
+        <p:nvSpPr>
+          <p:cNvPr id="4" name="Slide Number Placeholder 3"/>
+          <p:cNvSpPr>
+            <a:spLocks noGrp="1"/>
+          </p:cNvSpPr>
+          <p:nvPr>
+            <p:ph type="sldNum" sz="quarter" idx="10"/>
+          </p:nvPr>
+        </p:nvSpPr>
+        <p:spPr/>
+        <p:txBody>
+          <a:bodyPr/>
+          <a:lstStyle/>
+          <a:p>
+            <a:fld id="{F7021451-1387-4CA6-816F-3879F97B5CBC}" type="slidenum">
+              <a:rPr lang="en-US"/>
+              <a:t>12</a:t>
+            </a:fld>
+            <a:endParaRPr lang="en-US"/>
+          </a:p>
+        </p:txBody>
+      </p:sp>
+    </p:spTree>
+    <p:extLst>
+      <p:ext uri="{BB962C8B-B14F-4D97-AF65-F5344CB8AC3E}">
+        <p14:creationId xmlns:p14="http://schemas.microsoft.com/office/powerpoint/2010/main" val="1024086991"/>
+      </p:ext>
+    </p:extLst>
+  </p:cSld>
+  <p:clrMapOvr>
+    <a:masterClrMapping/>
+  </p:clrMapOvr>
+</p:notes>
+</file>
+
 <file path=ppt/notesSlides/notesSlide2.xml><?xml version="1.0" encoding="utf-8"?>
 <p:notes xmlns:a="http://schemas.openxmlformats.org/drawingml/2006/main" xmlns:r="http://schemas.openxmlformats.org/officeDocument/2006/relationships" xmlns:p="http://schemas.openxmlformats.org/presentationml/2006/main">
   <p:cSld>
@@ -1149,6 +1417,94 @@
             <a:fld id="{F7021451-1387-4CA6-816F-3879F97B5CBC}" type="slidenum">
               <a:rPr lang="en-US"/>
               <a:t>8</a:t>
+            </a:fld>
+            <a:endParaRPr lang="en-US"/>
+          </a:p>
+        </p:txBody>
+      </p:sp>
+    </p:spTree>
+    <p:extLst>
+      <p:ext uri="{BB962C8B-B14F-4D97-AF65-F5344CB8AC3E}">
+        <p14:creationId xmlns:p14="http://schemas.microsoft.com/office/powerpoint/2010/main" val="1024086991"/>
+      </p:ext>
+    </p:extLst>
+  </p:cSld>
+  <p:clrMapOvr>
+    <a:masterClrMapping/>
+  </p:clrMapOvr>
+</p:notes>
+</file>
+
+<file path=ppt/notesSlides/notesSlide9.xml><?xml version="1.0" encoding="utf-8"?>
+<p:notes xmlns:a="http://schemas.openxmlformats.org/drawingml/2006/main" xmlns:r="http://schemas.openxmlformats.org/officeDocument/2006/relationships" xmlns:p="http://schemas.openxmlformats.org/presentationml/2006/main">
+  <p:cSld>
+    <p:spTree>
+      <p:nvGrpSpPr>
+        <p:cNvPr id="1" name=""/>
+        <p:cNvGrpSpPr/>
+        <p:nvPr/>
+      </p:nvGrpSpPr>
+      <p:grpSpPr>
+        <a:xfrm>
+          <a:off x="0" y="0"/>
+          <a:ext cx="0" cy="0"/>
+          <a:chOff x="0" y="0"/>
+          <a:chExt cx="0" cy="0"/>
+        </a:xfrm>
+      </p:grpSpPr>
+      <p:sp>
+        <p:nvSpPr>
+          <p:cNvPr id="2" name="Slide Image Placeholder 1"/>
+          <p:cNvSpPr>
+            <a:spLocks noGrp="1" noRot="1" noChangeAspect="1"/>
+          </p:cNvSpPr>
+          <p:nvPr>
+            <p:ph type="sldImg"/>
+          </p:nvPr>
+        </p:nvSpPr>
+        <p:spPr/>
+      </p:sp>
+      <p:sp>
+        <p:nvSpPr>
+          <p:cNvPr id="3" name="Notes Placeholder 2"/>
+          <p:cNvSpPr>
+            <a:spLocks noGrp="1"/>
+          </p:cNvSpPr>
+          <p:nvPr>
+            <p:ph type="body" idx="1"/>
+          </p:nvPr>
+        </p:nvSpPr>
+        <p:spPr/>
+        <p:txBody>
+          <a:bodyPr/>
+          <a:lstStyle/>
+          <a:p>
+            <a:r>
+              <a:rPr lang="en-US" dirty="0"/>
+              <a:t/>
+            </a:r>
+            <a:endParaRPr lang="en-US" dirty="0"/>
+          </a:p>
+        </p:txBody>
+      </p:sp>
+      <p:sp>
+        <p:nvSpPr>
+          <p:cNvPr id="4" name="Slide Number Placeholder 3"/>
+          <p:cNvSpPr>
+            <a:spLocks noGrp="1"/>
+          </p:cNvSpPr>
+          <p:nvPr>
+            <p:ph type="sldNum" sz="quarter" idx="10"/>
+          </p:nvPr>
+        </p:nvSpPr>
+        <p:spPr/>
+        <p:txBody>
+          <a:bodyPr/>
+          <a:lstStyle/>
+          <a:p>
+            <a:fld id="{F7021451-1387-4CA6-816F-3879F97B5CBC}" type="slidenum">
+              <a:rPr lang="en-US"/>
+              <a:t>9</a:t>
             </a:fld>
             <a:endParaRPr lang="en-US"/>
           </a:p>
@@ -2025,6 +2381,1453 @@
 </p:sld>
 </file>
 
+<file path=ppt/slides/slide10.xml><?xml version="1.0" encoding="utf-8"?>
+<p:sld xmlns:a="http://schemas.openxmlformats.org/drawingml/2006/main" xmlns:r="http://schemas.openxmlformats.org/officeDocument/2006/relationships" xmlns:p="http://schemas.openxmlformats.org/presentationml/2006/main">
+  <p:cSld name="Slide 10">
+    <p:bg>
+      <p:bgPr>
+        <a:solidFill>
+          <a:srgbClr val="FFFFFF"/>
+        </a:solidFill>
+      </p:bgPr>
+    </p:bg>
+    <p:spTree>
+      <p:nvGrpSpPr>
+        <p:cNvPr id="1" name=""/>
+        <p:cNvGrpSpPr/>
+        <p:nvPr/>
+      </p:nvGrpSpPr>
+      <p:grpSpPr>
+        <a:xfrm>
+          <a:off x="0" y="0"/>
+          <a:ext cx="0" cy="0"/>
+          <a:chOff x="0" y="0"/>
+          <a:chExt cx="0" cy="0"/>
+        </a:xfrm>
+      </p:grpSpPr>
+      <p:sp>
+        <p:nvSpPr>
+          <p:cNvPr id="2" name="Text 0"/>
+          <p:cNvSpPr/>
+          <p:nvPr/>
+        </p:nvSpPr>
+        <p:spPr>
+          <a:xfrm>
+            <a:off x="640080" y="640080"/>
+            <a:ext cx="10058400" cy="731520"/>
+          </a:xfrm>
+          <a:prstGeom prst="rect">
+            <a:avLst/>
+          </a:prstGeom>
+          <a:noFill/>
+          <a:ln/>
+        </p:spPr>
+        <p:txBody>
+          <a:bodyPr wrap="square" rtlCol="0" anchor="ctr"/>
+          <a:lstStyle/>
+          <a:p>
+            <a:pPr indent="0" marL="0">
+              <a:buNone/>
+            </a:pPr>
+            <a:r>
+              <a:rPr lang="en-US" sz="3000" b="1" dirty="0">
+                <a:solidFill>
+                  <a:srgbClr val="1A1A1A"/>
+                </a:solidFill>
+                <a:latin typeface="Cambria" pitchFamily="34" charset="0"/>
+                <a:ea typeface="Cambria" pitchFamily="34" charset="-122"/>
+                <a:cs typeface="Cambria" pitchFamily="34" charset="-120"/>
+              </a:rPr>
+              <a:t>Reading &amp; homework</a:t>
+            </a:r>
+            <a:endParaRPr lang="en-US" sz="3000" dirty="0"/>
+          </a:p>
+        </p:txBody>
+      </p:sp>
+      <p:sp>
+        <p:nvSpPr>
+          <p:cNvPr id="3" name="Shape 1"/>
+          <p:cNvSpPr/>
+          <p:nvPr/>
+        </p:nvSpPr>
+        <p:spPr>
+          <a:xfrm>
+            <a:off x="640080" y="1810512"/>
+            <a:ext cx="219456" cy="219456"/>
+          </a:xfrm>
+          <a:prstGeom prst="ellipse">
+            <a:avLst/>
+          </a:prstGeom>
+          <a:solidFill>
+            <a:srgbClr val="7A3B2E"/>
+          </a:solidFill>
+          <a:ln/>
+        </p:spPr>
+      </p:sp>
+      <p:sp>
+        <p:nvSpPr>
+          <p:cNvPr id="4" name="Text 2"/>
+          <p:cNvSpPr/>
+          <p:nvPr/>
+        </p:nvSpPr>
+        <p:spPr>
+          <a:xfrm>
+            <a:off x="1051560" y="1737360"/>
+            <a:ext cx="10424160" cy="365760"/>
+          </a:xfrm>
+          <a:prstGeom prst="rect">
+            <a:avLst/>
+          </a:prstGeom>
+          <a:noFill/>
+          <a:ln/>
+        </p:spPr>
+        <p:txBody>
+          <a:bodyPr wrap="square" rtlCol="0" anchor="ctr"/>
+          <a:lstStyle/>
+          <a:p>
+            <a:pPr indent="0" marL="0">
+              <a:buNone/>
+            </a:pPr>
+            <a:r>
+              <a:rPr lang="en-US" sz="1500" b="1" dirty="0">
+                <a:solidFill>
+                  <a:srgbClr val="7A3B2E"/>
+                </a:solidFill>
+                <a:latin typeface="Calibri" pitchFamily="34" charset="0"/>
+                <a:ea typeface="Calibri" pitchFamily="34" charset="-122"/>
+                <a:cs typeface="Calibri" pitchFamily="34" charset="-120"/>
+              </a:rPr>
+              <a:t>Reading</a:t>
+            </a:r>
+            <a:endParaRPr lang="en-US" sz="1500" dirty="0"/>
+          </a:p>
+        </p:txBody>
+      </p:sp>
+      <p:sp>
+        <p:nvSpPr>
+          <p:cNvPr id="5" name="Text 3"/>
+          <p:cNvSpPr/>
+          <p:nvPr/>
+        </p:nvSpPr>
+        <p:spPr>
+          <a:xfrm>
+            <a:off x="1051560" y="2121408"/>
+            <a:ext cx="10424160" cy="731520"/>
+          </a:xfrm>
+          <a:prstGeom prst="rect">
+            <a:avLst/>
+          </a:prstGeom>
+          <a:noFill/>
+          <a:ln/>
+        </p:spPr>
+        <p:txBody>
+          <a:bodyPr wrap="square" rtlCol="0" anchor="t">
+            <a:spAutoFit/>
+          </a:bodyPr>
+          <a:lstStyle/>
+          <a:p>
+            <a:pPr indent="0" marL="0">
+              <a:buNone/>
+            </a:pPr>
+            <a:r>
+              <a:rPr lang="en-US" sz="1400" dirty="0">
+                <a:solidFill>
+                  <a:srgbClr val="1A1A1A"/>
+                </a:solidFill>
+                <a:latin typeface="Calibri" pitchFamily="34" charset="0"/>
+                <a:ea typeface="Calibri" pitchFamily="34" charset="-122"/>
+                <a:cs typeface="Calibri" pitchFamily="34" charset="-120"/>
+              </a:rPr>
+              <a:t>Alammar, The Illustrated Word2Vec, plus the debate: Kozlowski/Taddy/Evans, The Geometry of Culture (ASR 2019) vs. Bolukbasi et al. (2016)</a:t>
+            </a:r>
+            <a:endParaRPr lang="en-US" sz="1400" dirty="0"/>
+          </a:p>
+        </p:txBody>
+      </p:sp>
+      <p:sp>
+        <p:nvSpPr>
+          <p:cNvPr id="6" name="Shape 4"/>
+          <p:cNvSpPr/>
+          <p:nvPr/>
+        </p:nvSpPr>
+        <p:spPr>
+          <a:xfrm>
+            <a:off x="640080" y="2953512"/>
+            <a:ext cx="219456" cy="219456"/>
+          </a:xfrm>
+          <a:prstGeom prst="ellipse">
+            <a:avLst/>
+          </a:prstGeom>
+          <a:solidFill>
+            <a:srgbClr val="3F6F5F"/>
+          </a:solidFill>
+          <a:ln/>
+        </p:spPr>
+      </p:sp>
+      <p:sp>
+        <p:nvSpPr>
+          <p:cNvPr id="7" name="Text 5"/>
+          <p:cNvSpPr/>
+          <p:nvPr/>
+        </p:nvSpPr>
+        <p:spPr>
+          <a:xfrm>
+            <a:off x="1051560" y="2880360"/>
+            <a:ext cx="10424160" cy="365760"/>
+          </a:xfrm>
+          <a:prstGeom prst="rect">
+            <a:avLst/>
+          </a:prstGeom>
+          <a:noFill/>
+          <a:ln/>
+        </p:spPr>
+        <p:txBody>
+          <a:bodyPr wrap="square" rtlCol="0" anchor="ctr"/>
+          <a:lstStyle/>
+          <a:p>
+            <a:pPr indent="0" marL="0">
+              <a:buNone/>
+            </a:pPr>
+            <a:r>
+              <a:rPr lang="en-US" sz="1500" b="1" dirty="0">
+                <a:solidFill>
+                  <a:srgbClr val="3F6F5F"/>
+                </a:solidFill>
+                <a:latin typeface="Calibri" pitchFamily="34" charset="0"/>
+                <a:ea typeface="Calibri" pitchFamily="34" charset="-122"/>
+                <a:cs typeface="Calibri" pitchFamily="34" charset="-120"/>
+              </a:rPr>
+              <a:t>Supplement</a:t>
+            </a:r>
+            <a:endParaRPr lang="en-US" sz="1500" dirty="0"/>
+          </a:p>
+        </p:txBody>
+      </p:sp>
+      <p:sp>
+        <p:nvSpPr>
+          <p:cNvPr id="8" name="Text 6"/>
+          <p:cNvSpPr/>
+          <p:nvPr/>
+        </p:nvSpPr>
+        <p:spPr>
+          <a:xfrm>
+            <a:off x="1051560" y="3264408"/>
+            <a:ext cx="10424160" cy="731520"/>
+          </a:xfrm>
+          <a:prstGeom prst="rect">
+            <a:avLst/>
+          </a:prstGeom>
+          <a:noFill/>
+          <a:ln/>
+        </p:spPr>
+        <p:txBody>
+          <a:bodyPr wrap="square" rtlCol="0" anchor="t">
+            <a:spAutoFit/>
+          </a:bodyPr>
+          <a:lstStyle/>
+          <a:p>
+            <a:pPr indent="0" marL="0">
+              <a:buNone/>
+            </a:pPr>
+            <a:r>
+              <a:rPr lang="en-US" sz="1400" dirty="0">
+                <a:solidFill>
+                  <a:srgbClr val="1A1A1A"/>
+                </a:solidFill>
+                <a:latin typeface="Calibri" pitchFamily="34" charset="0"/>
+                <a:ea typeface="Calibri" pitchFamily="34" charset="-122"/>
+                <a:cs typeface="Calibri" pitchFamily="34" charset="-120"/>
+              </a:rPr>
+              <a:t>The second pairing: Caliskan et al. (2017) vs. Soni/Klein, How Words Lead to Justice; Anderson et al., Spotify diversity</a:t>
+            </a:r>
+            <a:endParaRPr lang="en-US" sz="1400" dirty="0"/>
+          </a:p>
+        </p:txBody>
+      </p:sp>
+      <p:sp>
+        <p:nvSpPr>
+          <p:cNvPr id="9" name="Shape 7"/>
+          <p:cNvSpPr/>
+          <p:nvPr/>
+        </p:nvSpPr>
+        <p:spPr>
+          <a:xfrm>
+            <a:off x="640080" y="4096512"/>
+            <a:ext cx="219456" cy="219456"/>
+          </a:xfrm>
+          <a:prstGeom prst="ellipse">
+            <a:avLst/>
+          </a:prstGeom>
+          <a:solidFill>
+            <a:srgbClr val="B9852F"/>
+          </a:solidFill>
+          <a:ln/>
+        </p:spPr>
+      </p:sp>
+      <p:sp>
+        <p:nvSpPr>
+          <p:cNvPr id="10" name="Text 8"/>
+          <p:cNvSpPr/>
+          <p:nvPr/>
+        </p:nvSpPr>
+        <p:spPr>
+          <a:xfrm>
+            <a:off x="1051560" y="4023360"/>
+            <a:ext cx="10424160" cy="365760"/>
+          </a:xfrm>
+          <a:prstGeom prst="rect">
+            <a:avLst/>
+          </a:prstGeom>
+          <a:noFill/>
+          <a:ln/>
+        </p:spPr>
+        <p:txBody>
+          <a:bodyPr wrap="square" rtlCol="0" anchor="ctr"/>
+          <a:lstStyle/>
+          <a:p>
+            <a:pPr indent="0" marL="0">
+              <a:buNone/>
+            </a:pPr>
+            <a:r>
+              <a:rPr lang="en-US" sz="1500" b="1" dirty="0">
+                <a:solidFill>
+                  <a:srgbClr val="B9852F"/>
+                </a:solidFill>
+                <a:latin typeface="Calibri" pitchFamily="34" charset="0"/>
+                <a:ea typeface="Calibri" pitchFamily="34" charset="-122"/>
+                <a:cs typeface="Calibri" pitchFamily="34" charset="-120"/>
+              </a:rPr>
+              <a:t>Sketch</a:t>
+            </a:r>
+            <a:endParaRPr lang="en-US" sz="1500" dirty="0"/>
+          </a:p>
+        </p:txBody>
+      </p:sp>
+      <p:sp>
+        <p:nvSpPr>
+          <p:cNvPr id="11" name="Text 9"/>
+          <p:cNvSpPr/>
+          <p:nvPr/>
+        </p:nvSpPr>
+        <p:spPr>
+          <a:xfrm>
+            <a:off x="1051560" y="4407408"/>
+            <a:ext cx="10424160" cy="731520"/>
+          </a:xfrm>
+          <a:prstGeom prst="rect">
+            <a:avLst/>
+          </a:prstGeom>
+          <a:noFill/>
+          <a:ln/>
+        </p:spPr>
+        <p:txBody>
+          <a:bodyPr wrap="square" rtlCol="0" anchor="t">
+            <a:spAutoFit/>
+          </a:bodyPr>
+          <a:lstStyle/>
+          <a:p>
+            <a:pPr indent="0" marL="0">
+              <a:buNone/>
+            </a:pPr>
+            <a:r>
+              <a:rPr lang="en-US" sz="1400" dirty="0">
+                <a:solidFill>
+                  <a:srgbClr val="1A1A1A"/>
+                </a:solidFill>
+                <a:latin typeface="Calibri" pitchFamily="34" charset="0"/>
+                <a:ea typeface="Calibri" pitchFamily="34" charset="-122"/>
+                <a:cs typeface="Calibri" pitchFamily="34" charset="-120"/>
+              </a:rPr>
+              <a:t>Toggle PCA vs. t-SNE and screenshot how the map changes; name one cluster you believe and one you don't.</a:t>
+            </a:r>
+            <a:endParaRPr lang="en-US" sz="1400" dirty="0"/>
+          </a:p>
+        </p:txBody>
+      </p:sp>
+      <p:sp>
+        <p:nvSpPr>
+          <p:cNvPr id="12" name="Shape 10"/>
+          <p:cNvSpPr/>
+          <p:nvPr/>
+        </p:nvSpPr>
+        <p:spPr>
+          <a:xfrm>
+            <a:off x="640080" y="5239512"/>
+            <a:ext cx="219456" cy="219456"/>
+          </a:xfrm>
+          <a:prstGeom prst="ellipse">
+            <a:avLst/>
+          </a:prstGeom>
+          <a:solidFill>
+            <a:srgbClr val="7A3B2E"/>
+          </a:solidFill>
+          <a:ln/>
+        </p:spPr>
+      </p:sp>
+      <p:sp>
+        <p:nvSpPr>
+          <p:cNvPr id="13" name="Text 11"/>
+          <p:cNvSpPr/>
+          <p:nvPr/>
+        </p:nvSpPr>
+        <p:spPr>
+          <a:xfrm>
+            <a:off x="1051560" y="5166360"/>
+            <a:ext cx="10424160" cy="365760"/>
+          </a:xfrm>
+          <a:prstGeom prst="rect">
+            <a:avLst/>
+          </a:prstGeom>
+          <a:noFill/>
+          <a:ln/>
+        </p:spPr>
+        <p:txBody>
+          <a:bodyPr wrap="square" rtlCol="0" anchor="ctr"/>
+          <a:lstStyle/>
+          <a:p>
+            <a:pPr indent="0" marL="0">
+              <a:buNone/>
+            </a:pPr>
+            <a:r>
+              <a:rPr lang="en-US" sz="1500" b="1" dirty="0">
+                <a:solidFill>
+                  <a:srgbClr val="7A3B2E"/>
+                </a:solidFill>
+                <a:latin typeface="Calibri" pitchFamily="34" charset="0"/>
+                <a:ea typeface="Calibri" pitchFamily="34" charset="-122"/>
+                <a:cs typeface="Calibri" pitchFamily="34" charset="-120"/>
+              </a:rPr>
+              <a:t>Check (AI closed)</a:t>
+            </a:r>
+            <a:endParaRPr lang="en-US" sz="1500" dirty="0"/>
+          </a:p>
+        </p:txBody>
+      </p:sp>
+      <p:sp>
+        <p:nvSpPr>
+          <p:cNvPr id="14" name="Text 12"/>
+          <p:cNvSpPr/>
+          <p:nvPr/>
+        </p:nvSpPr>
+        <p:spPr>
+          <a:xfrm>
+            <a:off x="1051560" y="5550408"/>
+            <a:ext cx="10424160" cy="731520"/>
+          </a:xfrm>
+          <a:prstGeom prst="rect">
+            <a:avLst/>
+          </a:prstGeom>
+          <a:noFill/>
+          <a:ln/>
+        </p:spPr>
+        <p:txBody>
+          <a:bodyPr wrap="square" rtlCol="0" anchor="t">
+            <a:spAutoFit/>
+          </a:bodyPr>
+          <a:lstStyle/>
+          <a:p>
+            <a:pPr indent="0" marL="0">
+              <a:buNone/>
+            </a:pPr>
+            <a:r>
+              <a:rPr lang="en-US" sz="1400" dirty="0">
+                <a:solidFill>
+                  <a:srgbClr val="1A1A1A"/>
+                </a:solidFill>
+                <a:latin typeface="Calibri" pitchFamily="34" charset="0"/>
+                <a:ea typeface="Calibri" pitchFamily="34" charset="-122"/>
+                <a:cs typeface="Calibri" pitchFamily="34" charset="-120"/>
+              </a:rPr>
+              <a:t>Explain it: on your map, name one cluster you believe is real and one that's probably a projection artifact, and how you'd tell. (Competency 4.)</a:t>
+            </a:r>
+            <a:endParaRPr lang="en-US" sz="1400" dirty="0"/>
+          </a:p>
+        </p:txBody>
+      </p:sp>
+    </p:spTree>
+  </p:cSld>
+  <p:clrMapOvr>
+    <a:masterClrMapping/>
+  </p:clrMapOvr>
+</p:sld>
+</file>
+
+<file path=ppt/slides/slide11.xml><?xml version="1.0" encoding="utf-8"?>
+<p:sld xmlns:a="http://schemas.openxmlformats.org/drawingml/2006/main" xmlns:r="http://schemas.openxmlformats.org/officeDocument/2006/relationships" xmlns:p="http://schemas.openxmlformats.org/presentationml/2006/main">
+  <p:cSld name="Slide 11">
+    <p:bg>
+      <p:bgPr>
+        <a:solidFill>
+          <a:srgbClr val="FFFFFF"/>
+        </a:solidFill>
+      </p:bgPr>
+    </p:bg>
+    <p:spTree>
+      <p:nvGrpSpPr>
+        <p:cNvPr id="1" name=""/>
+        <p:cNvGrpSpPr/>
+        <p:nvPr/>
+      </p:nvGrpSpPr>
+      <p:grpSpPr>
+        <a:xfrm>
+          <a:off x="0" y="0"/>
+          <a:ext cx="0" cy="0"/>
+          <a:chOff x="0" y="0"/>
+          <a:chExt cx="0" cy="0"/>
+        </a:xfrm>
+      </p:grpSpPr>
+      <p:sp>
+        <p:nvSpPr>
+          <p:cNvPr id="2" name="Text 0"/>
+          <p:cNvSpPr/>
+          <p:nvPr/>
+        </p:nvSpPr>
+        <p:spPr>
+          <a:xfrm>
+            <a:off x="640080" y="640080"/>
+            <a:ext cx="10058400" cy="320040"/>
+          </a:xfrm>
+          <a:prstGeom prst="rect">
+            <a:avLst/>
+          </a:prstGeom>
+          <a:noFill/>
+          <a:ln/>
+        </p:spPr>
+        <p:txBody>
+          <a:bodyPr wrap="square" rtlCol="0" anchor="ctr"/>
+          <a:lstStyle/>
+          <a:p>
+            <a:pPr indent="0" marL="0">
+              <a:buNone/>
+            </a:pPr>
+            <a:r>
+              <a:rPr lang="en-US" sz="1300" b="1" spc="300" kern="0" dirty="0">
+                <a:solidFill>
+                  <a:srgbClr val="7A3B2E"/>
+                </a:solidFill>
+                <a:latin typeface="Calibri" pitchFamily="34" charset="0"/>
+                <a:ea typeface="Calibri" pitchFamily="34" charset="-122"/>
+                <a:cs typeface="Calibri" pitchFamily="34" charset="-120"/>
+              </a:rPr>
+              <a:t>HOW THIS WEEK CONNECTS</a:t>
+            </a:r>
+            <a:endParaRPr lang="en-US" sz="1300" dirty="0"/>
+          </a:p>
+        </p:txBody>
+      </p:sp>
+      <p:sp>
+        <p:nvSpPr>
+          <p:cNvPr id="3" name="Text 1"/>
+          <p:cNvSpPr/>
+          <p:nvPr/>
+        </p:nvSpPr>
+        <p:spPr>
+          <a:xfrm>
+            <a:off x="640080" y="987552"/>
+            <a:ext cx="10058400" cy="640080"/>
+          </a:xfrm>
+          <a:prstGeom prst="rect">
+            <a:avLst/>
+          </a:prstGeom>
+          <a:noFill/>
+          <a:ln/>
+        </p:spPr>
+        <p:txBody>
+          <a:bodyPr wrap="square" rtlCol="0" anchor="ctr"/>
+          <a:lstStyle/>
+          <a:p>
+            <a:pPr indent="0" marL="0">
+              <a:buNone/>
+            </a:pPr>
+            <a:r>
+              <a:rPr lang="en-US" sz="2800" b="1" dirty="0">
+                <a:solidFill>
+                  <a:srgbClr val="1A1A1A"/>
+                </a:solidFill>
+                <a:latin typeface="Cambria" pitchFamily="34" charset="0"/>
+                <a:ea typeface="Cambria" pitchFamily="34" charset="-122"/>
+                <a:cs typeface="Cambria" pitchFamily="34" charset="-120"/>
+              </a:rPr>
+              <a:t>The course's through-lines</a:t>
+            </a:r>
+            <a:endParaRPr lang="en-US" sz="2800" dirty="0"/>
+          </a:p>
+        </p:txBody>
+      </p:sp>
+      <p:sp>
+        <p:nvSpPr>
+          <p:cNvPr id="4" name="Shape 2"/>
+          <p:cNvSpPr/>
+          <p:nvPr/>
+        </p:nvSpPr>
+        <p:spPr>
+          <a:xfrm>
+            <a:off x="640080" y="2057400"/>
+            <a:ext cx="457200" cy="457200"/>
+          </a:xfrm>
+          <a:prstGeom prst="roundRect">
+            <a:avLst>
+              <a:gd name="adj" fmla="val 16000"/>
+            </a:avLst>
+          </a:prstGeom>
+          <a:solidFill>
+            <a:srgbClr val="7A3B2E"/>
+          </a:solidFill>
+          <a:ln/>
+        </p:spPr>
+      </p:sp>
+      <p:sp>
+        <p:nvSpPr>
+          <p:cNvPr id="5" name="Text 3"/>
+          <p:cNvSpPr/>
+          <p:nvPr/>
+        </p:nvSpPr>
+        <p:spPr>
+          <a:xfrm>
+            <a:off x="640080" y="2057400"/>
+            <a:ext cx="457200" cy="457200"/>
+          </a:xfrm>
+          <a:prstGeom prst="rect">
+            <a:avLst/>
+          </a:prstGeom>
+          <a:noFill/>
+          <a:ln/>
+        </p:spPr>
+        <p:txBody>
+          <a:bodyPr wrap="square" rtlCol="0" anchor="ctr"/>
+          <a:lstStyle/>
+          <a:p>
+            <a:pPr algn="ctr" indent="0" marL="0">
+              <a:buNone/>
+            </a:pPr>
+            <a:r>
+              <a:rPr lang="en-US" sz="2000" b="1" dirty="0">
+                <a:solidFill>
+                  <a:srgbClr val="FFFFFF"/>
+                </a:solidFill>
+                <a:latin typeface="Cambria" pitchFamily="34" charset="0"/>
+                <a:ea typeface="Cambria" pitchFamily="34" charset="-122"/>
+                <a:cs typeface="Cambria" pitchFamily="34" charset="-120"/>
+              </a:rPr>
+              <a:t>1</a:t>
+            </a:r>
+            <a:endParaRPr lang="en-US" sz="2000" dirty="0"/>
+          </a:p>
+        </p:txBody>
+      </p:sp>
+      <p:sp>
+        <p:nvSpPr>
+          <p:cNvPr id="6" name="Text 4"/>
+          <p:cNvSpPr/>
+          <p:nvPr/>
+        </p:nvSpPr>
+        <p:spPr>
+          <a:xfrm>
+            <a:off x="1371600" y="2020824"/>
+            <a:ext cx="10332720" cy="411480"/>
+          </a:xfrm>
+          <a:prstGeom prst="rect">
+            <a:avLst/>
+          </a:prstGeom>
+          <a:noFill/>
+          <a:ln/>
+        </p:spPr>
+        <p:txBody>
+          <a:bodyPr wrap="square" rtlCol="0" anchor="ctr"/>
+          <a:lstStyle/>
+          <a:p>
+            <a:pPr indent="0" marL="0">
+              <a:buNone/>
+            </a:pPr>
+            <a:r>
+              <a:rPr lang="en-US" sz="1900" b="1" dirty="0">
+                <a:solidFill>
+                  <a:srgbClr val="7A3B2E"/>
+                </a:solidFill>
+                <a:latin typeface="Cambria" pitchFamily="34" charset="0"/>
+                <a:ea typeface="Cambria" pitchFamily="34" charset="-122"/>
+                <a:cs typeface="Cambria" pitchFamily="34" charset="-120"/>
+              </a:rPr>
+              <a:t>Beyond counting (the payoff)</a:t>
+            </a:r>
+            <a:endParaRPr lang="en-US" sz="1900" dirty="0"/>
+          </a:p>
+        </p:txBody>
+      </p:sp>
+      <p:sp>
+        <p:nvSpPr>
+          <p:cNvPr id="7" name="Text 5"/>
+          <p:cNvSpPr/>
+          <p:nvPr/>
+        </p:nvSpPr>
+        <p:spPr>
+          <a:xfrm>
+            <a:off x="1371600" y="2441448"/>
+            <a:ext cx="10332720" cy="914400"/>
+          </a:xfrm>
+          <a:prstGeom prst="rect">
+            <a:avLst/>
+          </a:prstGeom>
+          <a:noFill/>
+          <a:ln/>
+        </p:spPr>
+        <p:txBody>
+          <a:bodyPr wrap="square" rtlCol="0" anchor="t">
+            <a:spAutoFit/>
+          </a:bodyPr>
+          <a:lstStyle/>
+          <a:p>
+            <a:pPr indent="0" marL="0">
+              <a:lnSpc>
+                <a:spcPct val="112000"/>
+              </a:lnSpc>
+              <a:buNone/>
+            </a:pPr>
+            <a:r>
+              <a:rPr lang="en-US" sz="1450" dirty="0">
+                <a:solidFill>
+                  <a:srgbClr val="1A1A1A"/>
+                </a:solidFill>
+                <a:latin typeface="Calibri" pitchFamily="34" charset="0"/>
+                <a:ea typeface="Calibri" pitchFamily="34" charset="-122"/>
+                <a:cs typeface="Calibri" pitchFamily="34" charset="-120"/>
+              </a:rPr>
+              <a:t>The same counting question from Week 2, now embedded: clusters counting could not see.</a:t>
+            </a:r>
+            <a:endParaRPr lang="en-US" sz="1450" dirty="0"/>
+          </a:p>
+        </p:txBody>
+      </p:sp>
+      <p:sp>
+        <p:nvSpPr>
+          <p:cNvPr id="8" name="Shape 6"/>
+          <p:cNvSpPr/>
+          <p:nvPr/>
+        </p:nvSpPr>
+        <p:spPr>
+          <a:xfrm>
+            <a:off x="640080" y="3520440"/>
+            <a:ext cx="457200" cy="457200"/>
+          </a:xfrm>
+          <a:prstGeom prst="roundRect">
+            <a:avLst>
+              <a:gd name="adj" fmla="val 16000"/>
+            </a:avLst>
+          </a:prstGeom>
+          <a:solidFill>
+            <a:srgbClr val="3F6F5F"/>
+          </a:solidFill>
+          <a:ln/>
+        </p:spPr>
+      </p:sp>
+      <p:sp>
+        <p:nvSpPr>
+          <p:cNvPr id="9" name="Text 7"/>
+          <p:cNvSpPr/>
+          <p:nvPr/>
+        </p:nvSpPr>
+        <p:spPr>
+          <a:xfrm>
+            <a:off x="640080" y="3520440"/>
+            <a:ext cx="457200" cy="457200"/>
+          </a:xfrm>
+          <a:prstGeom prst="rect">
+            <a:avLst/>
+          </a:prstGeom>
+          <a:noFill/>
+          <a:ln/>
+        </p:spPr>
+        <p:txBody>
+          <a:bodyPr wrap="square" rtlCol="0" anchor="ctr"/>
+          <a:lstStyle/>
+          <a:p>
+            <a:pPr algn="ctr" indent="0" marL="0">
+              <a:buNone/>
+            </a:pPr>
+            <a:r>
+              <a:rPr lang="en-US" sz="2000" b="1" dirty="0">
+                <a:solidFill>
+                  <a:srgbClr val="FFFFFF"/>
+                </a:solidFill>
+                <a:latin typeface="Cambria" pitchFamily="34" charset="0"/>
+                <a:ea typeface="Cambria" pitchFamily="34" charset="-122"/>
+                <a:cs typeface="Cambria" pitchFamily="34" charset="-120"/>
+              </a:rPr>
+              <a:t>2</a:t>
+            </a:r>
+            <a:endParaRPr lang="en-US" sz="2000" dirty="0"/>
+          </a:p>
+        </p:txBody>
+      </p:sp>
+      <p:sp>
+        <p:nvSpPr>
+          <p:cNvPr id="10" name="Text 8"/>
+          <p:cNvSpPr/>
+          <p:nvPr/>
+        </p:nvSpPr>
+        <p:spPr>
+          <a:xfrm>
+            <a:off x="1371600" y="3483864"/>
+            <a:ext cx="10332720" cy="411480"/>
+          </a:xfrm>
+          <a:prstGeom prst="rect">
+            <a:avLst/>
+          </a:prstGeom>
+          <a:noFill/>
+          <a:ln/>
+        </p:spPr>
+        <p:txBody>
+          <a:bodyPr wrap="square" rtlCol="0" anchor="ctr"/>
+          <a:lstStyle/>
+          <a:p>
+            <a:pPr indent="0" marL="0">
+              <a:buNone/>
+            </a:pPr>
+            <a:r>
+              <a:rPr lang="en-US" sz="1900" b="1" dirty="0">
+                <a:solidFill>
+                  <a:srgbClr val="3F6F5F"/>
+                </a:solidFill>
+                <a:latin typeface="Cambria" pitchFamily="34" charset="0"/>
+                <a:ea typeface="Cambria" pitchFamily="34" charset="-122"/>
+                <a:cs typeface="Cambria" pitchFamily="34" charset="-120"/>
+              </a:rPr>
+              <a:t>Every chart is a choice</a:t>
+            </a:r>
+            <a:endParaRPr lang="en-US" sz="1900" dirty="0"/>
+          </a:p>
+        </p:txBody>
+      </p:sp>
+      <p:sp>
+        <p:nvSpPr>
+          <p:cNvPr id="11" name="Text 9"/>
+          <p:cNvSpPr/>
+          <p:nvPr/>
+        </p:nvSpPr>
+        <p:spPr>
+          <a:xfrm>
+            <a:off x="1371600" y="3904488"/>
+            <a:ext cx="10332720" cy="914400"/>
+          </a:xfrm>
+          <a:prstGeom prst="rect">
+            <a:avLst/>
+          </a:prstGeom>
+          <a:noFill/>
+          <a:ln/>
+        </p:spPr>
+        <p:txBody>
+          <a:bodyPr wrap="square" rtlCol="0" anchor="t">
+            <a:spAutoFit/>
+          </a:bodyPr>
+          <a:lstStyle/>
+          <a:p>
+            <a:pPr indent="0" marL="0">
+              <a:lnSpc>
+                <a:spcPct val="112000"/>
+              </a:lnSpc>
+              <a:buNone/>
+            </a:pPr>
+            <a:r>
+              <a:rPr lang="en-US" sz="1450" dirty="0">
+                <a:solidFill>
+                  <a:srgbClr val="1A1A1A"/>
+                </a:solidFill>
+                <a:latin typeface="Calibri" pitchFamily="34" charset="0"/>
+                <a:ea typeface="Calibri" pitchFamily="34" charset="-122"/>
+                <a:cs typeface="Calibri" pitchFamily="34" charset="-120"/>
+              </a:rPr>
+              <a:t>PCA vs t-SNE rearranges the same data; the picture made a decision.</a:t>
+            </a:r>
+            <a:endParaRPr lang="en-US" sz="1450" dirty="0"/>
+          </a:p>
+        </p:txBody>
+      </p:sp>
+      <p:sp>
+        <p:nvSpPr>
+          <p:cNvPr id="12" name="Shape 10"/>
+          <p:cNvSpPr/>
+          <p:nvPr/>
+        </p:nvSpPr>
+        <p:spPr>
+          <a:xfrm>
+            <a:off x="640080" y="4983480"/>
+            <a:ext cx="457200" cy="457200"/>
+          </a:xfrm>
+          <a:prstGeom prst="roundRect">
+            <a:avLst>
+              <a:gd name="adj" fmla="val 16000"/>
+            </a:avLst>
+          </a:prstGeom>
+          <a:solidFill>
+            <a:srgbClr val="B9852F"/>
+          </a:solidFill>
+          <a:ln/>
+        </p:spPr>
+      </p:sp>
+      <p:sp>
+        <p:nvSpPr>
+          <p:cNvPr id="13" name="Text 11"/>
+          <p:cNvSpPr/>
+          <p:nvPr/>
+        </p:nvSpPr>
+        <p:spPr>
+          <a:xfrm>
+            <a:off x="640080" y="4983480"/>
+            <a:ext cx="457200" cy="457200"/>
+          </a:xfrm>
+          <a:prstGeom prst="rect">
+            <a:avLst/>
+          </a:prstGeom>
+          <a:noFill/>
+          <a:ln/>
+        </p:spPr>
+        <p:txBody>
+          <a:bodyPr wrap="square" rtlCol="0" anchor="ctr"/>
+          <a:lstStyle/>
+          <a:p>
+            <a:pPr algn="ctr" indent="0" marL="0">
+              <a:buNone/>
+            </a:pPr>
+            <a:r>
+              <a:rPr lang="en-US" sz="2000" b="1" dirty="0">
+                <a:solidFill>
+                  <a:srgbClr val="FFFFFF"/>
+                </a:solidFill>
+                <a:latin typeface="Cambria" pitchFamily="34" charset="0"/>
+                <a:ea typeface="Cambria" pitchFamily="34" charset="-122"/>
+                <a:cs typeface="Cambria" pitchFamily="34" charset="-120"/>
+              </a:rPr>
+              <a:t>3</a:t>
+            </a:r>
+            <a:endParaRPr lang="en-US" sz="2000" dirty="0"/>
+          </a:p>
+        </p:txBody>
+      </p:sp>
+      <p:sp>
+        <p:nvSpPr>
+          <p:cNvPr id="14" name="Text 12"/>
+          <p:cNvSpPr/>
+          <p:nvPr/>
+        </p:nvSpPr>
+        <p:spPr>
+          <a:xfrm>
+            <a:off x="1371600" y="4946904"/>
+            <a:ext cx="10332720" cy="411480"/>
+          </a:xfrm>
+          <a:prstGeom prst="rect">
+            <a:avLst/>
+          </a:prstGeom>
+          <a:noFill/>
+          <a:ln/>
+        </p:spPr>
+        <p:txBody>
+          <a:bodyPr wrap="square" rtlCol="0" anchor="ctr"/>
+          <a:lstStyle/>
+          <a:p>
+            <a:pPr indent="0" marL="0">
+              <a:buNone/>
+            </a:pPr>
+            <a:r>
+              <a:rPr lang="en-US" sz="1900" b="1" dirty="0">
+                <a:solidFill>
+                  <a:srgbClr val="B9852F"/>
+                </a:solidFill>
+                <a:latin typeface="Cambria" pitchFamily="34" charset="0"/>
+                <a:ea typeface="Cambria" pitchFamily="34" charset="-122"/>
+                <a:cs typeface="Cambria" pitchFamily="34" charset="-120"/>
+              </a:rPr>
+              <a:t>Whose data</a:t>
+            </a:r>
+            <a:endParaRPr lang="en-US" sz="1900" dirty="0"/>
+          </a:p>
+        </p:txBody>
+      </p:sp>
+      <p:sp>
+        <p:nvSpPr>
+          <p:cNvPr id="15" name="Text 13"/>
+          <p:cNvSpPr/>
+          <p:nvPr/>
+        </p:nvSpPr>
+        <p:spPr>
+          <a:xfrm>
+            <a:off x="1371600" y="5367528"/>
+            <a:ext cx="10332720" cy="914400"/>
+          </a:xfrm>
+          <a:prstGeom prst="rect">
+            <a:avLst/>
+          </a:prstGeom>
+          <a:noFill/>
+          <a:ln/>
+        </p:spPr>
+        <p:txBody>
+          <a:bodyPr wrap="square" rtlCol="0" anchor="t">
+            <a:spAutoFit/>
+          </a:bodyPr>
+          <a:lstStyle/>
+          <a:p>
+            <a:pPr indent="0" marL="0">
+              <a:lnSpc>
+                <a:spcPct val="112000"/>
+              </a:lnSpc>
+              <a:buNone/>
+            </a:pPr>
+            <a:r>
+              <a:rPr lang="en-US" sz="1450" dirty="0">
+                <a:solidFill>
+                  <a:srgbClr val="1A1A1A"/>
+                </a:solidFill>
+                <a:latin typeface="Calibri" pitchFamily="34" charset="0"/>
+                <a:ea typeface="Calibri" pitchFamily="34" charset="-122"/>
+                <a:cs typeface="Calibri" pitchFamily="34" charset="-120"/>
+              </a:rPr>
+              <a:t>A direction found in the corpus: cultural discovery (Kozlowski) or encoded prejudice (Bolukbasi)?</a:t>
+            </a:r>
+            <a:endParaRPr lang="en-US" sz="1450" dirty="0"/>
+          </a:p>
+        </p:txBody>
+      </p:sp>
+    </p:spTree>
+  </p:cSld>
+  <p:clrMapOvr>
+    <a:masterClrMapping/>
+  </p:clrMapOvr>
+</p:sld>
+</file>
+
+<file path=ppt/slides/slide12.xml><?xml version="1.0" encoding="utf-8"?>
+<p:sld xmlns:a="http://schemas.openxmlformats.org/drawingml/2006/main" xmlns:r="http://schemas.openxmlformats.org/officeDocument/2006/relationships" xmlns:p="http://schemas.openxmlformats.org/presentationml/2006/main">
+  <p:cSld name="Slide 12">
+    <p:bg>
+      <p:bgPr>
+        <a:solidFill>
+          <a:srgbClr val="4E261D"/>
+        </a:solidFill>
+      </p:bgPr>
+    </p:bg>
+    <p:spTree>
+      <p:nvGrpSpPr>
+        <p:cNvPr id="1" name=""/>
+        <p:cNvGrpSpPr/>
+        <p:nvPr/>
+      </p:nvGrpSpPr>
+      <p:grpSpPr>
+        <a:xfrm>
+          <a:off x="0" y="0"/>
+          <a:ext cx="0" cy="0"/>
+          <a:chOff x="0" y="0"/>
+          <a:chExt cx="0" cy="0"/>
+        </a:xfrm>
+      </p:grpSpPr>
+      <p:sp>
+        <p:nvSpPr>
+          <p:cNvPr id="2" name="Text 0"/>
+          <p:cNvSpPr/>
+          <p:nvPr/>
+        </p:nvSpPr>
+        <p:spPr>
+          <a:xfrm>
+            <a:off x="640080" y="1005840"/>
+            <a:ext cx="8229600" cy="320040"/>
+          </a:xfrm>
+          <a:prstGeom prst="rect">
+            <a:avLst/>
+          </a:prstGeom>
+          <a:noFill/>
+          <a:ln/>
+        </p:spPr>
+        <p:txBody>
+          <a:bodyPr wrap="square" rtlCol="0" anchor="ctr"/>
+          <a:lstStyle/>
+          <a:p>
+            <a:pPr indent="0" marL="0">
+              <a:buNone/>
+            </a:pPr>
+            <a:r>
+              <a:rPr lang="en-US" sz="1300" b="1" spc="300" kern="0" dirty="0">
+                <a:solidFill>
+                  <a:srgbClr val="B9852F"/>
+                </a:solidFill>
+                <a:latin typeface="Calibri" pitchFamily="34" charset="0"/>
+                <a:ea typeface="Calibri" pitchFamily="34" charset="-122"/>
+                <a:cs typeface="Calibri" pitchFamily="34" charset="-120"/>
+              </a:rPr>
+              <a:t>THE CHECK, AI CLOSED</a:t>
+            </a:r>
+            <a:endParaRPr lang="en-US" sz="1300" dirty="0"/>
+          </a:p>
+        </p:txBody>
+      </p:sp>
+      <p:sp>
+        <p:nvSpPr>
+          <p:cNvPr id="3" name="Text 1"/>
+          <p:cNvSpPr/>
+          <p:nvPr/>
+        </p:nvSpPr>
+        <p:spPr>
+          <a:xfrm>
+            <a:off x="640080" y="1645920"/>
+            <a:ext cx="8686800" cy="3108960"/>
+          </a:xfrm>
+          <a:prstGeom prst="rect">
+            <a:avLst/>
+          </a:prstGeom>
+          <a:noFill/>
+          <a:ln/>
+        </p:spPr>
+        <p:txBody>
+          <a:bodyPr wrap="square" rtlCol="0" anchor="t">
+            <a:spAutoFit/>
+          </a:bodyPr>
+          <a:lstStyle/>
+          <a:p>
+            <a:pPr indent="0" marL="0">
+              <a:lnSpc>
+                <a:spcPct val="115000"/>
+              </a:lnSpc>
+              <a:buNone/>
+            </a:pPr>
+            <a:r>
+              <a:rPr lang="en-US" sz="2600" dirty="0">
+                <a:solidFill>
+                  <a:srgbClr val="FFFFFF"/>
+                </a:solidFill>
+                <a:latin typeface="Cambria" pitchFamily="34" charset="0"/>
+                <a:ea typeface="Cambria" pitchFamily="34" charset="-122"/>
+                <a:cs typeface="Cambria" pitchFamily="34" charset="-120"/>
+              </a:rPr>
+              <a:t>Explain it: on your map, name one cluster you believe is real and one that's probably a projection artifact, and how you'd tell. (Competency 4.)</a:t>
+            </a:r>
+            <a:endParaRPr lang="en-US" sz="2600" dirty="0"/>
+          </a:p>
+        </p:txBody>
+      </p:sp>
+      <p:sp>
+        <p:nvSpPr>
+          <p:cNvPr id="4" name="Text 2"/>
+          <p:cNvSpPr/>
+          <p:nvPr/>
+        </p:nvSpPr>
+        <p:spPr>
+          <a:xfrm>
+            <a:off x="640080" y="6126480"/>
+            <a:ext cx="7315200" cy="365760"/>
+          </a:xfrm>
+          <a:prstGeom prst="rect">
+            <a:avLst/>
+          </a:prstGeom>
+          <a:noFill/>
+          <a:ln/>
+        </p:spPr>
+        <p:txBody>
+          <a:bodyPr wrap="square" rtlCol="0" anchor="ctr"/>
+          <a:lstStyle/>
+          <a:p>
+            <a:pPr indent="0" marL="0">
+              <a:buNone/>
+            </a:pPr>
+            <a:r>
+              <a:rPr lang="en-US" sz="1200" dirty="0">
+                <a:solidFill>
+                  <a:srgbClr val="E8DCD6"/>
+                </a:solidFill>
+                <a:latin typeface="Calibri" pitchFamily="34" charset="0"/>
+                <a:ea typeface="Calibri" pitchFamily="34" charset="-122"/>
+                <a:cs typeface="Calibri" pitchFamily="34" charset="-120"/>
+              </a:rPr>
+              <a:t>Culture as Data  ·  Week 5</a:t>
+            </a:r>
+            <a:endParaRPr lang="en-US" sz="1200" dirty="0"/>
+          </a:p>
+        </p:txBody>
+      </p:sp>
+      <p:sp>
+        <p:nvSpPr>
+          <p:cNvPr id="5" name="Shape 3"/>
+          <p:cNvSpPr/>
+          <p:nvPr/>
+        </p:nvSpPr>
+        <p:spPr>
+          <a:xfrm>
+            <a:off x="9604541" y="5211088"/>
+            <a:ext cx="51907" cy="51907"/>
+          </a:xfrm>
+          <a:prstGeom prst="ellipse">
+            <a:avLst/>
+          </a:prstGeom>
+          <a:solidFill>
+            <a:srgbClr val="7A3B2E"/>
+          </a:solidFill>
+          <a:ln/>
+        </p:spPr>
+      </p:sp>
+      <p:sp>
+        <p:nvSpPr>
+          <p:cNvPr id="6" name="Shape 4"/>
+          <p:cNvSpPr/>
+          <p:nvPr/>
+        </p:nvSpPr>
+        <p:spPr>
+          <a:xfrm>
+            <a:off x="9271891" y="6190521"/>
+            <a:ext cx="74666" cy="74666"/>
+          </a:xfrm>
+          <a:prstGeom prst="ellipse">
+            <a:avLst/>
+          </a:prstGeom>
+          <a:solidFill>
+            <a:srgbClr val="3F6F5F"/>
+          </a:solidFill>
+          <a:ln/>
+        </p:spPr>
+      </p:sp>
+      <p:sp>
+        <p:nvSpPr>
+          <p:cNvPr id="7" name="Shape 5"/>
+          <p:cNvSpPr/>
+          <p:nvPr/>
+        </p:nvSpPr>
+        <p:spPr>
+          <a:xfrm>
+            <a:off x="10071233" y="5862911"/>
+            <a:ext cx="82058" cy="82058"/>
+          </a:xfrm>
+          <a:prstGeom prst="ellipse">
+            <a:avLst/>
+          </a:prstGeom>
+          <a:solidFill>
+            <a:srgbClr val="B9852F"/>
+          </a:solidFill>
+          <a:ln/>
+        </p:spPr>
+      </p:sp>
+      <p:sp>
+        <p:nvSpPr>
+          <p:cNvPr id="8" name="Shape 6"/>
+          <p:cNvSpPr/>
+          <p:nvPr/>
+        </p:nvSpPr>
+        <p:spPr>
+          <a:xfrm>
+            <a:off x="10509049" y="4952160"/>
+            <a:ext cx="96943" cy="96943"/>
+          </a:xfrm>
+          <a:prstGeom prst="ellipse">
+            <a:avLst/>
+          </a:prstGeom>
+          <a:solidFill>
+            <a:srgbClr val="7A3B2E"/>
+          </a:solidFill>
+          <a:ln/>
+        </p:spPr>
+      </p:sp>
+      <p:sp>
+        <p:nvSpPr>
+          <p:cNvPr id="9" name="Shape 7"/>
+          <p:cNvSpPr/>
+          <p:nvPr/>
+        </p:nvSpPr>
+        <p:spPr>
+          <a:xfrm>
+            <a:off x="9091819" y="5919527"/>
+            <a:ext cx="87317" cy="87317"/>
+          </a:xfrm>
+          <a:prstGeom prst="ellipse">
+            <a:avLst/>
+          </a:prstGeom>
+          <a:solidFill>
+            <a:srgbClr val="3F6F5F"/>
+          </a:solidFill>
+          <a:ln/>
+        </p:spPr>
+      </p:sp>
+      <p:sp>
+        <p:nvSpPr>
+          <p:cNvPr id="10" name="Shape 8"/>
+          <p:cNvSpPr/>
+          <p:nvPr/>
+        </p:nvSpPr>
+        <p:spPr>
+          <a:xfrm>
+            <a:off x="9446661" y="6014193"/>
+            <a:ext cx="76041" cy="76041"/>
+          </a:xfrm>
+          <a:prstGeom prst="ellipse">
+            <a:avLst/>
+          </a:prstGeom>
+          <a:solidFill>
+            <a:srgbClr val="B9852F"/>
+          </a:solidFill>
+          <a:ln/>
+        </p:spPr>
+      </p:sp>
+      <p:sp>
+        <p:nvSpPr>
+          <p:cNvPr id="11" name="Shape 9"/>
+          <p:cNvSpPr/>
+          <p:nvPr/>
+        </p:nvSpPr>
+        <p:spPr>
+          <a:xfrm>
+            <a:off x="10080057" y="5960057"/>
+            <a:ext cx="85973" cy="85973"/>
+          </a:xfrm>
+          <a:prstGeom prst="ellipse">
+            <a:avLst/>
+          </a:prstGeom>
+          <a:solidFill>
+            <a:srgbClr val="7A3B2E"/>
+          </a:solidFill>
+          <a:ln/>
+        </p:spPr>
+      </p:sp>
+      <p:sp>
+        <p:nvSpPr>
+          <p:cNvPr id="12" name="Shape 10"/>
+          <p:cNvSpPr/>
+          <p:nvPr/>
+        </p:nvSpPr>
+        <p:spPr>
+          <a:xfrm>
+            <a:off x="9498487" y="4743659"/>
+            <a:ext cx="85110" cy="85110"/>
+          </a:xfrm>
+          <a:prstGeom prst="ellipse">
+            <a:avLst/>
+          </a:prstGeom>
+          <a:solidFill>
+            <a:srgbClr val="3F6F5F"/>
+          </a:solidFill>
+          <a:ln/>
+        </p:spPr>
+      </p:sp>
+      <p:sp>
+        <p:nvSpPr>
+          <p:cNvPr id="13" name="Shape 11"/>
+          <p:cNvSpPr/>
+          <p:nvPr/>
+        </p:nvSpPr>
+        <p:spPr>
+          <a:xfrm>
+            <a:off x="11329069" y="4826259"/>
+            <a:ext cx="96312" cy="96312"/>
+          </a:xfrm>
+          <a:prstGeom prst="ellipse">
+            <a:avLst/>
+          </a:prstGeom>
+          <a:solidFill>
+            <a:srgbClr val="B9852F"/>
+          </a:solidFill>
+          <a:ln/>
+        </p:spPr>
+      </p:sp>
+      <p:sp>
+        <p:nvSpPr>
+          <p:cNvPr id="14" name="Shape 12"/>
+          <p:cNvSpPr/>
+          <p:nvPr/>
+        </p:nvSpPr>
+        <p:spPr>
+          <a:xfrm>
+            <a:off x="11517966" y="5194398"/>
+            <a:ext cx="87575" cy="87575"/>
+          </a:xfrm>
+          <a:prstGeom prst="ellipse">
+            <a:avLst/>
+          </a:prstGeom>
+          <a:solidFill>
+            <a:srgbClr val="7A3B2E"/>
+          </a:solidFill>
+          <a:ln/>
+        </p:spPr>
+      </p:sp>
+      <p:sp>
+        <p:nvSpPr>
+          <p:cNvPr id="15" name="Shape 13"/>
+          <p:cNvSpPr/>
+          <p:nvPr/>
+        </p:nvSpPr>
+        <p:spPr>
+          <a:xfrm>
+            <a:off x="11131975" y="4834616"/>
+            <a:ext cx="81759" cy="81759"/>
+          </a:xfrm>
+          <a:prstGeom prst="ellipse">
+            <a:avLst/>
+          </a:prstGeom>
+          <a:solidFill>
+            <a:srgbClr val="3F6F5F"/>
+          </a:solidFill>
+          <a:ln/>
+        </p:spPr>
+      </p:sp>
+      <p:sp>
+        <p:nvSpPr>
+          <p:cNvPr id="16" name="Shape 14"/>
+          <p:cNvSpPr/>
+          <p:nvPr/>
+        </p:nvSpPr>
+        <p:spPr>
+          <a:xfrm>
+            <a:off x="11237898" y="6208171"/>
+            <a:ext cx="46860" cy="46860"/>
+          </a:xfrm>
+          <a:prstGeom prst="ellipse">
+            <a:avLst/>
+          </a:prstGeom>
+          <a:solidFill>
+            <a:srgbClr val="B9852F"/>
+          </a:solidFill>
+          <a:ln/>
+        </p:spPr>
+      </p:sp>
+      <p:sp>
+        <p:nvSpPr>
+          <p:cNvPr id="17" name="Shape 15"/>
+          <p:cNvSpPr/>
+          <p:nvPr/>
+        </p:nvSpPr>
+        <p:spPr>
+          <a:xfrm>
+            <a:off x="10342214" y="4826885"/>
+            <a:ext cx="60602" cy="60602"/>
+          </a:xfrm>
+          <a:prstGeom prst="ellipse">
+            <a:avLst/>
+          </a:prstGeom>
+          <a:solidFill>
+            <a:srgbClr val="7A3B2E"/>
+          </a:solidFill>
+          <a:ln/>
+        </p:spPr>
+      </p:sp>
+      <p:sp>
+        <p:nvSpPr>
+          <p:cNvPr id="18" name="Shape 16"/>
+          <p:cNvSpPr/>
+          <p:nvPr/>
+        </p:nvSpPr>
+        <p:spPr>
+          <a:xfrm>
+            <a:off x="9511723" y="4889377"/>
+            <a:ext cx="90981" cy="90981"/>
+          </a:xfrm>
+          <a:prstGeom prst="ellipse">
+            <a:avLst/>
+          </a:prstGeom>
+          <a:solidFill>
+            <a:srgbClr val="3F6F5F"/>
+          </a:solidFill>
+          <a:ln/>
+        </p:spPr>
+      </p:sp>
+    </p:spTree>
+  </p:cSld>
+  <p:clrMapOvr>
+    <a:masterClrMapping/>
+  </p:clrMapOvr>
+</p:sld>
+</file>
+
 <file path=ppt/slides/slide2.xml><?xml version="1.0" encoding="utf-8"?>
 <p:sld xmlns:a="http://schemas.openxmlformats.org/drawingml/2006/main" xmlns:r="http://schemas.openxmlformats.org/officeDocument/2006/relationships" xmlns:p="http://schemas.openxmlformats.org/presentationml/2006/main">
   <p:cSld name="Slide 2">
@@ -2461,14 +4264,34 @@
       </p:grpSpPr>
       <p:sp>
         <p:nvSpPr>
-          <p:cNvPr id="2" name="Text 0"/>
-          <p:cNvSpPr/>
-          <p:nvPr/>
-        </p:nvSpPr>
-        <p:spPr>
-          <a:xfrm>
-            <a:off x="640080" y="731520"/>
-            <a:ext cx="10058400" cy="731520"/>
+          <p:cNvPr id="2" name="Shape 0"/>
+          <p:cNvSpPr/>
+          <p:nvPr/>
+        </p:nvSpPr>
+        <p:spPr>
+          <a:xfrm>
+            <a:off x="0" y="0"/>
+            <a:ext cx="164592" cy="6858000"/>
+          </a:xfrm>
+          <a:prstGeom prst="rect">
+            <a:avLst/>
+          </a:prstGeom>
+          <a:solidFill>
+            <a:srgbClr val="7A3B2E"/>
+          </a:solidFill>
+          <a:ln/>
+        </p:spPr>
+      </p:sp>
+      <p:sp>
+        <p:nvSpPr>
+          <p:cNvPr id="3" name="Text 1"/>
+          <p:cNvSpPr/>
+          <p:nvPr/>
+        </p:nvSpPr>
+        <p:spPr>
+          <a:xfrm>
+            <a:off x="640080" y="640080"/>
+            <a:ext cx="10058400" cy="320040"/>
           </a:xfrm>
           <a:prstGeom prst="rect">
             <a:avLst/>
@@ -2478,6 +4301,47 @@
         </p:spPr>
         <p:txBody>
           <a:bodyPr wrap="square" rtlCol="0" anchor="ctr"/>
+          <a:lstStyle/>
+          <a:p>
+            <a:pPr indent="0" marL="0">
+              <a:buNone/>
+            </a:pPr>
+            <a:r>
+              <a:rPr lang="en-US" sz="1200" b="1" spc="300" kern="0" dirty="0">
+                <a:solidFill>
+                  <a:srgbClr val="7A3B2E"/>
+                </a:solidFill>
+                <a:latin typeface="Calibri" pitchFamily="34" charset="0"/>
+                <a:ea typeface="Calibri" pitchFamily="34" charset="-122"/>
+                <a:cs typeface="Calibri" pitchFamily="34" charset="-120"/>
+              </a:rPr>
+              <a:t>WEEK 5 · THE MATERIAL</a:t>
+            </a:r>
+            <a:endParaRPr lang="en-US" sz="1200" dirty="0"/>
+          </a:p>
+        </p:txBody>
+      </p:sp>
+      <p:sp>
+        <p:nvSpPr>
+          <p:cNvPr id="4" name="Text 2"/>
+          <p:cNvSpPr/>
+          <p:nvPr/>
+        </p:nvSpPr>
+        <p:spPr>
+          <a:xfrm>
+            <a:off x="640080" y="1005840"/>
+            <a:ext cx="10881360" cy="914400"/>
+          </a:xfrm>
+          <a:prstGeom prst="rect">
+            <a:avLst/>
+          </a:prstGeom>
+          <a:noFill/>
+          <a:ln/>
+        </p:spPr>
+        <p:txBody>
+          <a:bodyPr wrap="square" rtlCol="0" anchor="t">
+            <a:spAutoFit/>
+          </a:bodyPr>
           <a:lstStyle/>
           <a:p>
             <a:pPr indent="0" marL="0">
@@ -2492,7 +4356,7 @@
                 <a:ea typeface="Cambria" pitchFamily="34" charset="-122"/>
                 <a:cs typeface="Cambria" pitchFamily="34" charset="-120"/>
               </a:rPr>
-              <a:t>Three modes today</a:t>
+              <a:t>The problem counting cannot solve</a:t>
             </a:r>
             <a:endParaRPr lang="en-US" sz="3000" dirty="0"/>
           </a:p>
@@ -2500,134 +4364,98 @@
       </p:sp>
       <p:sp>
         <p:nvSpPr>
-          <p:cNvPr id="3" name="Text 1"/>
-          <p:cNvSpPr/>
-          <p:nvPr/>
-        </p:nvSpPr>
-        <p:spPr>
-          <a:xfrm>
-            <a:off x="640080" y="1417320"/>
-            <a:ext cx="10058400" cy="365760"/>
-          </a:xfrm>
-          <a:prstGeom prst="rect">
-            <a:avLst/>
-          </a:prstGeom>
-          <a:noFill/>
-          <a:ln/>
-        </p:spPr>
-        <p:txBody>
-          <a:bodyPr wrap="square" rtlCol="0" anchor="ctr"/>
+          <p:cNvPr id="5" name="Shape 3"/>
+          <p:cNvSpPr/>
+          <p:nvPr/>
+        </p:nvSpPr>
+        <p:spPr>
+          <a:xfrm>
+            <a:off x="640080" y="2331720"/>
+            <a:ext cx="201168" cy="201168"/>
+          </a:xfrm>
+          <a:prstGeom prst="ellipse">
+            <a:avLst/>
+          </a:prstGeom>
+          <a:solidFill>
+            <a:srgbClr val="7A3B2E"/>
+          </a:solidFill>
+          <a:ln/>
+        </p:spPr>
+      </p:sp>
+      <p:sp>
+        <p:nvSpPr>
+          <p:cNvPr id="6" name="Text 4"/>
+          <p:cNvSpPr/>
+          <p:nvPr/>
+        </p:nvSpPr>
+        <p:spPr>
+          <a:xfrm>
+            <a:off x="1097280" y="2240280"/>
+            <a:ext cx="10607040" cy="1017270"/>
+          </a:xfrm>
+          <a:prstGeom prst="rect">
+            <a:avLst/>
+          </a:prstGeom>
+          <a:noFill/>
+          <a:ln/>
+        </p:spPr>
+        <p:txBody>
+          <a:bodyPr wrap="square" rtlCol="0" anchor="t">
+            <a:spAutoFit/>
+          </a:bodyPr>
           <a:lstStyle/>
           <a:p>
             <a:pPr indent="0" marL="0">
-              <a:buNone/>
-            </a:pPr>
-            <a:r>
-              <a:rPr lang="en-US" sz="1400" i="1" dirty="0">
-                <a:solidFill>
-                  <a:srgbClr val="6B6B63"/>
+              <a:lnSpc>
+                <a:spcPct val="112000"/>
+              </a:lnSpc>
+              <a:buNone/>
+            </a:pPr>
+            <a:r>
+              <a:rPr lang="en-US" sz="1650" dirty="0">
+                <a:solidFill>
+                  <a:srgbClr val="1A1A1A"/>
                 </a:solidFill>
                 <a:latin typeface="Calibri" pitchFamily="34" charset="0"/>
                 <a:ea typeface="Calibri" pitchFamily="34" charset="-122"/>
                 <a:cs typeface="Calibri" pitchFamily="34" charset="-120"/>
               </a:rPr>
-              <a:t>about a third of the session each</a:t>
-            </a:r>
-            <a:endParaRPr lang="en-US" sz="1400" dirty="0"/>
-          </a:p>
-        </p:txBody>
-      </p:sp>
-      <p:sp>
-        <p:nvSpPr>
-          <p:cNvPr id="4" name="Shape 2"/>
-          <p:cNvSpPr/>
-          <p:nvPr/>
-        </p:nvSpPr>
-        <p:spPr>
-          <a:xfrm>
-            <a:off x="640080" y="2194560"/>
-            <a:ext cx="3383280" cy="3291840"/>
-          </a:xfrm>
-          <a:prstGeom prst="roundRect">
-            <a:avLst>
-              <a:gd name="adj" fmla="val 3333"/>
-            </a:avLst>
-          </a:prstGeom>
-          <a:solidFill>
-            <a:srgbClr val="F4EEE8"/>
-          </a:solidFill>
-          <a:ln/>
-        </p:spPr>
-      </p:sp>
-      <p:sp>
-        <p:nvSpPr>
-          <p:cNvPr id="5" name="Shape 3"/>
-          <p:cNvSpPr/>
-          <p:nvPr/>
-        </p:nvSpPr>
-        <p:spPr>
-          <a:xfrm>
-            <a:off x="1051560" y="2606040"/>
-            <a:ext cx="548640" cy="548640"/>
+              <a:t>To a counter, "happy" and "joyful" are unrelated strings. Zero overlap.</a:t>
+            </a:r>
+            <a:endParaRPr lang="en-US" sz="1650" dirty="0"/>
+          </a:p>
+        </p:txBody>
+      </p:sp>
+      <p:sp>
+        <p:nvSpPr>
+          <p:cNvPr id="7" name="Shape 5"/>
+          <p:cNvSpPr/>
+          <p:nvPr/>
+        </p:nvSpPr>
+        <p:spPr>
+          <a:xfrm>
+            <a:off x="640080" y="3348990"/>
+            <a:ext cx="201168" cy="201168"/>
           </a:xfrm>
           <a:prstGeom prst="ellipse">
             <a:avLst/>
           </a:prstGeom>
           <a:solidFill>
-            <a:srgbClr val="7A3B2E"/>
-          </a:solidFill>
-          <a:ln/>
-        </p:spPr>
-      </p:sp>
-      <p:sp>
-        <p:nvSpPr>
-          <p:cNvPr id="6" name="Text 4"/>
-          <p:cNvSpPr/>
-          <p:nvPr/>
-        </p:nvSpPr>
-        <p:spPr>
-          <a:xfrm>
-            <a:off x="1005840" y="3383280"/>
-            <a:ext cx="2651760" cy="548640"/>
-          </a:xfrm>
-          <a:prstGeom prst="rect">
-            <a:avLst/>
-          </a:prstGeom>
-          <a:noFill/>
-          <a:ln/>
-        </p:spPr>
-        <p:txBody>
-          <a:bodyPr wrap="square" rtlCol="0" anchor="ctr"/>
-          <a:lstStyle/>
-          <a:p>
-            <a:pPr indent="0" marL="0">
-              <a:buNone/>
-            </a:pPr>
-            <a:r>
-              <a:rPr lang="en-US" sz="2100" b="1" dirty="0">
-                <a:solidFill>
-                  <a:srgbClr val="1A1A1A"/>
-                </a:solidFill>
-                <a:latin typeface="Cambria" pitchFamily="34" charset="0"/>
-                <a:ea typeface="Cambria" pitchFamily="34" charset="-122"/>
-                <a:cs typeface="Cambria" pitchFamily="34" charset="-120"/>
-              </a:rPr>
-              <a:t>Lecture / demo</a:t>
-            </a:r>
-            <a:endParaRPr lang="en-US" sz="2100" dirty="0"/>
-          </a:p>
-        </p:txBody>
-      </p:sp>
-      <p:sp>
-        <p:nvSpPr>
-          <p:cNvPr id="7" name="Text 5"/>
-          <p:cNvSpPr/>
-          <p:nvPr/>
-        </p:nvSpPr>
-        <p:spPr>
-          <a:xfrm>
-            <a:off x="1005840" y="3977640"/>
-            <a:ext cx="2651760" cy="1371600"/>
+            <a:srgbClr val="3F6F5F"/>
+          </a:solidFill>
+          <a:ln/>
+        </p:spPr>
+      </p:sp>
+      <p:sp>
+        <p:nvSpPr>
+          <p:cNvPr id="8" name="Text 6"/>
+          <p:cNvSpPr/>
+          <p:nvPr/>
+        </p:nvSpPr>
+        <p:spPr>
+          <a:xfrm>
+            <a:off x="1097280" y="3257550"/>
+            <a:ext cx="10607040" cy="1017270"/>
           </a:xfrm>
           <a:prstGeom prst="rect">
             <a:avLst/>
@@ -2643,12 +4471,12 @@
           <a:p>
             <a:pPr indent="0" marL="0">
               <a:lnSpc>
-                <a:spcPct val="115000"/>
+                <a:spcPct val="112000"/>
               </a:lnSpc>
               <a:buNone/>
             </a:pPr>
             <a:r>
-              <a:rPr lang="en-US" sz="1500" dirty="0">
+              <a:rPr lang="en-US" sz="1650" dirty="0">
                 <a:solidFill>
                   <a:srgbClr val="1A1A1A"/>
                 </a:solidFill>
@@ -2656,33 +4484,11 @@
                 <a:ea typeface="Calibri" pitchFamily="34" charset="-122"/>
                 <a:cs typeface="Calibri" pitchFamily="34" charset="-120"/>
               </a:rPr>
-              <a:t>Embeddings, the heart of the course, the leap past counting</a:t>
-            </a:r>
-            <a:endParaRPr lang="en-US" sz="1500" dirty="0"/>
-          </a:p>
-        </p:txBody>
-      </p:sp>
-      <p:sp>
-        <p:nvSpPr>
-          <p:cNvPr id="8" name="Shape 6"/>
-          <p:cNvSpPr/>
-          <p:nvPr/>
-        </p:nvSpPr>
-        <p:spPr>
-          <a:xfrm>
-            <a:off x="4526280" y="2194560"/>
-            <a:ext cx="3383280" cy="3291840"/>
-          </a:xfrm>
-          <a:prstGeom prst="roundRect">
-            <a:avLst>
-              <a:gd name="adj" fmla="val 3333"/>
-            </a:avLst>
-          </a:prstGeom>
-          <a:solidFill>
-            <a:srgbClr val="F4EEE8"/>
-          </a:solidFill>
-          <a:ln/>
-        </p:spPr>
+              <a:t>An embedding turns each item into a vector, a few hundred numbers, positioned by the company the item keeps.</a:t>
+            </a:r>
+            <a:endParaRPr lang="en-US" sz="1650" dirty="0"/>
+          </a:p>
+        </p:txBody>
       </p:sp>
       <p:sp>
         <p:nvSpPr>
@@ -2692,14 +4498,14 @@
         </p:nvSpPr>
         <p:spPr>
           <a:xfrm>
-            <a:off x="4937760" y="2606040"/>
-            <a:ext cx="548640" cy="548640"/>
+            <a:off x="640080" y="4366260"/>
+            <a:ext cx="201168" cy="201168"/>
           </a:xfrm>
           <a:prstGeom prst="ellipse">
             <a:avLst/>
           </a:prstGeom>
           <a:solidFill>
-            <a:srgbClr val="3F6F5F"/>
+            <a:srgbClr val="B9852F"/>
           </a:solidFill>
           <a:ln/>
         </p:spPr>
@@ -2712,47 +4518,8 @@
         </p:nvSpPr>
         <p:spPr>
           <a:xfrm>
-            <a:off x="4892040" y="3383280"/>
-            <a:ext cx="2651760" cy="548640"/>
-          </a:xfrm>
-          <a:prstGeom prst="rect">
-            <a:avLst/>
-          </a:prstGeom>
-          <a:noFill/>
-          <a:ln/>
-        </p:spPr>
-        <p:txBody>
-          <a:bodyPr wrap="square" rtlCol="0" anchor="ctr"/>
-          <a:lstStyle/>
-          <a:p>
-            <a:pPr indent="0" marL="0">
-              <a:buNone/>
-            </a:pPr>
-            <a:r>
-              <a:rPr lang="en-US" sz="2100" b="1" dirty="0">
-                <a:solidFill>
-                  <a:srgbClr val="1A1A1A"/>
-                </a:solidFill>
-                <a:latin typeface="Cambria" pitchFamily="34" charset="0"/>
-                <a:ea typeface="Cambria" pitchFamily="34" charset="-122"/>
-                <a:cs typeface="Cambria" pitchFamily="34" charset="-120"/>
-              </a:rPr>
-              <a:t>Workshop</a:t>
-            </a:r>
-            <a:endParaRPr lang="en-US" sz="2100" dirty="0"/>
-          </a:p>
-        </p:txBody>
-      </p:sp>
-      <p:sp>
-        <p:nvSpPr>
-          <p:cNvPr id="11" name="Text 9"/>
-          <p:cNvSpPr/>
-          <p:nvPr/>
-        </p:nvSpPr>
-        <p:spPr>
-          <a:xfrm>
-            <a:off x="4892040" y="3977640"/>
-            <a:ext cx="2651760" cy="1371600"/>
+            <a:off x="1097280" y="4274820"/>
+            <a:ext cx="10607040" cy="1017270"/>
           </a:xfrm>
           <a:prstGeom prst="rect">
             <a:avLst/>
@@ -2768,12 +4535,12 @@
           <a:p>
             <a:pPr indent="0" marL="0">
               <a:lnSpc>
-                <a:spcPct val="115000"/>
+                <a:spcPct val="112000"/>
               </a:lnSpc>
               <a:buNone/>
             </a:pPr>
             <a:r>
-              <a:rPr lang="en-US" sz="1500" dirty="0">
+              <a:rPr lang="en-US" sz="1650" dirty="0">
                 <a:solidFill>
                   <a:srgbClr val="1A1A1A"/>
                 </a:solidFill>
@@ -2781,103 +4548,42 @@
                 <a:ea typeface="Calibri" pitchFamily="34" charset="-122"/>
                 <a:cs typeface="Calibri" pitchFamily="34" charset="-120"/>
               </a:rPr>
-              <a:t>Build hands-on on your own data.</a:t>
-            </a:r>
-            <a:endParaRPr lang="en-US" sz="1500" dirty="0"/>
-          </a:p>
-        </p:txBody>
-      </p:sp>
-      <p:sp>
-        <p:nvSpPr>
-          <p:cNvPr id="12" name="Shape 10"/>
-          <p:cNvSpPr/>
-          <p:nvPr/>
-        </p:nvSpPr>
-        <p:spPr>
-          <a:xfrm>
-            <a:off x="8412480" y="2194560"/>
-            <a:ext cx="3383280" cy="3291840"/>
-          </a:xfrm>
-          <a:prstGeom prst="roundRect">
-            <a:avLst>
-              <a:gd name="adj" fmla="val 3333"/>
-            </a:avLst>
-          </a:prstGeom>
-          <a:solidFill>
-            <a:srgbClr val="F4EEE8"/>
-          </a:solidFill>
-          <a:ln/>
-        </p:spPr>
-      </p:sp>
-      <p:sp>
-        <p:nvSpPr>
-          <p:cNvPr id="13" name="Shape 11"/>
-          <p:cNvSpPr/>
-          <p:nvPr/>
-        </p:nvSpPr>
-        <p:spPr>
-          <a:xfrm>
-            <a:off x="8823960" y="2606040"/>
-            <a:ext cx="548640" cy="548640"/>
+              <a:t>Near in that space means similar in learned context: happy and joyful end up neighbors because they appear in the same company.</a:t>
+            </a:r>
+            <a:endParaRPr lang="en-US" sz="1650" dirty="0"/>
+          </a:p>
+        </p:txBody>
+      </p:sp>
+      <p:sp>
+        <p:nvSpPr>
+          <p:cNvPr id="11" name="Shape 9"/>
+          <p:cNvSpPr/>
+          <p:nvPr/>
+        </p:nvSpPr>
+        <p:spPr>
+          <a:xfrm>
+            <a:off x="640080" y="5383530"/>
+            <a:ext cx="201168" cy="201168"/>
           </a:xfrm>
           <a:prstGeom prst="ellipse">
             <a:avLst/>
           </a:prstGeom>
           <a:solidFill>
-            <a:srgbClr val="B9852F"/>
-          </a:solidFill>
-          <a:ln/>
-        </p:spPr>
-      </p:sp>
-      <p:sp>
-        <p:nvSpPr>
-          <p:cNvPr id="14" name="Text 12"/>
-          <p:cNvSpPr/>
-          <p:nvPr/>
-        </p:nvSpPr>
-        <p:spPr>
-          <a:xfrm>
-            <a:off x="8778240" y="3383280"/>
-            <a:ext cx="2651760" cy="548640"/>
-          </a:xfrm>
-          <a:prstGeom prst="rect">
-            <a:avLst/>
-          </a:prstGeom>
-          <a:noFill/>
-          <a:ln/>
-        </p:spPr>
-        <p:txBody>
-          <a:bodyPr wrap="square" rtlCol="0" anchor="ctr"/>
-          <a:lstStyle/>
-          <a:p>
-            <a:pPr indent="0" marL="0">
-              <a:buNone/>
-            </a:pPr>
-            <a:r>
-              <a:rPr lang="en-US" sz="2100" b="1" dirty="0">
-                <a:solidFill>
-                  <a:srgbClr val="1A1A1A"/>
-                </a:solidFill>
-                <a:latin typeface="Cambria" pitchFamily="34" charset="0"/>
-                <a:ea typeface="Cambria" pitchFamily="34" charset="-122"/>
-                <a:cs typeface="Cambria" pitchFamily="34" charset="-120"/>
-              </a:rPr>
-              <a:t>Discussion</a:t>
-            </a:r>
-            <a:endParaRPr lang="en-US" sz="2100" dirty="0"/>
-          </a:p>
-        </p:txBody>
-      </p:sp>
-      <p:sp>
-        <p:nvSpPr>
-          <p:cNvPr id="15" name="Text 13"/>
-          <p:cNvSpPr/>
-          <p:nvPr/>
-        </p:nvSpPr>
-        <p:spPr>
-          <a:xfrm>
-            <a:off x="8778240" y="3977640"/>
-            <a:ext cx="2651760" cy="1371600"/>
+            <a:srgbClr val="7A3B2E"/>
+          </a:solidFill>
+          <a:ln/>
+        </p:spPr>
+      </p:sp>
+      <p:sp>
+        <p:nvSpPr>
+          <p:cNvPr id="12" name="Text 10"/>
+          <p:cNvSpPr/>
+          <p:nvPr/>
+        </p:nvSpPr>
+        <p:spPr>
+          <a:xfrm>
+            <a:off x="1097280" y="5292090"/>
+            <a:ext cx="10607040" cy="1017270"/>
           </a:xfrm>
           <a:prstGeom prst="rect">
             <a:avLst/>
@@ -2893,12 +4599,12 @@
           <a:p>
             <a:pPr indent="0" marL="0">
               <a:lnSpc>
-                <a:spcPct val="115000"/>
+                <a:spcPct val="112000"/>
               </a:lnSpc>
               <a:buNone/>
             </a:pPr>
             <a:r>
-              <a:rPr lang="en-US" sz="1500" dirty="0">
+              <a:rPr lang="en-US" sz="1650" dirty="0">
                 <a:solidFill>
                   <a:srgbClr val="1A1A1A"/>
                 </a:solidFill>
@@ -2906,9 +4612,9 @@
                 <a:ea typeface="Calibri" pitchFamily="34" charset="-122"/>
                 <a:cs typeface="Calibri" pitchFamily="34" charset="-120"/>
               </a:rPr>
-              <a:t>Interrogate the study, debate it, or critique each other's work.</a:t>
-            </a:r>
-            <a:endParaRPr lang="en-US" sz="1500" dirty="0"/>
+              <a:t>Neighbors are context-mates, NOT dictionary synonyms. Kill that misconception today, out loud.</a:t>
+            </a:r>
+            <a:endParaRPr lang="en-US" sz="1650" dirty="0"/>
           </a:p>
         </p:txBody>
       </p:sp>
@@ -2946,14 +4652,34 @@
       </p:grpSpPr>
       <p:sp>
         <p:nvSpPr>
-          <p:cNvPr id="2" name="Text 0"/>
+          <p:cNvPr id="2" name="Shape 0"/>
+          <p:cNvSpPr/>
+          <p:nvPr/>
+        </p:nvSpPr>
+        <p:spPr>
+          <a:xfrm>
+            <a:off x="0" y="0"/>
+            <a:ext cx="164592" cy="6858000"/>
+          </a:xfrm>
+          <a:prstGeom prst="rect">
+            <a:avLst/>
+          </a:prstGeom>
+          <a:solidFill>
+            <a:srgbClr val="3F6F5F"/>
+          </a:solidFill>
+          <a:ln/>
+        </p:spPr>
+      </p:sp>
+      <p:sp>
+        <p:nvSpPr>
+          <p:cNvPr id="3" name="Text 1"/>
           <p:cNvSpPr/>
           <p:nvPr/>
         </p:nvSpPr>
         <p:spPr>
           <a:xfrm>
             <a:off x="640080" y="640080"/>
-            <a:ext cx="10058400" cy="731520"/>
+            <a:ext cx="10058400" cy="320040"/>
           </a:xfrm>
           <a:prstGeom prst="rect">
             <a:avLst/>
@@ -2963,6 +4689,47 @@
         </p:spPr>
         <p:txBody>
           <a:bodyPr wrap="square" rtlCol="0" anchor="ctr"/>
+          <a:lstStyle/>
+          <a:p>
+            <a:pPr indent="0" marL="0">
+              <a:buNone/>
+            </a:pPr>
+            <a:r>
+              <a:rPr lang="en-US" sz="1200" b="1" spc="300" kern="0" dirty="0">
+                <a:solidFill>
+                  <a:srgbClr val="3F6F5F"/>
+                </a:solidFill>
+                <a:latin typeface="Calibri" pitchFamily="34" charset="0"/>
+                <a:ea typeface="Calibri" pitchFamily="34" charset="-122"/>
+                <a:cs typeface="Calibri" pitchFamily="34" charset="-120"/>
+              </a:rPr>
+              <a:t>WEEK 5 · THE MATERIAL</a:t>
+            </a:r>
+            <a:endParaRPr lang="en-US" sz="1200" dirty="0"/>
+          </a:p>
+        </p:txBody>
+      </p:sp>
+      <p:sp>
+        <p:nvSpPr>
+          <p:cNvPr id="4" name="Text 2"/>
+          <p:cNvSpPr/>
+          <p:nvPr/>
+        </p:nvSpPr>
+        <p:spPr>
+          <a:xfrm>
+            <a:off x="640080" y="1005840"/>
+            <a:ext cx="10881360" cy="914400"/>
+          </a:xfrm>
+          <a:prstGeom prst="rect">
+            <a:avLst/>
+          </a:prstGeom>
+          <a:noFill/>
+          <a:ln/>
+        </p:spPr>
+        <p:txBody>
+          <a:bodyPr wrap="square" rtlCol="0" anchor="t">
+            <a:spAutoFit/>
+          </a:bodyPr>
           <a:lstStyle/>
           <a:p>
             <a:pPr indent="0" marL="0">
@@ -2977,7 +4744,7 @@
                 <a:ea typeface="Cambria" pitchFamily="34" charset="-122"/>
                 <a:cs typeface="Cambria" pitchFamily="34" charset="-120"/>
               </a:rPr>
-              <a:t>The session</a:t>
+              <a:t>The debate: discovery, or bias read back?</a:t>
             </a:r>
             <a:endParaRPr lang="en-US" sz="3000" dirty="0"/>
           </a:p>
@@ -2985,19 +4752,17 @@
       </p:sp>
       <p:sp>
         <p:nvSpPr>
-          <p:cNvPr id="3" name="Shape 1"/>
-          <p:cNvSpPr/>
-          <p:nvPr/>
-        </p:nvSpPr>
-        <p:spPr>
-          <a:xfrm>
-            <a:off x="640080" y="1572768"/>
-            <a:ext cx="868680" cy="457200"/>
-          </a:xfrm>
-          <a:prstGeom prst="roundRect">
-            <a:avLst>
-              <a:gd name="adj" fmla="val 12000"/>
-            </a:avLst>
+          <p:cNvPr id="5" name="Shape 3"/>
+          <p:cNvSpPr/>
+          <p:nvPr/>
+        </p:nvSpPr>
+        <p:spPr>
+          <a:xfrm>
+            <a:off x="640080" y="2331720"/>
+            <a:ext cx="201168" cy="201168"/>
+          </a:xfrm>
+          <a:prstGeom prst="ellipse">
+            <a:avLst/>
           </a:prstGeom>
           <a:solidFill>
             <a:srgbClr val="7A3B2E"/>
@@ -3007,71 +4772,99 @@
       </p:sp>
       <p:sp>
         <p:nvSpPr>
-          <p:cNvPr id="4" name="Text 2"/>
-          <p:cNvSpPr/>
-          <p:nvPr/>
-        </p:nvSpPr>
-        <p:spPr>
-          <a:xfrm>
-            <a:off x="640080" y="1572768"/>
-            <a:ext cx="868680" cy="457200"/>
-          </a:xfrm>
-          <a:prstGeom prst="rect">
-            <a:avLst/>
-          </a:prstGeom>
-          <a:noFill/>
-          <a:ln/>
-        </p:spPr>
-        <p:txBody>
-          <a:bodyPr wrap="square" rtlCol="0" anchor="ctr"/>
-          <a:lstStyle/>
-          <a:p>
-            <a:pPr algn="ctr" indent="0" marL="0">
-              <a:buNone/>
-            </a:pPr>
-            <a:r>
-              <a:rPr lang="en-US" sz="1100" b="1" dirty="0">
-                <a:solidFill>
-                  <a:srgbClr val="FFFFFF"/>
+          <p:cNvPr id="6" name="Text 4"/>
+          <p:cNvSpPr/>
+          <p:nvPr/>
+        </p:nvSpPr>
+        <p:spPr>
+          <a:xfrm>
+            <a:off x="1097280" y="2240280"/>
+            <a:ext cx="10607040" cy="1017270"/>
+          </a:xfrm>
+          <a:prstGeom prst="rect">
+            <a:avLst/>
+          </a:prstGeom>
+          <a:noFill/>
+          <a:ln/>
+        </p:spPr>
+        <p:txBody>
+          <a:bodyPr wrap="square" rtlCol="0" anchor="t">
+            <a:spAutoFit/>
+          </a:bodyPr>
+          <a:lstStyle/>
+          <a:p>
+            <a:pPr indent="0" marL="0">
+              <a:lnSpc>
+                <a:spcPct val="112000"/>
+              </a:lnSpc>
+              <a:buNone/>
+            </a:pPr>
+            <a:r>
+              <a:rPr lang="en-US" sz="1650" dirty="0">
+                <a:solidFill>
+                  <a:srgbClr val="1A1A1A"/>
                 </a:solidFill>
                 <a:latin typeface="Calibri" pitchFamily="34" charset="0"/>
                 <a:ea typeface="Calibri" pitchFamily="34" charset="-122"/>
                 <a:cs typeface="Calibri" pitchFamily="34" charset="-120"/>
               </a:rPr>
-              <a:t>0:00</a:t>
-            </a:r>
-            <a:endParaRPr lang="en-US" sz="1100" dirty="0"/>
-          </a:p>
-        </p:txBody>
-      </p:sp>
-      <p:sp>
-        <p:nvSpPr>
-          <p:cNvPr id="5" name="Text 3"/>
-          <p:cNvSpPr/>
-          <p:nvPr/>
-        </p:nvSpPr>
-        <p:spPr>
-          <a:xfrm>
-            <a:off x="1691640" y="1554480"/>
-            <a:ext cx="9646920" cy="566928"/>
-          </a:xfrm>
-          <a:prstGeom prst="rect">
-            <a:avLst/>
-          </a:prstGeom>
-          <a:noFill/>
-          <a:ln/>
-        </p:spPr>
-        <p:txBody>
-          <a:bodyPr wrap="square" rtlCol="0" anchor="ctr">
+              <a:t>Kozlowski, Taddy &amp; Evans (2019): a rich-poor direction in embedding space tracks the cultural structure of class across a century. Culture made measurable.</a:t>
+            </a:r>
+            <a:endParaRPr lang="en-US" sz="1650" dirty="0"/>
+          </a:p>
+        </p:txBody>
+      </p:sp>
+      <p:sp>
+        <p:nvSpPr>
+          <p:cNvPr id="7" name="Shape 5"/>
+          <p:cNvSpPr/>
+          <p:nvPr/>
+        </p:nvSpPr>
+        <p:spPr>
+          <a:xfrm>
+            <a:off x="640080" y="3348990"/>
+            <a:ext cx="201168" cy="201168"/>
+          </a:xfrm>
+          <a:prstGeom prst="ellipse">
+            <a:avLst/>
+          </a:prstGeom>
+          <a:solidFill>
+            <a:srgbClr val="3F6F5F"/>
+          </a:solidFill>
+          <a:ln/>
+        </p:spPr>
+      </p:sp>
+      <p:sp>
+        <p:nvSpPr>
+          <p:cNvPr id="8" name="Text 6"/>
+          <p:cNvSpPr/>
+          <p:nvPr/>
+        </p:nvSpPr>
+        <p:spPr>
+          <a:xfrm>
+            <a:off x="1097280" y="3257550"/>
+            <a:ext cx="10607040" cy="1017270"/>
+          </a:xfrm>
+          <a:prstGeom prst="rect">
+            <a:avLst/>
+          </a:prstGeom>
+          <a:noFill/>
+          <a:ln/>
+        </p:spPr>
+        <p:txBody>
+          <a:bodyPr wrap="square" rtlCol="0" anchor="t">
             <a:spAutoFit/>
           </a:bodyPr>
           <a:lstStyle/>
           <a:p>
             <a:pPr indent="0" marL="0">
-              <a:buNone/>
-            </a:pPr>
-            <a:r>
-              <a:rPr lang="en-US" sz="1250" dirty="0">
+              <a:lnSpc>
+                <a:spcPct val="112000"/>
+              </a:lnSpc>
+              <a:buNone/>
+            </a:pPr>
+            <a:r>
+              <a:rPr lang="en-US" sz="1650" dirty="0">
                 <a:solidFill>
                   <a:srgbClr val="1A1A1A"/>
                 </a:solidFill>
@@ -3079,101 +4872,127 @@
                 <a:ea typeface="Calibri" pitchFamily="34" charset="-122"/>
                 <a:cs typeface="Calibri" pitchFamily="34" charset="-120"/>
               </a:rPr>
-              <a:t>Warm-up + Look at This, room names the choice first: the embeddings debate.</a:t>
-            </a:r>
-            <a:endParaRPr lang="en-US" sz="1250" dirty="0"/>
-          </a:p>
-        </p:txBody>
-      </p:sp>
-      <p:sp>
-        <p:nvSpPr>
-          <p:cNvPr id="6" name="Shape 4"/>
-          <p:cNvSpPr/>
-          <p:nvPr/>
-        </p:nvSpPr>
-        <p:spPr>
-          <a:xfrm>
-            <a:off x="640080" y="2139696"/>
-            <a:ext cx="868680" cy="457200"/>
-          </a:xfrm>
-          <a:prstGeom prst="roundRect">
-            <a:avLst>
-              <a:gd name="adj" fmla="val 12000"/>
-            </a:avLst>
-          </a:prstGeom>
-          <a:solidFill>
-            <a:srgbClr val="7A3B2E"/>
-          </a:solidFill>
-          <a:ln/>
-        </p:spPr>
-      </p:sp>
-      <p:sp>
-        <p:nvSpPr>
-          <p:cNvPr id="7" name="Text 5"/>
-          <p:cNvSpPr/>
-          <p:nvPr/>
-        </p:nvSpPr>
-        <p:spPr>
-          <a:xfrm>
-            <a:off x="640080" y="2139696"/>
-            <a:ext cx="868680" cy="457200"/>
-          </a:xfrm>
-          <a:prstGeom prst="rect">
-            <a:avLst/>
-          </a:prstGeom>
-          <a:noFill/>
-          <a:ln/>
-        </p:spPr>
-        <p:txBody>
-          <a:bodyPr wrap="square" rtlCol="0" anchor="ctr"/>
-          <a:lstStyle/>
-          <a:p>
-            <a:pPr algn="ctr" indent="0" marL="0">
-              <a:buNone/>
-            </a:pPr>
-            <a:r>
-              <a:rPr lang="en-US" sz="1100" b="1" dirty="0">
-                <a:solidFill>
-                  <a:srgbClr val="FFFFFF"/>
+              <a:t>Bolukbasi et al. (2016): the same kind of direction pairs man:programmer :: woman:homemaker. Prejudice the model absorbed, to be removed.</a:t>
+            </a:r>
+            <a:endParaRPr lang="en-US" sz="1650" dirty="0"/>
+          </a:p>
+        </p:txBody>
+      </p:sp>
+      <p:sp>
+        <p:nvSpPr>
+          <p:cNvPr id="9" name="Shape 7"/>
+          <p:cNvSpPr/>
+          <p:nvPr/>
+        </p:nvSpPr>
+        <p:spPr>
+          <a:xfrm>
+            <a:off x="640080" y="4366260"/>
+            <a:ext cx="201168" cy="201168"/>
+          </a:xfrm>
+          <a:prstGeom prst="ellipse">
+            <a:avLst/>
+          </a:prstGeom>
+          <a:solidFill>
+            <a:srgbClr val="B9852F"/>
+          </a:solidFill>
+          <a:ln/>
+        </p:spPr>
+      </p:sp>
+      <p:sp>
+        <p:nvSpPr>
+          <p:cNvPr id="10" name="Text 8"/>
+          <p:cNvSpPr/>
+          <p:nvPr/>
+        </p:nvSpPr>
+        <p:spPr>
+          <a:xfrm>
+            <a:off x="1097280" y="4274820"/>
+            <a:ext cx="10607040" cy="1017270"/>
+          </a:xfrm>
+          <a:prstGeom prst="rect">
+            <a:avLst/>
+          </a:prstGeom>
+          <a:noFill/>
+          <a:ln/>
+        </p:spPr>
+        <p:txBody>
+          <a:bodyPr wrap="square" rtlCol="0" anchor="t">
+            <a:spAutoFit/>
+          </a:bodyPr>
+          <a:lstStyle/>
+          <a:p>
+            <a:pPr indent="0" marL="0">
+              <a:lnSpc>
+                <a:spcPct val="112000"/>
+              </a:lnSpc>
+              <a:buNone/>
+            </a:pPr>
+            <a:r>
+              <a:rPr lang="en-US" sz="1650" dirty="0">
+                <a:solidFill>
+                  <a:srgbClr val="1A1A1A"/>
                 </a:solidFill>
                 <a:latin typeface="Calibri" pitchFamily="34" charset="0"/>
                 <a:ea typeface="Calibri" pitchFamily="34" charset="-122"/>
                 <a:cs typeface="Calibri" pitchFamily="34" charset="-120"/>
               </a:rPr>
-              <a:t>0:10</a:t>
-            </a:r>
-            <a:endParaRPr lang="en-US" sz="1100" dirty="0"/>
-          </a:p>
-        </p:txBody>
-      </p:sp>
-      <p:sp>
-        <p:nvSpPr>
-          <p:cNvPr id="8" name="Text 6"/>
-          <p:cNvSpPr/>
-          <p:nvPr/>
-        </p:nvSpPr>
-        <p:spPr>
-          <a:xfrm>
-            <a:off x="1691640" y="2121408"/>
-            <a:ext cx="9646920" cy="566928"/>
-          </a:xfrm>
-          <a:prstGeom prst="rect">
-            <a:avLst/>
-          </a:prstGeom>
-          <a:noFill/>
-          <a:ln/>
-        </p:spPr>
-        <p:txBody>
-          <a:bodyPr wrap="square" rtlCol="0" anchor="ctr">
+              <a:t>Identical technique. Opposite verdicts.</a:t>
+            </a:r>
+            <a:endParaRPr lang="en-US" sz="1650" dirty="0"/>
+          </a:p>
+        </p:txBody>
+      </p:sp>
+      <p:sp>
+        <p:nvSpPr>
+          <p:cNvPr id="11" name="Shape 9"/>
+          <p:cNvSpPr/>
+          <p:nvPr/>
+        </p:nvSpPr>
+        <p:spPr>
+          <a:xfrm>
+            <a:off x="640080" y="5383530"/>
+            <a:ext cx="201168" cy="201168"/>
+          </a:xfrm>
+          <a:prstGeom prst="ellipse">
+            <a:avLst/>
+          </a:prstGeom>
+          <a:solidFill>
+            <a:srgbClr val="7A3B2E"/>
+          </a:solidFill>
+          <a:ln/>
+        </p:spPr>
+      </p:sp>
+      <p:sp>
+        <p:nvSpPr>
+          <p:cNvPr id="12" name="Text 10"/>
+          <p:cNvSpPr/>
+          <p:nvPr/>
+        </p:nvSpPr>
+        <p:spPr>
+          <a:xfrm>
+            <a:off x="1097280" y="5292090"/>
+            <a:ext cx="10607040" cy="1017270"/>
+          </a:xfrm>
+          <a:prstGeom prst="rect">
+            <a:avLst/>
+          </a:prstGeom>
+          <a:noFill/>
+          <a:ln/>
+        </p:spPr>
+        <p:txBody>
+          <a:bodyPr wrap="square" rtlCol="0" anchor="t">
             <a:spAutoFit/>
           </a:bodyPr>
           <a:lstStyle/>
           <a:p>
             <a:pPr indent="0" marL="0">
-              <a:buNone/>
-            </a:pPr>
-            <a:r>
-              <a:rPr lang="en-US" sz="1250" dirty="0">
+              <a:lnSpc>
+                <a:spcPct val="112000"/>
+              </a:lnSpc>
+              <a:buNone/>
+            </a:pPr>
+            <a:r>
+              <a:rPr lang="en-US" sz="1650" dirty="0">
                 <a:solidFill>
                   <a:srgbClr val="1A1A1A"/>
                 </a:solidFill>
@@ -3181,417 +5000,9 @@
                 <a:ea typeface="Calibri" pitchFamily="34" charset="-122"/>
                 <a:cs typeface="Calibri" pitchFamily="34" charset="-120"/>
               </a:rPr>
-              <a:t>The beyond-counting moment: put Week 2 beside today. There you counted the words around an axis you care about; now embed them and watch them cluster. Run it on something the room enjoys, a beloved artist's songs sorted by mood and era, and groupings appear that counting couldn't see. Same question, two tools, the second visibly richer. Name the idea: an item becomes a vector, position learned from the company it keeps.</a:t>
-            </a:r>
-            <a:endParaRPr lang="en-US" sz="1250" dirty="0"/>
-          </a:p>
-        </p:txBody>
-      </p:sp>
-      <p:sp>
-        <p:nvSpPr>
-          <p:cNvPr id="9" name="Shape 7"/>
-          <p:cNvSpPr/>
-          <p:nvPr/>
-        </p:nvSpPr>
-        <p:spPr>
-          <a:xfrm>
-            <a:off x="640080" y="2706624"/>
-            <a:ext cx="868680" cy="457200"/>
-          </a:xfrm>
-          <a:prstGeom prst="roundRect">
-            <a:avLst>
-              <a:gd name="adj" fmla="val 12000"/>
-            </a:avLst>
-          </a:prstGeom>
-          <a:solidFill>
-            <a:srgbClr val="7A3B2E"/>
-          </a:solidFill>
-          <a:ln/>
-        </p:spPr>
-      </p:sp>
-      <p:sp>
-        <p:nvSpPr>
-          <p:cNvPr id="10" name="Text 8"/>
-          <p:cNvSpPr/>
-          <p:nvPr/>
-        </p:nvSpPr>
-        <p:spPr>
-          <a:xfrm>
-            <a:off x="640080" y="2706624"/>
-            <a:ext cx="868680" cy="457200"/>
-          </a:xfrm>
-          <a:prstGeom prst="rect">
-            <a:avLst/>
-          </a:prstGeom>
-          <a:noFill/>
-          <a:ln/>
-        </p:spPr>
-        <p:txBody>
-          <a:bodyPr wrap="square" rtlCol="0" anchor="ctr"/>
-          <a:lstStyle/>
-          <a:p>
-            <a:pPr algn="ctr" indent="0" marL="0">
-              <a:buNone/>
-            </a:pPr>
-            <a:r>
-              <a:rPr lang="en-US" sz="1100" b="1" dirty="0">
-                <a:solidFill>
-                  <a:srgbClr val="FFFFFF"/>
-                </a:solidFill>
-                <a:latin typeface="Calibri" pitchFamily="34" charset="0"/>
-                <a:ea typeface="Calibri" pitchFamily="34" charset="-122"/>
-                <a:cs typeface="Calibri" pitchFamily="34" charset="-120"/>
-              </a:rPr>
-              <a:t>0:25</a:t>
-            </a:r>
-            <a:endParaRPr lang="en-US" sz="1100" dirty="0"/>
-          </a:p>
-        </p:txBody>
-      </p:sp>
-      <p:sp>
-        <p:nvSpPr>
-          <p:cNvPr id="11" name="Text 9"/>
-          <p:cNvSpPr/>
-          <p:nvPr/>
-        </p:nvSpPr>
-        <p:spPr>
-          <a:xfrm>
-            <a:off x="1691640" y="2688336"/>
-            <a:ext cx="9646920" cy="566928"/>
-          </a:xfrm>
-          <a:prstGeom prst="rect">
-            <a:avLst/>
-          </a:prstGeom>
-          <a:noFill/>
-          <a:ln/>
-        </p:spPr>
-        <p:txBody>
-          <a:bodyPr wrap="square" rtlCol="0" anchor="ctr">
-            <a:spAutoFit/>
-          </a:bodyPr>
-          <a:lstStyle/>
-          <a:p>
-            <a:pPr indent="0" marL="0">
-              <a:buNone/>
-            </a:pPr>
-            <a:r>
-              <a:rPr lang="en-US" sz="1250" dirty="0">
-                <a:solidFill>
-                  <a:srgbClr val="1A1A1A"/>
-                </a:solidFill>
-                <a:latin typeface="Calibri" pitchFamily="34" charset="0"/>
-                <a:ea typeface="Calibri" pitchFamily="34" charset="-122"/>
-                <a:cs typeface="Calibri" pitchFamily="34" charset="-120"/>
-              </a:rPr>
-              <a:t>Embed your own corpus, text or images. Image projects embed their pictures and watch them group by untagged style. The embedding model is an open one from Hugging Face, the hub where open models live (the same place Week 8's period models come from). And here charts stop being neutral: switch PCA to t-SNE and the same data rearranges. A visualization is an argument with decisions baked in.</a:t>
-            </a:r>
-            <a:endParaRPr lang="en-US" sz="1250" dirty="0"/>
-          </a:p>
-        </p:txBody>
-      </p:sp>
-      <p:sp>
-        <p:nvSpPr>
-          <p:cNvPr id="12" name="Shape 10"/>
-          <p:cNvSpPr/>
-          <p:nvPr/>
-        </p:nvSpPr>
-        <p:spPr>
-          <a:xfrm>
-            <a:off x="640080" y="3273552"/>
-            <a:ext cx="868680" cy="457200"/>
-          </a:xfrm>
-          <a:prstGeom prst="roundRect">
-            <a:avLst>
-              <a:gd name="adj" fmla="val 12000"/>
-            </a:avLst>
-          </a:prstGeom>
-          <a:solidFill>
-            <a:srgbClr val="7A3B2E"/>
-          </a:solidFill>
-          <a:ln/>
-        </p:spPr>
-      </p:sp>
-      <p:sp>
-        <p:nvSpPr>
-          <p:cNvPr id="13" name="Text 11"/>
-          <p:cNvSpPr/>
-          <p:nvPr/>
-        </p:nvSpPr>
-        <p:spPr>
-          <a:xfrm>
-            <a:off x="640080" y="3273552"/>
-            <a:ext cx="868680" cy="457200"/>
-          </a:xfrm>
-          <a:prstGeom prst="rect">
-            <a:avLst/>
-          </a:prstGeom>
-          <a:noFill/>
-          <a:ln/>
-        </p:spPr>
-        <p:txBody>
-          <a:bodyPr wrap="square" rtlCol="0" anchor="ctr"/>
-          <a:lstStyle/>
-          <a:p>
-            <a:pPr algn="ctr" indent="0" marL="0">
-              <a:buNone/>
-            </a:pPr>
-            <a:r>
-              <a:rPr lang="en-US" sz="1100" b="1" dirty="0">
-                <a:solidFill>
-                  <a:srgbClr val="FFFFFF"/>
-                </a:solidFill>
-                <a:latin typeface="Calibri" pitchFamily="34" charset="0"/>
-                <a:ea typeface="Calibri" pitchFamily="34" charset="-122"/>
-                <a:cs typeface="Calibri" pitchFamily="34" charset="-120"/>
-              </a:rPr>
-              <a:t>0:55</a:t>
-            </a:r>
-            <a:endParaRPr lang="en-US" sz="1100" dirty="0"/>
-          </a:p>
-        </p:txBody>
-      </p:sp>
-      <p:sp>
-        <p:nvSpPr>
-          <p:cNvPr id="14" name="Text 12"/>
-          <p:cNvSpPr/>
-          <p:nvPr/>
-        </p:nvSpPr>
-        <p:spPr>
-          <a:xfrm>
-            <a:off x="1691640" y="3255264"/>
-            <a:ext cx="9646920" cy="566928"/>
-          </a:xfrm>
-          <a:prstGeom prst="rect">
-            <a:avLst/>
-          </a:prstGeom>
-          <a:noFill/>
-          <a:ln/>
-        </p:spPr>
-        <p:txBody>
-          <a:bodyPr wrap="square" rtlCol="0" anchor="ctr">
-            <a:spAutoFit/>
-          </a:bodyPr>
-          <a:lstStyle/>
-          <a:p>
-            <a:pPr indent="0" marL="0">
-              <a:buNone/>
-            </a:pPr>
-            <a:r>
-              <a:rPr lang="en-US" sz="1250" dirty="0">
-                <a:solidFill>
-                  <a:srgbClr val="1A1A1A"/>
-                </a:solidFill>
-                <a:latin typeface="Calibri" pitchFamily="34" charset="0"/>
-                <a:ea typeface="Calibri" pitchFamily="34" charset="-122"/>
-                <a:cs typeface="Calibri" pitchFamily="34" charset="-120"/>
-              </a:rPr>
-              <a:t>Break</a:t>
-            </a:r>
-            <a:endParaRPr lang="en-US" sz="1250" dirty="0"/>
-          </a:p>
-        </p:txBody>
-      </p:sp>
-      <p:sp>
-        <p:nvSpPr>
-          <p:cNvPr id="15" name="Shape 13"/>
-          <p:cNvSpPr/>
-          <p:nvPr/>
-        </p:nvSpPr>
-        <p:spPr>
-          <a:xfrm>
-            <a:off x="640080" y="3840480"/>
-            <a:ext cx="868680" cy="457200"/>
-          </a:xfrm>
-          <a:prstGeom prst="roundRect">
-            <a:avLst>
-              <a:gd name="adj" fmla="val 12000"/>
-            </a:avLst>
-          </a:prstGeom>
-          <a:solidFill>
-            <a:srgbClr val="7A3B2E"/>
-          </a:solidFill>
-          <a:ln/>
-        </p:spPr>
-      </p:sp>
-      <p:sp>
-        <p:nvSpPr>
-          <p:cNvPr id="16" name="Text 14"/>
-          <p:cNvSpPr/>
-          <p:nvPr/>
-        </p:nvSpPr>
-        <p:spPr>
-          <a:xfrm>
-            <a:off x="640080" y="3840480"/>
-            <a:ext cx="868680" cy="457200"/>
-          </a:xfrm>
-          <a:prstGeom prst="rect">
-            <a:avLst/>
-          </a:prstGeom>
-          <a:noFill/>
-          <a:ln/>
-        </p:spPr>
-        <p:txBody>
-          <a:bodyPr wrap="square" rtlCol="0" anchor="ctr"/>
-          <a:lstStyle/>
-          <a:p>
-            <a:pPr algn="ctr" indent="0" marL="0">
-              <a:buNone/>
-            </a:pPr>
-            <a:r>
-              <a:rPr lang="en-US" sz="1100" b="1" dirty="0">
-                <a:solidFill>
-                  <a:srgbClr val="FFFFFF"/>
-                </a:solidFill>
-                <a:latin typeface="Calibri" pitchFamily="34" charset="0"/>
-                <a:ea typeface="Calibri" pitchFamily="34" charset="-122"/>
-                <a:cs typeface="Calibri" pitchFamily="34" charset="-120"/>
-              </a:rPr>
-              <a:t>1:05</a:t>
-            </a:r>
-            <a:endParaRPr lang="en-US" sz="1100" dirty="0"/>
-          </a:p>
-        </p:txBody>
-      </p:sp>
-      <p:sp>
-        <p:nvSpPr>
-          <p:cNvPr id="17" name="Text 15"/>
-          <p:cNvSpPr/>
-          <p:nvPr/>
-        </p:nvSpPr>
-        <p:spPr>
-          <a:xfrm>
-            <a:off x="1691640" y="3822192"/>
-            <a:ext cx="9646920" cy="566928"/>
-          </a:xfrm>
-          <a:prstGeom prst="rect">
-            <a:avLst/>
-          </a:prstGeom>
-          <a:noFill/>
-          <a:ln/>
-        </p:spPr>
-        <p:txBody>
-          <a:bodyPr wrap="square" rtlCol="0" anchor="ctr">
-            <a:spAutoFit/>
-          </a:bodyPr>
-          <a:lstStyle/>
-          <a:p>
-            <a:pPr indent="0" marL="0">
-              <a:buNone/>
-            </a:pPr>
-            <a:r>
-              <a:rPr lang="en-US" sz="1250" dirty="0">
-                <a:solidFill>
-                  <a:srgbClr val="1A1A1A"/>
-                </a:solidFill>
-                <a:latin typeface="Calibri" pitchFamily="34" charset="0"/>
-                <a:ea typeface="Calibri" pitchFamily="34" charset="-122"/>
-                <a:cs typeface="Calibri" pitchFamily="34" charset="-120"/>
-              </a:rPr>
-              <a:t>Project lab: push your embeddings, hunt the surprise cluster. A five-minute recommenders aside: "For You" is this same map plus your history. One-on-ones begin at the side.</a:t>
-            </a:r>
-            <a:endParaRPr lang="en-US" sz="1250" dirty="0"/>
-          </a:p>
-        </p:txBody>
-      </p:sp>
-      <p:sp>
-        <p:nvSpPr>
-          <p:cNvPr id="18" name="Shape 16"/>
-          <p:cNvSpPr/>
-          <p:nvPr/>
-        </p:nvSpPr>
-        <p:spPr>
-          <a:xfrm>
-            <a:off x="640080" y="4407408"/>
-            <a:ext cx="868680" cy="457200"/>
-          </a:xfrm>
-          <a:prstGeom prst="roundRect">
-            <a:avLst>
-              <a:gd name="adj" fmla="val 12000"/>
-            </a:avLst>
-          </a:prstGeom>
-          <a:solidFill>
-            <a:srgbClr val="7A3B2E"/>
-          </a:solidFill>
-          <a:ln/>
-        </p:spPr>
-      </p:sp>
-      <p:sp>
-        <p:nvSpPr>
-          <p:cNvPr id="19" name="Text 17"/>
-          <p:cNvSpPr/>
-          <p:nvPr/>
-        </p:nvSpPr>
-        <p:spPr>
-          <a:xfrm>
-            <a:off x="640080" y="4407408"/>
-            <a:ext cx="868680" cy="457200"/>
-          </a:xfrm>
-          <a:prstGeom prst="rect">
-            <a:avLst/>
-          </a:prstGeom>
-          <a:noFill/>
-          <a:ln/>
-        </p:spPr>
-        <p:txBody>
-          <a:bodyPr wrap="square" rtlCol="0" anchor="ctr"/>
-          <a:lstStyle/>
-          <a:p>
-            <a:pPr algn="ctr" indent="0" marL="0">
-              <a:buNone/>
-            </a:pPr>
-            <a:r>
-              <a:rPr lang="en-US" sz="1100" b="1" dirty="0">
-                <a:solidFill>
-                  <a:srgbClr val="FFFFFF"/>
-                </a:solidFill>
-                <a:latin typeface="Calibri" pitchFamily="34" charset="0"/>
-                <a:ea typeface="Calibri" pitchFamily="34" charset="-122"/>
-                <a:cs typeface="Calibri" pitchFamily="34" charset="-120"/>
-              </a:rPr>
-              <a:t>1:50</a:t>
-            </a:r>
-            <a:endParaRPr lang="en-US" sz="1100" dirty="0"/>
-          </a:p>
-        </p:txBody>
-      </p:sp>
-      <p:sp>
-        <p:nvSpPr>
-          <p:cNvPr id="20" name="Text 18"/>
-          <p:cNvSpPr/>
-          <p:nvPr/>
-        </p:nvSpPr>
-        <p:spPr>
-          <a:xfrm>
-            <a:off x="1691640" y="4389120"/>
-            <a:ext cx="9646920" cy="566928"/>
-          </a:xfrm>
-          <a:prstGeom prst="rect">
-            <a:avLst/>
-          </a:prstGeom>
-          <a:noFill/>
-          <a:ln/>
-        </p:spPr>
-        <p:txBody>
-          <a:bodyPr wrap="square" rtlCol="0" anchor="ctr">
-            <a:spAutoFit/>
-          </a:bodyPr>
-          <a:lstStyle/>
-          <a:p>
-            <a:pPr indent="0" marL="0">
-              <a:buNone/>
-            </a:pPr>
-            <a:r>
-              <a:rPr lang="en-US" sz="1250" dirty="0">
-                <a:solidFill>
-                  <a:srgbClr val="1A1A1A"/>
-                </a:solidFill>
-                <a:latin typeface="Calibri" pitchFamily="34" charset="0"/>
-                <a:ea typeface="Calibri" pitchFamily="34" charset="-122"/>
-                <a:cs typeface="Calibri" pitchFamily="34" charset="-120"/>
-              </a:rPr>
-              <a:t>Gemini-free check and check-out.</a:t>
-            </a:r>
-            <a:endParaRPr lang="en-US" sz="1250" dirty="0"/>
+              <a:t>The room settles it: what makes a found dimension a discovery vs. the corpus's own bias, the data, the purpose, or what you do with the result?</a:t>
+            </a:r>
+            <a:endParaRPr lang="en-US" sz="1650" dirty="0"/>
           </a:p>
         </p:txBody>
       </p:sp>
@@ -3629,14 +5040,34 @@
       </p:grpSpPr>
       <p:sp>
         <p:nvSpPr>
-          <p:cNvPr id="2" name="Text 0"/>
+          <p:cNvPr id="2" name="Shape 0"/>
+          <p:cNvSpPr/>
+          <p:nvPr/>
+        </p:nvSpPr>
+        <p:spPr>
+          <a:xfrm>
+            <a:off x="0" y="0"/>
+            <a:ext cx="164592" cy="6858000"/>
+          </a:xfrm>
+          <a:prstGeom prst="rect">
+            <a:avLst/>
+          </a:prstGeom>
+          <a:solidFill>
+            <a:srgbClr val="B9852F"/>
+          </a:solidFill>
+          <a:ln/>
+        </p:spPr>
+      </p:sp>
+      <p:sp>
+        <p:nvSpPr>
+          <p:cNvPr id="3" name="Text 1"/>
           <p:cNvSpPr/>
           <p:nvPr/>
         </p:nvSpPr>
         <p:spPr>
           <a:xfrm>
             <a:off x="640080" y="640080"/>
-            <a:ext cx="10058400" cy="731520"/>
+            <a:ext cx="10058400" cy="320040"/>
           </a:xfrm>
           <a:prstGeom prst="rect">
             <a:avLst/>
@@ -3646,6 +5077,47 @@
         </p:spPr>
         <p:txBody>
           <a:bodyPr wrap="square" rtlCol="0" anchor="ctr"/>
+          <a:lstStyle/>
+          <a:p>
+            <a:pPr indent="0" marL="0">
+              <a:buNone/>
+            </a:pPr>
+            <a:r>
+              <a:rPr lang="en-US" sz="1200" b="1" spc="300" kern="0" dirty="0">
+                <a:solidFill>
+                  <a:srgbClr val="B9852F"/>
+                </a:solidFill>
+                <a:latin typeface="Calibri" pitchFamily="34" charset="0"/>
+                <a:ea typeface="Calibri" pitchFamily="34" charset="-122"/>
+                <a:cs typeface="Calibri" pitchFamily="34" charset="-120"/>
+              </a:rPr>
+              <a:t>WEEK 5 · THE MATERIAL</a:t>
+            </a:r>
+            <a:endParaRPr lang="en-US" sz="1200" dirty="0"/>
+          </a:p>
+        </p:txBody>
+      </p:sp>
+      <p:sp>
+        <p:nvSpPr>
+          <p:cNvPr id="4" name="Text 2"/>
+          <p:cNvSpPr/>
+          <p:nvPr/>
+        </p:nvSpPr>
+        <p:spPr>
+          <a:xfrm>
+            <a:off x="640080" y="1005840"/>
+            <a:ext cx="10881360" cy="914400"/>
+          </a:xfrm>
+          <a:prstGeom prst="rect">
+            <a:avLst/>
+          </a:prstGeom>
+          <a:noFill/>
+          <a:ln/>
+        </p:spPr>
+        <p:txBody>
+          <a:bodyPr wrap="square" rtlCol="0" anchor="t">
+            <a:spAutoFit/>
+          </a:bodyPr>
           <a:lstStyle/>
           <a:p>
             <a:pPr indent="0" marL="0">
@@ -3660,7 +5132,7 @@
                 <a:ea typeface="Cambria" pitchFamily="34" charset="-122"/>
                 <a:cs typeface="Cambria" pitchFamily="34" charset="-120"/>
               </a:rPr>
-              <a:t>Reading &amp; homework</a:t>
+              <a:t>The chart is a choice</a:t>
             </a:r>
             <a:endParaRPr lang="en-US" sz="3000" dirty="0"/>
           </a:p>
@@ -3668,14 +5140,14 @@
       </p:sp>
       <p:sp>
         <p:nvSpPr>
-          <p:cNvPr id="3" name="Shape 1"/>
-          <p:cNvSpPr/>
-          <p:nvPr/>
-        </p:nvSpPr>
-        <p:spPr>
-          <a:xfrm>
-            <a:off x="640080" y="1810512"/>
-            <a:ext cx="219456" cy="219456"/>
+          <p:cNvPr id="5" name="Shape 3"/>
+          <p:cNvSpPr/>
+          <p:nvPr/>
+        </p:nvSpPr>
+        <p:spPr>
+          <a:xfrm>
+            <a:off x="640080" y="2331720"/>
+            <a:ext cx="201168" cy="201168"/>
           </a:xfrm>
           <a:prstGeom prst="ellipse">
             <a:avLst/>
@@ -3688,53 +5160,78 @@
       </p:sp>
       <p:sp>
         <p:nvSpPr>
-          <p:cNvPr id="4" name="Text 2"/>
-          <p:cNvSpPr/>
-          <p:nvPr/>
-        </p:nvSpPr>
-        <p:spPr>
-          <a:xfrm>
-            <a:off x="1051560" y="1737360"/>
-            <a:ext cx="10424160" cy="365760"/>
-          </a:xfrm>
-          <a:prstGeom prst="rect">
-            <a:avLst/>
-          </a:prstGeom>
-          <a:noFill/>
-          <a:ln/>
-        </p:spPr>
-        <p:txBody>
-          <a:bodyPr wrap="square" rtlCol="0" anchor="ctr"/>
+          <p:cNvPr id="6" name="Text 4"/>
+          <p:cNvSpPr/>
+          <p:nvPr/>
+        </p:nvSpPr>
+        <p:spPr>
+          <a:xfrm>
+            <a:off x="1097280" y="2240280"/>
+            <a:ext cx="10607040" cy="1017270"/>
+          </a:xfrm>
+          <a:prstGeom prst="rect">
+            <a:avLst/>
+          </a:prstGeom>
+          <a:noFill/>
+          <a:ln/>
+        </p:spPr>
+        <p:txBody>
+          <a:bodyPr wrap="square" rtlCol="0" anchor="t">
+            <a:spAutoFit/>
+          </a:bodyPr>
           <a:lstStyle/>
           <a:p>
             <a:pPr indent="0" marL="0">
-              <a:buNone/>
-            </a:pPr>
-            <a:r>
-              <a:rPr lang="en-US" sz="1500" b="1" dirty="0">
-                <a:solidFill>
-                  <a:srgbClr val="7A3B2E"/>
+              <a:lnSpc>
+                <a:spcPct val="112000"/>
+              </a:lnSpc>
+              <a:buNone/>
+            </a:pPr>
+            <a:r>
+              <a:rPr lang="en-US" sz="1650" dirty="0">
+                <a:solidFill>
+                  <a:srgbClr val="1A1A1A"/>
                 </a:solidFill>
                 <a:latin typeface="Calibri" pitchFamily="34" charset="0"/>
                 <a:ea typeface="Calibri" pitchFamily="34" charset="-122"/>
                 <a:cs typeface="Calibri" pitchFamily="34" charset="-120"/>
               </a:rPr>
-              <a:t>Reading</a:t>
-            </a:r>
-            <a:endParaRPr lang="en-US" sz="1500" dirty="0"/>
-          </a:p>
-        </p:txBody>
-      </p:sp>
-      <p:sp>
-        <p:nvSpPr>
-          <p:cNvPr id="5" name="Text 3"/>
-          <p:cNvSpPr/>
-          <p:nvPr/>
-        </p:nvSpPr>
-        <p:spPr>
-          <a:xfrm>
-            <a:off x="1051560" y="2121408"/>
-            <a:ext cx="10424160" cy="731520"/>
+              <a:t>PCA and t-SNE flatten the same vectors two ways: clusters tighten, distances shift, a grouping you trusted can dissolve.</a:t>
+            </a:r>
+            <a:endParaRPr lang="en-US" sz="1650" dirty="0"/>
+          </a:p>
+        </p:txBody>
+      </p:sp>
+      <p:sp>
+        <p:nvSpPr>
+          <p:cNvPr id="7" name="Shape 5"/>
+          <p:cNvSpPr/>
+          <p:nvPr/>
+        </p:nvSpPr>
+        <p:spPr>
+          <a:xfrm>
+            <a:off x="640080" y="3348990"/>
+            <a:ext cx="201168" cy="201168"/>
+          </a:xfrm>
+          <a:prstGeom prst="ellipse">
+            <a:avLst/>
+          </a:prstGeom>
+          <a:solidFill>
+            <a:srgbClr val="3F6F5F"/>
+          </a:solidFill>
+          <a:ln/>
+        </p:spPr>
+      </p:sp>
+      <p:sp>
+        <p:nvSpPr>
+          <p:cNvPr id="8" name="Text 6"/>
+          <p:cNvSpPr/>
+          <p:nvPr/>
+        </p:nvSpPr>
+        <p:spPr>
+          <a:xfrm>
+            <a:off x="1097280" y="3257550"/>
+            <a:ext cx="10607040" cy="1017270"/>
           </a:xfrm>
           <a:prstGeom prst="rect">
             <a:avLst/>
@@ -3749,10 +5246,13 @@
           <a:lstStyle/>
           <a:p>
             <a:pPr indent="0" marL="0">
-              <a:buNone/>
-            </a:pPr>
-            <a:r>
-              <a:rPr lang="en-US" sz="1400" dirty="0">
+              <a:lnSpc>
+                <a:spcPct val="112000"/>
+              </a:lnSpc>
+              <a:buNone/>
+            </a:pPr>
+            <a:r>
+              <a:rPr lang="en-US" sz="1650" dirty="0">
                 <a:solidFill>
                   <a:srgbClr val="1A1A1A"/>
                 </a:solidFill>
@@ -3760,81 +5260,106 @@
                 <a:ea typeface="Calibri" pitchFamily="34" charset="-122"/>
                 <a:cs typeface="Calibri" pitchFamily="34" charset="-120"/>
               </a:rPr>
-              <a:t>Alammar, The Illustrated Word2Vec, plus the debate: Kozlowski/Taddy/Evans, The Geometry of Culture (ASR 2019) vs. Bolukbasi et al. (2016)</a:t>
-            </a:r>
-            <a:endParaRPr lang="en-US" sz="1400" dirty="0"/>
-          </a:p>
-        </p:txBody>
-      </p:sp>
-      <p:sp>
-        <p:nvSpPr>
-          <p:cNvPr id="6" name="Shape 4"/>
-          <p:cNvSpPr/>
-          <p:nvPr/>
-        </p:nvSpPr>
-        <p:spPr>
-          <a:xfrm>
-            <a:off x="640080" y="2953512"/>
-            <a:ext cx="219456" cy="219456"/>
+              <a:t>"Near" means probably similar. Exact distances on the flattened map mean little.</a:t>
+            </a:r>
+            <a:endParaRPr lang="en-US" sz="1650" dirty="0"/>
+          </a:p>
+        </p:txBody>
+      </p:sp>
+      <p:sp>
+        <p:nvSpPr>
+          <p:cNvPr id="9" name="Shape 7"/>
+          <p:cNvSpPr/>
+          <p:nvPr/>
+        </p:nvSpPr>
+        <p:spPr>
+          <a:xfrm>
+            <a:off x="640080" y="4366260"/>
+            <a:ext cx="201168" cy="201168"/>
           </a:xfrm>
           <a:prstGeom prst="ellipse">
             <a:avLst/>
           </a:prstGeom>
           <a:solidFill>
-            <a:srgbClr val="3F6F5F"/>
-          </a:solidFill>
-          <a:ln/>
-        </p:spPr>
-      </p:sp>
-      <p:sp>
-        <p:nvSpPr>
-          <p:cNvPr id="7" name="Text 5"/>
-          <p:cNvSpPr/>
-          <p:nvPr/>
-        </p:nvSpPr>
-        <p:spPr>
-          <a:xfrm>
-            <a:off x="1051560" y="2880360"/>
-            <a:ext cx="10424160" cy="365760"/>
-          </a:xfrm>
-          <a:prstGeom prst="rect">
-            <a:avLst/>
-          </a:prstGeom>
-          <a:noFill/>
-          <a:ln/>
-        </p:spPr>
-        <p:txBody>
-          <a:bodyPr wrap="square" rtlCol="0" anchor="ctr"/>
+            <a:srgbClr val="B9852F"/>
+          </a:solidFill>
+          <a:ln/>
+        </p:spPr>
+      </p:sp>
+      <p:sp>
+        <p:nvSpPr>
+          <p:cNvPr id="10" name="Text 8"/>
+          <p:cNvSpPr/>
+          <p:nvPr/>
+        </p:nvSpPr>
+        <p:spPr>
+          <a:xfrm>
+            <a:off x="1097280" y="4274820"/>
+            <a:ext cx="10607040" cy="1017270"/>
+          </a:xfrm>
+          <a:prstGeom prst="rect">
+            <a:avLst/>
+          </a:prstGeom>
+          <a:noFill/>
+          <a:ln/>
+        </p:spPr>
+        <p:txBody>
+          <a:bodyPr wrap="square" rtlCol="0" anchor="t">
+            <a:spAutoFit/>
+          </a:bodyPr>
           <a:lstStyle/>
           <a:p>
             <a:pPr indent="0" marL="0">
-              <a:buNone/>
-            </a:pPr>
-            <a:r>
-              <a:rPr lang="en-US" sz="1500" b="1" dirty="0">
-                <a:solidFill>
-                  <a:srgbClr val="3F6F5F"/>
+              <a:lnSpc>
+                <a:spcPct val="112000"/>
+              </a:lnSpc>
+              <a:buNone/>
+            </a:pPr>
+            <a:r>
+              <a:rPr lang="en-US" sz="1650" dirty="0">
+                <a:solidFill>
+                  <a:srgbClr val="1A1A1A"/>
                 </a:solidFill>
                 <a:latin typeface="Calibri" pitchFamily="34" charset="0"/>
                 <a:ea typeface="Calibri" pitchFamily="34" charset="-122"/>
                 <a:cs typeface="Calibri" pitchFamily="34" charset="-120"/>
               </a:rPr>
-              <a:t>Supplement</a:t>
-            </a:r>
-            <a:endParaRPr lang="en-US" sz="1500" dirty="0"/>
-          </a:p>
-        </p:txBody>
-      </p:sp>
-      <p:sp>
-        <p:nvSpPr>
-          <p:cNvPr id="8" name="Text 6"/>
-          <p:cNvSpPr/>
-          <p:nvPr/>
-        </p:nvSpPr>
-        <p:spPr>
-          <a:xfrm>
-            <a:off x="1051560" y="3264408"/>
-            <a:ext cx="10424160" cy="731520"/>
+              <a:t>A visualization is an argument with decisions baked in: projection, axes, what's dropped.</a:t>
+            </a:r>
+            <a:endParaRPr lang="en-US" sz="1650" dirty="0"/>
+          </a:p>
+        </p:txBody>
+      </p:sp>
+      <p:sp>
+        <p:nvSpPr>
+          <p:cNvPr id="11" name="Shape 9"/>
+          <p:cNvSpPr/>
+          <p:nvPr/>
+        </p:nvSpPr>
+        <p:spPr>
+          <a:xfrm>
+            <a:off x="640080" y="5383530"/>
+            <a:ext cx="201168" cy="201168"/>
+          </a:xfrm>
+          <a:prstGeom prst="ellipse">
+            <a:avLst/>
+          </a:prstGeom>
+          <a:solidFill>
+            <a:srgbClr val="7A3B2E"/>
+          </a:solidFill>
+          <a:ln/>
+        </p:spPr>
+      </p:sp>
+      <p:sp>
+        <p:nvSpPr>
+          <p:cNvPr id="12" name="Text 10"/>
+          <p:cNvSpPr/>
+          <p:nvPr/>
+        </p:nvSpPr>
+        <p:spPr>
+          <a:xfrm>
+            <a:off x="1097280" y="5292090"/>
+            <a:ext cx="10607040" cy="1017270"/>
           </a:xfrm>
           <a:prstGeom prst="rect">
             <a:avLst/>
@@ -3849,10 +5374,13 @@
           <a:lstStyle/>
           <a:p>
             <a:pPr indent="0" marL="0">
-              <a:buNone/>
-            </a:pPr>
-            <a:r>
-              <a:rPr lang="en-US" sz="1400" dirty="0">
+              <a:lnSpc>
+                <a:spcPct val="112000"/>
+              </a:lnSpc>
+              <a:buNone/>
+            </a:pPr>
+            <a:r>
+              <a:rPr lang="en-US" sz="1650" dirty="0">
                 <a:solidFill>
                   <a:srgbClr val="1A1A1A"/>
                 </a:solidFill>
@@ -3860,209 +5388,9 @@
                 <a:ea typeface="Calibri" pitchFamily="34" charset="-122"/>
                 <a:cs typeface="Calibri" pitchFamily="34" charset="-120"/>
               </a:rPr>
-              <a:t>The second pairing: Caliskan et al. (2017) vs. Soni/Klein, How Words Lead to Justice; Anderson et al., Spotify diversity</a:t>
-            </a:r>
-            <a:endParaRPr lang="en-US" sz="1400" dirty="0"/>
-          </a:p>
-        </p:txBody>
-      </p:sp>
-      <p:sp>
-        <p:nvSpPr>
-          <p:cNvPr id="9" name="Shape 7"/>
-          <p:cNvSpPr/>
-          <p:nvPr/>
-        </p:nvSpPr>
-        <p:spPr>
-          <a:xfrm>
-            <a:off x="640080" y="4096512"/>
-            <a:ext cx="219456" cy="219456"/>
-          </a:xfrm>
-          <a:prstGeom prst="ellipse">
-            <a:avLst/>
-          </a:prstGeom>
-          <a:solidFill>
-            <a:srgbClr val="B9852F"/>
-          </a:solidFill>
-          <a:ln/>
-        </p:spPr>
-      </p:sp>
-      <p:sp>
-        <p:nvSpPr>
-          <p:cNvPr id="10" name="Text 8"/>
-          <p:cNvSpPr/>
-          <p:nvPr/>
-        </p:nvSpPr>
-        <p:spPr>
-          <a:xfrm>
-            <a:off x="1051560" y="4023360"/>
-            <a:ext cx="10424160" cy="365760"/>
-          </a:xfrm>
-          <a:prstGeom prst="rect">
-            <a:avLst/>
-          </a:prstGeom>
-          <a:noFill/>
-          <a:ln/>
-        </p:spPr>
-        <p:txBody>
-          <a:bodyPr wrap="square" rtlCol="0" anchor="ctr"/>
-          <a:lstStyle/>
-          <a:p>
-            <a:pPr indent="0" marL="0">
-              <a:buNone/>
-            </a:pPr>
-            <a:r>
-              <a:rPr lang="en-US" sz="1500" b="1" dirty="0">
-                <a:solidFill>
-                  <a:srgbClr val="B9852F"/>
-                </a:solidFill>
-                <a:latin typeface="Calibri" pitchFamily="34" charset="0"/>
-                <a:ea typeface="Calibri" pitchFamily="34" charset="-122"/>
-                <a:cs typeface="Calibri" pitchFamily="34" charset="-120"/>
-              </a:rPr>
-              <a:t>Sketch</a:t>
-            </a:r>
-            <a:endParaRPr lang="en-US" sz="1500" dirty="0"/>
-          </a:p>
-        </p:txBody>
-      </p:sp>
-      <p:sp>
-        <p:nvSpPr>
-          <p:cNvPr id="11" name="Text 9"/>
-          <p:cNvSpPr/>
-          <p:nvPr/>
-        </p:nvSpPr>
-        <p:spPr>
-          <a:xfrm>
-            <a:off x="1051560" y="4407408"/>
-            <a:ext cx="10424160" cy="731520"/>
-          </a:xfrm>
-          <a:prstGeom prst="rect">
-            <a:avLst/>
-          </a:prstGeom>
-          <a:noFill/>
-          <a:ln/>
-        </p:spPr>
-        <p:txBody>
-          <a:bodyPr wrap="square" rtlCol="0" anchor="t">
-            <a:spAutoFit/>
-          </a:bodyPr>
-          <a:lstStyle/>
-          <a:p>
-            <a:pPr indent="0" marL="0">
-              <a:buNone/>
-            </a:pPr>
-            <a:r>
-              <a:rPr lang="en-US" sz="1400" dirty="0">
-                <a:solidFill>
-                  <a:srgbClr val="1A1A1A"/>
-                </a:solidFill>
-                <a:latin typeface="Calibri" pitchFamily="34" charset="0"/>
-                <a:ea typeface="Calibri" pitchFamily="34" charset="-122"/>
-                <a:cs typeface="Calibri" pitchFamily="34" charset="-120"/>
-              </a:rPr>
-              <a:t>Toggle PCA vs. t-SNE and screenshot how the map changes; name one cluster you believe and one you don't.</a:t>
-            </a:r>
-            <a:endParaRPr lang="en-US" sz="1400" dirty="0"/>
-          </a:p>
-        </p:txBody>
-      </p:sp>
-      <p:sp>
-        <p:nvSpPr>
-          <p:cNvPr id="12" name="Shape 10"/>
-          <p:cNvSpPr/>
-          <p:nvPr/>
-        </p:nvSpPr>
-        <p:spPr>
-          <a:xfrm>
-            <a:off x="640080" y="5239512"/>
-            <a:ext cx="219456" cy="219456"/>
-          </a:xfrm>
-          <a:prstGeom prst="ellipse">
-            <a:avLst/>
-          </a:prstGeom>
-          <a:solidFill>
-            <a:srgbClr val="7A3B2E"/>
-          </a:solidFill>
-          <a:ln/>
-        </p:spPr>
-      </p:sp>
-      <p:sp>
-        <p:nvSpPr>
-          <p:cNvPr id="13" name="Text 11"/>
-          <p:cNvSpPr/>
-          <p:nvPr/>
-        </p:nvSpPr>
-        <p:spPr>
-          <a:xfrm>
-            <a:off x="1051560" y="5166360"/>
-            <a:ext cx="10424160" cy="365760"/>
-          </a:xfrm>
-          <a:prstGeom prst="rect">
-            <a:avLst/>
-          </a:prstGeom>
-          <a:noFill/>
-          <a:ln/>
-        </p:spPr>
-        <p:txBody>
-          <a:bodyPr wrap="square" rtlCol="0" anchor="ctr"/>
-          <a:lstStyle/>
-          <a:p>
-            <a:pPr indent="0" marL="0">
-              <a:buNone/>
-            </a:pPr>
-            <a:r>
-              <a:rPr lang="en-US" sz="1500" b="1" dirty="0">
-                <a:solidFill>
-                  <a:srgbClr val="7A3B2E"/>
-                </a:solidFill>
-                <a:latin typeface="Calibri" pitchFamily="34" charset="0"/>
-                <a:ea typeface="Calibri" pitchFamily="34" charset="-122"/>
-                <a:cs typeface="Calibri" pitchFamily="34" charset="-120"/>
-              </a:rPr>
-              <a:t>Check (AI closed)</a:t>
-            </a:r>
-            <a:endParaRPr lang="en-US" sz="1500" dirty="0"/>
-          </a:p>
-        </p:txBody>
-      </p:sp>
-      <p:sp>
-        <p:nvSpPr>
-          <p:cNvPr id="14" name="Text 12"/>
-          <p:cNvSpPr/>
-          <p:nvPr/>
-        </p:nvSpPr>
-        <p:spPr>
-          <a:xfrm>
-            <a:off x="1051560" y="5550408"/>
-            <a:ext cx="10424160" cy="731520"/>
-          </a:xfrm>
-          <a:prstGeom prst="rect">
-            <a:avLst/>
-          </a:prstGeom>
-          <a:noFill/>
-          <a:ln/>
-        </p:spPr>
-        <p:txBody>
-          <a:bodyPr wrap="square" rtlCol="0" anchor="t">
-            <a:spAutoFit/>
-          </a:bodyPr>
-          <a:lstStyle/>
-          <a:p>
-            <a:pPr indent="0" marL="0">
-              <a:buNone/>
-            </a:pPr>
-            <a:r>
-              <a:rPr lang="en-US" sz="1400" dirty="0">
-                <a:solidFill>
-                  <a:srgbClr val="1A1A1A"/>
-                </a:solidFill>
-                <a:latin typeface="Calibri" pitchFamily="34" charset="0"/>
-                <a:ea typeface="Calibri" pitchFamily="34" charset="-122"/>
-                <a:cs typeface="Calibri" pitchFamily="34" charset="-120"/>
-              </a:rPr>
-              <a:t>Explain it: on your map, name one cluster you believe is real and one that's probably a projection artifact, and how you'd tell. (Competency 4.)</a:t>
-            </a:r>
-            <a:endParaRPr lang="en-US" sz="1400" dirty="0"/>
+              <a:t>Tonight's toggle: PCA vs. t-SNE on your own map. Name one cluster you believe and one you don't.</a:t>
+            </a:r>
+            <a:endParaRPr lang="en-US" sz="1650" dirty="0"/>
           </a:p>
         </p:txBody>
       </p:sp>
@@ -4100,7 +5428,27 @@
       </p:grpSpPr>
       <p:sp>
         <p:nvSpPr>
-          <p:cNvPr id="2" name="Text 0"/>
+          <p:cNvPr id="2" name="Shape 0"/>
+          <p:cNvSpPr/>
+          <p:nvPr/>
+        </p:nvSpPr>
+        <p:spPr>
+          <a:xfrm>
+            <a:off x="0" y="0"/>
+            <a:ext cx="164592" cy="6858000"/>
+          </a:xfrm>
+          <a:prstGeom prst="rect">
+            <a:avLst/>
+          </a:prstGeom>
+          <a:solidFill>
+            <a:srgbClr val="7A3B2E"/>
+          </a:solidFill>
+          <a:ln/>
+        </p:spPr>
+      </p:sp>
+      <p:sp>
+        <p:nvSpPr>
+          <p:cNvPr id="3" name="Text 1"/>
           <p:cNvSpPr/>
           <p:nvPr/>
         </p:nvSpPr>
@@ -4123,7 +5471,7 @@
               <a:buNone/>
             </a:pPr>
             <a:r>
-              <a:rPr lang="en-US" sz="1300" b="1" spc="300" kern="0" dirty="0">
+              <a:rPr lang="en-US" sz="1200" b="1" spc="300" kern="0" dirty="0">
                 <a:solidFill>
                   <a:srgbClr val="7A3B2E"/>
                 </a:solidFill>
@@ -4131,38 +5479,40 @@
                 <a:ea typeface="Calibri" pitchFamily="34" charset="-122"/>
                 <a:cs typeface="Calibri" pitchFamily="34" charset="-120"/>
               </a:rPr>
-              <a:t>HOW THIS WEEK CONNECTS</a:t>
-            </a:r>
-            <a:endParaRPr lang="en-US" sz="1300" dirty="0"/>
-          </a:p>
-        </p:txBody>
-      </p:sp>
-      <p:sp>
-        <p:nvSpPr>
-          <p:cNvPr id="3" name="Text 1"/>
-          <p:cNvSpPr/>
-          <p:nvPr/>
-        </p:nvSpPr>
-        <p:spPr>
-          <a:xfrm>
-            <a:off x="640080" y="987552"/>
-            <a:ext cx="10058400" cy="640080"/>
-          </a:xfrm>
-          <a:prstGeom prst="rect">
-            <a:avLst/>
-          </a:prstGeom>
-          <a:noFill/>
-          <a:ln/>
-        </p:spPr>
-        <p:txBody>
-          <a:bodyPr wrap="square" rtlCol="0" anchor="ctr"/>
+              <a:t>WEEK 5 · THE MATERIAL</a:t>
+            </a:r>
+            <a:endParaRPr lang="en-US" sz="1200" dirty="0"/>
+          </a:p>
+        </p:txBody>
+      </p:sp>
+      <p:sp>
+        <p:nvSpPr>
+          <p:cNvPr id="4" name="Text 2"/>
+          <p:cNvSpPr/>
+          <p:nvPr/>
+        </p:nvSpPr>
+        <p:spPr>
+          <a:xfrm>
+            <a:off x="640080" y="1005840"/>
+            <a:ext cx="10881360" cy="914400"/>
+          </a:xfrm>
+          <a:prstGeom prst="rect">
+            <a:avLst/>
+          </a:prstGeom>
+          <a:noFill/>
+          <a:ln/>
+        </p:spPr>
+        <p:txBody>
+          <a:bodyPr wrap="square" rtlCol="0" anchor="t">
+            <a:spAutoFit/>
+          </a:bodyPr>
           <a:lstStyle/>
           <a:p>
             <a:pPr indent="0" marL="0">
               <a:buNone/>
             </a:pPr>
             <a:r>
-              <a:rPr lang="en-US" sz="2800" b="1" dirty="0">
+              <a:rPr lang="en-US" sz="3000" b="1" dirty="0">
                 <a:solidFill>
                   <a:srgbClr val="1A1A1A"/>
                 </a:solidFill>
@@ -4170,27 +5520,25 @@
                 <a:ea typeface="Cambria" pitchFamily="34" charset="-122"/>
                 <a:cs typeface="Cambria" pitchFamily="34" charset="-120"/>
               </a:rPr>
-              <a:t>The course's through-lines</a:t>
-            </a:r>
-            <a:endParaRPr lang="en-US" sz="2800" dirty="0"/>
-          </a:p>
-        </p:txBody>
-      </p:sp>
-      <p:sp>
-        <p:nvSpPr>
-          <p:cNvPr id="4" name="Shape 2"/>
-          <p:cNvSpPr/>
-          <p:nvPr/>
-        </p:nvSpPr>
-        <p:spPr>
-          <a:xfrm>
-            <a:off x="640080" y="2057400"/>
-            <a:ext cx="457200" cy="457200"/>
-          </a:xfrm>
-          <a:prstGeom prst="roundRect">
-            <a:avLst>
-              <a:gd name="adj" fmla="val 16000"/>
-            </a:avLst>
+              <a:t>The recommender aside (five minutes, boxed)</a:t>
+            </a:r>
+            <a:endParaRPr lang="en-US" sz="3000" dirty="0"/>
+          </a:p>
+        </p:txBody>
+      </p:sp>
+      <p:sp>
+        <p:nvSpPr>
+          <p:cNvPr id="5" name="Shape 3"/>
+          <p:cNvSpPr/>
+          <p:nvPr/>
+        </p:nvSpPr>
+        <p:spPr>
+          <a:xfrm>
+            <a:off x="640080" y="2331720"/>
+            <a:ext cx="201168" cy="201168"/>
+          </a:xfrm>
+          <a:prstGeom prst="ellipse">
+            <a:avLst/>
           </a:prstGeom>
           <a:solidFill>
             <a:srgbClr val="7A3B2E"/>
@@ -4200,92 +5548,14 @@
       </p:sp>
       <p:sp>
         <p:nvSpPr>
-          <p:cNvPr id="5" name="Text 3"/>
-          <p:cNvSpPr/>
-          <p:nvPr/>
-        </p:nvSpPr>
-        <p:spPr>
-          <a:xfrm>
-            <a:off x="640080" y="2057400"/>
-            <a:ext cx="457200" cy="457200"/>
-          </a:xfrm>
-          <a:prstGeom prst="rect">
-            <a:avLst/>
-          </a:prstGeom>
-          <a:noFill/>
-          <a:ln/>
-        </p:spPr>
-        <p:txBody>
-          <a:bodyPr wrap="square" rtlCol="0" anchor="ctr"/>
-          <a:lstStyle/>
-          <a:p>
-            <a:pPr algn="ctr" indent="0" marL="0">
-              <a:buNone/>
-            </a:pPr>
-            <a:r>
-              <a:rPr lang="en-US" sz="2000" b="1" dirty="0">
-                <a:solidFill>
-                  <a:srgbClr val="FFFFFF"/>
-                </a:solidFill>
-                <a:latin typeface="Cambria" pitchFamily="34" charset="0"/>
-                <a:ea typeface="Cambria" pitchFamily="34" charset="-122"/>
-                <a:cs typeface="Cambria" pitchFamily="34" charset="-120"/>
-              </a:rPr>
-              <a:t>1</a:t>
-            </a:r>
-            <a:endParaRPr lang="en-US" sz="2000" dirty="0"/>
-          </a:p>
-        </p:txBody>
-      </p:sp>
-      <p:sp>
-        <p:nvSpPr>
           <p:cNvPr id="6" name="Text 4"/>
           <p:cNvSpPr/>
           <p:nvPr/>
         </p:nvSpPr>
         <p:spPr>
           <a:xfrm>
-            <a:off x="1371600" y="2020824"/>
-            <a:ext cx="10332720" cy="411480"/>
-          </a:xfrm>
-          <a:prstGeom prst="rect">
-            <a:avLst/>
-          </a:prstGeom>
-          <a:noFill/>
-          <a:ln/>
-        </p:spPr>
-        <p:txBody>
-          <a:bodyPr wrap="square" rtlCol="0" anchor="ctr"/>
-          <a:lstStyle/>
-          <a:p>
-            <a:pPr indent="0" marL="0">
-              <a:buNone/>
-            </a:pPr>
-            <a:r>
-              <a:rPr lang="en-US" sz="1900" b="1" dirty="0">
-                <a:solidFill>
-                  <a:srgbClr val="7A3B2E"/>
-                </a:solidFill>
-                <a:latin typeface="Cambria" pitchFamily="34" charset="0"/>
-                <a:ea typeface="Cambria" pitchFamily="34" charset="-122"/>
-                <a:cs typeface="Cambria" pitchFamily="34" charset="-120"/>
-              </a:rPr>
-              <a:t>Beyond counting (the payoff)</a:t>
-            </a:r>
-            <a:endParaRPr lang="en-US" sz="1900" dirty="0"/>
-          </a:p>
-        </p:txBody>
-      </p:sp>
-      <p:sp>
-        <p:nvSpPr>
-          <p:cNvPr id="7" name="Text 5"/>
-          <p:cNvSpPr/>
-          <p:nvPr/>
-        </p:nvSpPr>
-        <p:spPr>
-          <a:xfrm>
-            <a:off x="1371600" y="2441448"/>
-            <a:ext cx="10332720" cy="914400"/>
+            <a:off x="1097280" y="2240280"/>
+            <a:ext cx="10607040" cy="1051560"/>
           </a:xfrm>
           <a:prstGeom prst="rect">
             <a:avLst/>
@@ -4306,7 +5576,7 @@
               <a:buNone/>
             </a:pPr>
             <a:r>
-              <a:rPr lang="en-US" sz="1450" dirty="0">
+              <a:rPr lang="en-US" sz="1650" dirty="0">
                 <a:solidFill>
                   <a:srgbClr val="1A1A1A"/>
                 </a:solidFill>
@@ -4314,27 +5584,25 @@
                 <a:ea typeface="Calibri" pitchFamily="34" charset="-122"/>
                 <a:cs typeface="Calibri" pitchFamily="34" charset="-120"/>
               </a:rPr>
-              <a:t>The same counting question from Week 2, now embedded: clusters counting could not see.</a:t>
-            </a:r>
-            <a:endParaRPr lang="en-US" sz="1450" dirty="0"/>
-          </a:p>
-        </p:txBody>
-      </p:sp>
-      <p:sp>
-        <p:nvSpPr>
-          <p:cNvPr id="8" name="Shape 6"/>
-          <p:cNvSpPr/>
-          <p:nvPr/>
-        </p:nvSpPr>
-        <p:spPr>
-          <a:xfrm>
-            <a:off x="640080" y="3520440"/>
-            <a:ext cx="457200" cy="457200"/>
-          </a:xfrm>
-          <a:prstGeom prst="roundRect">
-            <a:avLst>
-              <a:gd name="adj" fmla="val 16000"/>
-            </a:avLst>
+              <a:t>"For You" is this same map plus your history: you are a point in taste-space, the feed is your nearest neighbors.</a:t>
+            </a:r>
+            <a:endParaRPr lang="en-US" sz="1650" dirty="0"/>
+          </a:p>
+        </p:txBody>
+      </p:sp>
+      <p:sp>
+        <p:nvSpPr>
+          <p:cNvPr id="7" name="Shape 5"/>
+          <p:cNvSpPr/>
+          <p:nvPr/>
+        </p:nvSpPr>
+        <p:spPr>
+          <a:xfrm>
+            <a:off x="640080" y="3383280"/>
+            <a:ext cx="201168" cy="201168"/>
+          </a:xfrm>
+          <a:prstGeom prst="ellipse">
+            <a:avLst/>
           </a:prstGeom>
           <a:solidFill>
             <a:srgbClr val="3F6F5F"/>
@@ -4344,92 +5612,14 @@
       </p:sp>
       <p:sp>
         <p:nvSpPr>
-          <p:cNvPr id="9" name="Text 7"/>
-          <p:cNvSpPr/>
-          <p:nvPr/>
-        </p:nvSpPr>
-        <p:spPr>
-          <a:xfrm>
-            <a:off x="640080" y="3520440"/>
-            <a:ext cx="457200" cy="457200"/>
-          </a:xfrm>
-          <a:prstGeom prst="rect">
-            <a:avLst/>
-          </a:prstGeom>
-          <a:noFill/>
-          <a:ln/>
-        </p:spPr>
-        <p:txBody>
-          <a:bodyPr wrap="square" rtlCol="0" anchor="ctr"/>
-          <a:lstStyle/>
-          <a:p>
-            <a:pPr algn="ctr" indent="0" marL="0">
-              <a:buNone/>
-            </a:pPr>
-            <a:r>
-              <a:rPr lang="en-US" sz="2000" b="1" dirty="0">
-                <a:solidFill>
-                  <a:srgbClr val="FFFFFF"/>
-                </a:solidFill>
-                <a:latin typeface="Cambria" pitchFamily="34" charset="0"/>
-                <a:ea typeface="Cambria" pitchFamily="34" charset="-122"/>
-                <a:cs typeface="Cambria" pitchFamily="34" charset="-120"/>
-              </a:rPr>
-              <a:t>2</a:t>
-            </a:r>
-            <a:endParaRPr lang="en-US" sz="2000" dirty="0"/>
-          </a:p>
-        </p:txBody>
-      </p:sp>
-      <p:sp>
-        <p:nvSpPr>
-          <p:cNvPr id="10" name="Text 8"/>
-          <p:cNvSpPr/>
-          <p:nvPr/>
-        </p:nvSpPr>
-        <p:spPr>
-          <a:xfrm>
-            <a:off x="1371600" y="3483864"/>
-            <a:ext cx="10332720" cy="411480"/>
-          </a:xfrm>
-          <a:prstGeom prst="rect">
-            <a:avLst/>
-          </a:prstGeom>
-          <a:noFill/>
-          <a:ln/>
-        </p:spPr>
-        <p:txBody>
-          <a:bodyPr wrap="square" rtlCol="0" anchor="ctr"/>
-          <a:lstStyle/>
-          <a:p>
-            <a:pPr indent="0" marL="0">
-              <a:buNone/>
-            </a:pPr>
-            <a:r>
-              <a:rPr lang="en-US" sz="1900" b="1" dirty="0">
-                <a:solidFill>
-                  <a:srgbClr val="3F6F5F"/>
-                </a:solidFill>
-                <a:latin typeface="Cambria" pitchFamily="34" charset="0"/>
-                <a:ea typeface="Cambria" pitchFamily="34" charset="-122"/>
-                <a:cs typeface="Cambria" pitchFamily="34" charset="-120"/>
-              </a:rPr>
-              <a:t>Every chart is a choice</a:t>
-            </a:r>
-            <a:endParaRPr lang="en-US" sz="1900" dirty="0"/>
-          </a:p>
-        </p:txBody>
-      </p:sp>
-      <p:sp>
-        <p:nvSpPr>
-          <p:cNvPr id="11" name="Text 9"/>
-          <p:cNvSpPr/>
-          <p:nvPr/>
-        </p:nvSpPr>
-        <p:spPr>
-          <a:xfrm>
-            <a:off x="1371600" y="3904488"/>
-            <a:ext cx="10332720" cy="914400"/>
+          <p:cNvPr id="8" name="Text 6"/>
+          <p:cNvSpPr/>
+          <p:nvPr/>
+        </p:nvSpPr>
+        <p:spPr>
+          <a:xfrm>
+            <a:off x="1097280" y="3291840"/>
+            <a:ext cx="10607040" cy="1051560"/>
           </a:xfrm>
           <a:prstGeom prst="rect">
             <a:avLst/>
@@ -4450,7 +5640,7 @@
               <a:buNone/>
             </a:pPr>
             <a:r>
-              <a:rPr lang="en-US" sz="1450" dirty="0">
+              <a:rPr lang="en-US" sz="1650" dirty="0">
                 <a:solidFill>
                   <a:srgbClr val="1A1A1A"/>
                 </a:solidFill>
@@ -4458,27 +5648,25 @@
                 <a:ea typeface="Calibri" pitchFamily="34" charset="-122"/>
                 <a:cs typeface="Calibri" pitchFamily="34" charset="-120"/>
               </a:rPr>
-              <a:t>PCA vs t-SNE rearranges the same data; the picture made a decision.</a:t>
-            </a:r>
-            <a:endParaRPr lang="en-US" sz="1450" dirty="0"/>
-          </a:p>
-        </p:txBody>
-      </p:sp>
-      <p:sp>
-        <p:nvSpPr>
-          <p:cNvPr id="12" name="Shape 10"/>
-          <p:cNvSpPr/>
-          <p:nvPr/>
-        </p:nvSpPr>
-        <p:spPr>
-          <a:xfrm>
-            <a:off x="640080" y="4983480"/>
-            <a:ext cx="457200" cy="457200"/>
-          </a:xfrm>
-          <a:prstGeom prst="roundRect">
-            <a:avLst>
-              <a:gd name="adj" fmla="val 16000"/>
-            </a:avLst>
+              <a:t>Spotify's own researchers found algorithmic listening less diverse than organic listening (Anderson et al., 2020).</a:t>
+            </a:r>
+            <a:endParaRPr lang="en-US" sz="1650" dirty="0"/>
+          </a:p>
+        </p:txBody>
+      </p:sp>
+      <p:sp>
+        <p:nvSpPr>
+          <p:cNvPr id="9" name="Shape 7"/>
+          <p:cNvSpPr/>
+          <p:nvPr/>
+        </p:nvSpPr>
+        <p:spPr>
+          <a:xfrm>
+            <a:off x="640080" y="4434840"/>
+            <a:ext cx="201168" cy="201168"/>
+          </a:xfrm>
+          <a:prstGeom prst="ellipse">
+            <a:avLst/>
           </a:prstGeom>
           <a:solidFill>
             <a:srgbClr val="B9852F"/>
@@ -4488,92 +5676,14 @@
       </p:sp>
       <p:sp>
         <p:nvSpPr>
-          <p:cNvPr id="13" name="Text 11"/>
-          <p:cNvSpPr/>
-          <p:nvPr/>
-        </p:nvSpPr>
-        <p:spPr>
-          <a:xfrm>
-            <a:off x="640080" y="4983480"/>
-            <a:ext cx="457200" cy="457200"/>
-          </a:xfrm>
-          <a:prstGeom prst="rect">
-            <a:avLst/>
-          </a:prstGeom>
-          <a:noFill/>
-          <a:ln/>
-        </p:spPr>
-        <p:txBody>
-          <a:bodyPr wrap="square" rtlCol="0" anchor="ctr"/>
-          <a:lstStyle/>
-          <a:p>
-            <a:pPr algn="ctr" indent="0" marL="0">
-              <a:buNone/>
-            </a:pPr>
-            <a:r>
-              <a:rPr lang="en-US" sz="2000" b="1" dirty="0">
-                <a:solidFill>
-                  <a:srgbClr val="FFFFFF"/>
-                </a:solidFill>
-                <a:latin typeface="Cambria" pitchFamily="34" charset="0"/>
-                <a:ea typeface="Cambria" pitchFamily="34" charset="-122"/>
-                <a:cs typeface="Cambria" pitchFamily="34" charset="-120"/>
-              </a:rPr>
-              <a:t>3</a:t>
-            </a:r>
-            <a:endParaRPr lang="en-US" sz="2000" dirty="0"/>
-          </a:p>
-        </p:txBody>
-      </p:sp>
-      <p:sp>
-        <p:nvSpPr>
-          <p:cNvPr id="14" name="Text 12"/>
-          <p:cNvSpPr/>
-          <p:nvPr/>
-        </p:nvSpPr>
-        <p:spPr>
-          <a:xfrm>
-            <a:off x="1371600" y="4946904"/>
-            <a:ext cx="10332720" cy="411480"/>
-          </a:xfrm>
-          <a:prstGeom prst="rect">
-            <a:avLst/>
-          </a:prstGeom>
-          <a:noFill/>
-          <a:ln/>
-        </p:spPr>
-        <p:txBody>
-          <a:bodyPr wrap="square" rtlCol="0" anchor="ctr"/>
-          <a:lstStyle/>
-          <a:p>
-            <a:pPr indent="0" marL="0">
-              <a:buNone/>
-            </a:pPr>
-            <a:r>
-              <a:rPr lang="en-US" sz="1900" b="1" dirty="0">
-                <a:solidFill>
-                  <a:srgbClr val="B9852F"/>
-                </a:solidFill>
-                <a:latin typeface="Cambria" pitchFamily="34" charset="0"/>
-                <a:ea typeface="Cambria" pitchFamily="34" charset="-122"/>
-                <a:cs typeface="Cambria" pitchFamily="34" charset="-120"/>
-              </a:rPr>
-              <a:t>Whose data</a:t>
-            </a:r>
-            <a:endParaRPr lang="en-US" sz="1900" dirty="0"/>
-          </a:p>
-        </p:txBody>
-      </p:sp>
-      <p:sp>
-        <p:nvSpPr>
-          <p:cNvPr id="15" name="Text 13"/>
-          <p:cNvSpPr/>
-          <p:nvPr/>
-        </p:nvSpPr>
-        <p:spPr>
-          <a:xfrm>
-            <a:off x="1371600" y="5367528"/>
-            <a:ext cx="10332720" cy="914400"/>
+          <p:cNvPr id="10" name="Text 8"/>
+          <p:cNvSpPr/>
+          <p:nvPr/>
+        </p:nvSpPr>
+        <p:spPr>
+          <a:xfrm>
+            <a:off x="1097280" y="4343400"/>
+            <a:ext cx="10607040" cy="1051560"/>
           </a:xfrm>
           <a:prstGeom prst="rect">
             <a:avLst/>
@@ -4594,7 +5704,7 @@
               <a:buNone/>
             </a:pPr>
             <a:r>
-              <a:rPr lang="en-US" sz="1450" dirty="0">
+              <a:rPr lang="en-US" sz="1650" dirty="0">
                 <a:solidFill>
                   <a:srgbClr val="1A1A1A"/>
                 </a:solidFill>
@@ -4602,9 +5712,9 @@
                 <a:ea typeface="Calibri" pitchFamily="34" charset="-122"/>
                 <a:cs typeface="Calibri" pitchFamily="34" charset="-120"/>
               </a:rPr>
-              <a:t>A direction found in the corpus: cultural discovery (Kozlowski) or encoded prejudice (Bolukbasi)?</a:t>
-            </a:r>
-            <a:endParaRPr lang="en-US" sz="1450" dirty="0"/>
+              <a:t>You built the machinery of the feed today. That is the whole aside.</a:t>
+            </a:r>
+            <a:endParaRPr lang="en-US" sz="1650" dirty="0"/>
           </a:p>
         </p:txBody>
       </p:sp>
@@ -4622,7 +5732,7 @@
     <p:bg>
       <p:bgPr>
         <a:solidFill>
-          <a:srgbClr val="4E261D"/>
+          <a:srgbClr val="FFFFFF"/>
         </a:solidFill>
       </p:bgPr>
     </p:bg>
@@ -4648,8 +5758,8 @@
         </p:nvSpPr>
         <p:spPr>
           <a:xfrm>
-            <a:off x="640080" y="1005840"/>
-            <a:ext cx="8229600" cy="320040"/>
+            <a:off x="640080" y="731520"/>
+            <a:ext cx="10058400" cy="731520"/>
           </a:xfrm>
           <a:prstGeom prst="rect">
             <a:avLst/>
@@ -4665,30 +5775,150 @@
               <a:buNone/>
             </a:pPr>
             <a:r>
-              <a:rPr lang="en-US" sz="1300" b="1" spc="300" kern="0" dirty="0">
-                <a:solidFill>
-                  <a:srgbClr val="B9852F"/>
+              <a:rPr lang="en-US" sz="3000" b="1" dirty="0">
+                <a:solidFill>
+                  <a:srgbClr val="1A1A1A"/>
+                </a:solidFill>
+                <a:latin typeface="Cambria" pitchFamily="34" charset="0"/>
+                <a:ea typeface="Cambria" pitchFamily="34" charset="-122"/>
+                <a:cs typeface="Cambria" pitchFamily="34" charset="-120"/>
+              </a:rPr>
+              <a:t>Three modes today</a:t>
+            </a:r>
+            <a:endParaRPr lang="en-US" sz="3000" dirty="0"/>
+          </a:p>
+        </p:txBody>
+      </p:sp>
+      <p:sp>
+        <p:nvSpPr>
+          <p:cNvPr id="3" name="Text 1"/>
+          <p:cNvSpPr/>
+          <p:nvPr/>
+        </p:nvSpPr>
+        <p:spPr>
+          <a:xfrm>
+            <a:off x="640080" y="1417320"/>
+            <a:ext cx="10058400" cy="365760"/>
+          </a:xfrm>
+          <a:prstGeom prst="rect">
+            <a:avLst/>
+          </a:prstGeom>
+          <a:noFill/>
+          <a:ln/>
+        </p:spPr>
+        <p:txBody>
+          <a:bodyPr wrap="square" rtlCol="0" anchor="ctr"/>
+          <a:lstStyle/>
+          <a:p>
+            <a:pPr indent="0" marL="0">
+              <a:buNone/>
+            </a:pPr>
+            <a:r>
+              <a:rPr lang="en-US" sz="1400" i="1" dirty="0">
+                <a:solidFill>
+                  <a:srgbClr val="6B6B63"/>
                 </a:solidFill>
                 <a:latin typeface="Calibri" pitchFamily="34" charset="0"/>
                 <a:ea typeface="Calibri" pitchFamily="34" charset="-122"/>
                 <a:cs typeface="Calibri" pitchFamily="34" charset="-120"/>
               </a:rPr>
-              <a:t>THE CHECK, AI CLOSED</a:t>
-            </a:r>
-            <a:endParaRPr lang="en-US" sz="1300" dirty="0"/>
-          </a:p>
-        </p:txBody>
-      </p:sp>
-      <p:sp>
-        <p:nvSpPr>
-          <p:cNvPr id="3" name="Text 1"/>
-          <p:cNvSpPr/>
-          <p:nvPr/>
-        </p:nvSpPr>
-        <p:spPr>
-          <a:xfrm>
-            <a:off x="640080" y="1645920"/>
-            <a:ext cx="8686800" cy="3108960"/>
+              <a:t>about a third of the session each</a:t>
+            </a:r>
+            <a:endParaRPr lang="en-US" sz="1400" dirty="0"/>
+          </a:p>
+        </p:txBody>
+      </p:sp>
+      <p:sp>
+        <p:nvSpPr>
+          <p:cNvPr id="4" name="Shape 2"/>
+          <p:cNvSpPr/>
+          <p:nvPr/>
+        </p:nvSpPr>
+        <p:spPr>
+          <a:xfrm>
+            <a:off x="640080" y="2194560"/>
+            <a:ext cx="3383280" cy="3291840"/>
+          </a:xfrm>
+          <a:prstGeom prst="roundRect">
+            <a:avLst>
+              <a:gd name="adj" fmla="val 3333"/>
+            </a:avLst>
+          </a:prstGeom>
+          <a:solidFill>
+            <a:srgbClr val="F4EEE8"/>
+          </a:solidFill>
+          <a:ln/>
+        </p:spPr>
+      </p:sp>
+      <p:sp>
+        <p:nvSpPr>
+          <p:cNvPr id="5" name="Shape 3"/>
+          <p:cNvSpPr/>
+          <p:nvPr/>
+        </p:nvSpPr>
+        <p:spPr>
+          <a:xfrm>
+            <a:off x="1051560" y="2606040"/>
+            <a:ext cx="548640" cy="548640"/>
+          </a:xfrm>
+          <a:prstGeom prst="ellipse">
+            <a:avLst/>
+          </a:prstGeom>
+          <a:solidFill>
+            <a:srgbClr val="7A3B2E"/>
+          </a:solidFill>
+          <a:ln/>
+        </p:spPr>
+      </p:sp>
+      <p:sp>
+        <p:nvSpPr>
+          <p:cNvPr id="6" name="Text 4"/>
+          <p:cNvSpPr/>
+          <p:nvPr/>
+        </p:nvSpPr>
+        <p:spPr>
+          <a:xfrm>
+            <a:off x="1005840" y="3383280"/>
+            <a:ext cx="2651760" cy="548640"/>
+          </a:xfrm>
+          <a:prstGeom prst="rect">
+            <a:avLst/>
+          </a:prstGeom>
+          <a:noFill/>
+          <a:ln/>
+        </p:spPr>
+        <p:txBody>
+          <a:bodyPr wrap="square" rtlCol="0" anchor="ctr"/>
+          <a:lstStyle/>
+          <a:p>
+            <a:pPr indent="0" marL="0">
+              <a:buNone/>
+            </a:pPr>
+            <a:r>
+              <a:rPr lang="en-US" sz="2100" b="1" dirty="0">
+                <a:solidFill>
+                  <a:srgbClr val="1A1A1A"/>
+                </a:solidFill>
+                <a:latin typeface="Cambria" pitchFamily="34" charset="0"/>
+                <a:ea typeface="Cambria" pitchFamily="34" charset="-122"/>
+                <a:cs typeface="Cambria" pitchFamily="34" charset="-120"/>
+              </a:rPr>
+              <a:t>Lecture / demo</a:t>
+            </a:r>
+            <a:endParaRPr lang="en-US" sz="2100" dirty="0"/>
+          </a:p>
+        </p:txBody>
+      </p:sp>
+      <p:sp>
+        <p:nvSpPr>
+          <p:cNvPr id="7" name="Text 5"/>
+          <p:cNvSpPr/>
+          <p:nvPr/>
+        </p:nvSpPr>
+        <p:spPr>
+          <a:xfrm>
+            <a:off x="1005840" y="3977640"/>
+            <a:ext cx="2651760" cy="1371600"/>
           </a:xfrm>
           <a:prstGeom prst="rect">
             <a:avLst/>
@@ -4709,74 +5939,358 @@
               <a:buNone/>
             </a:pPr>
             <a:r>
-              <a:rPr lang="en-US" sz="2600" dirty="0">
-                <a:solidFill>
-                  <a:srgbClr val="FFFFFF"/>
+              <a:rPr lang="en-US" sz="1500" dirty="0">
+                <a:solidFill>
+                  <a:srgbClr val="1A1A1A"/>
+                </a:solidFill>
+                <a:latin typeface="Calibri" pitchFamily="34" charset="0"/>
+                <a:ea typeface="Calibri" pitchFamily="34" charset="-122"/>
+                <a:cs typeface="Calibri" pitchFamily="34" charset="-120"/>
+              </a:rPr>
+              <a:t>Embeddings, the heart of the course, the leap past counting</a:t>
+            </a:r>
+            <a:endParaRPr lang="en-US" sz="1500" dirty="0"/>
+          </a:p>
+        </p:txBody>
+      </p:sp>
+      <p:sp>
+        <p:nvSpPr>
+          <p:cNvPr id="8" name="Shape 6"/>
+          <p:cNvSpPr/>
+          <p:nvPr/>
+        </p:nvSpPr>
+        <p:spPr>
+          <a:xfrm>
+            <a:off x="4526280" y="2194560"/>
+            <a:ext cx="3383280" cy="3291840"/>
+          </a:xfrm>
+          <a:prstGeom prst="roundRect">
+            <a:avLst>
+              <a:gd name="adj" fmla="val 3333"/>
+            </a:avLst>
+          </a:prstGeom>
+          <a:solidFill>
+            <a:srgbClr val="F4EEE8"/>
+          </a:solidFill>
+          <a:ln/>
+        </p:spPr>
+      </p:sp>
+      <p:sp>
+        <p:nvSpPr>
+          <p:cNvPr id="9" name="Shape 7"/>
+          <p:cNvSpPr/>
+          <p:nvPr/>
+        </p:nvSpPr>
+        <p:spPr>
+          <a:xfrm>
+            <a:off x="4937760" y="2606040"/>
+            <a:ext cx="548640" cy="548640"/>
+          </a:xfrm>
+          <a:prstGeom prst="ellipse">
+            <a:avLst/>
+          </a:prstGeom>
+          <a:solidFill>
+            <a:srgbClr val="3F6F5F"/>
+          </a:solidFill>
+          <a:ln/>
+        </p:spPr>
+      </p:sp>
+      <p:sp>
+        <p:nvSpPr>
+          <p:cNvPr id="10" name="Text 8"/>
+          <p:cNvSpPr/>
+          <p:nvPr/>
+        </p:nvSpPr>
+        <p:spPr>
+          <a:xfrm>
+            <a:off x="4892040" y="3383280"/>
+            <a:ext cx="2651760" cy="548640"/>
+          </a:xfrm>
+          <a:prstGeom prst="rect">
+            <a:avLst/>
+          </a:prstGeom>
+          <a:noFill/>
+          <a:ln/>
+        </p:spPr>
+        <p:txBody>
+          <a:bodyPr wrap="square" rtlCol="0" anchor="ctr"/>
+          <a:lstStyle/>
+          <a:p>
+            <a:pPr indent="0" marL="0">
+              <a:buNone/>
+            </a:pPr>
+            <a:r>
+              <a:rPr lang="en-US" sz="2100" b="1" dirty="0">
+                <a:solidFill>
+                  <a:srgbClr val="1A1A1A"/>
                 </a:solidFill>
                 <a:latin typeface="Cambria" pitchFamily="34" charset="0"/>
                 <a:ea typeface="Cambria" pitchFamily="34" charset="-122"/>
                 <a:cs typeface="Cambria" pitchFamily="34" charset="-120"/>
               </a:rPr>
-              <a:t>Explain it: on your map, name one cluster you believe is real and one that's probably a projection artifact, and how you'd tell. (Competency 4.)</a:t>
-            </a:r>
-            <a:endParaRPr lang="en-US" sz="2600" dirty="0"/>
-          </a:p>
-        </p:txBody>
-      </p:sp>
-      <p:sp>
-        <p:nvSpPr>
-          <p:cNvPr id="4" name="Text 2"/>
-          <p:cNvSpPr/>
-          <p:nvPr/>
-        </p:nvSpPr>
-        <p:spPr>
-          <a:xfrm>
-            <a:off x="640080" y="6126480"/>
-            <a:ext cx="7315200" cy="365760"/>
-          </a:xfrm>
-          <a:prstGeom prst="rect">
-            <a:avLst/>
-          </a:prstGeom>
-          <a:noFill/>
-          <a:ln/>
-        </p:spPr>
-        <p:txBody>
-          <a:bodyPr wrap="square" rtlCol="0" anchor="ctr"/>
+              <a:t>Workshop</a:t>
+            </a:r>
+            <a:endParaRPr lang="en-US" sz="2100" dirty="0"/>
+          </a:p>
+        </p:txBody>
+      </p:sp>
+      <p:sp>
+        <p:nvSpPr>
+          <p:cNvPr id="11" name="Text 9"/>
+          <p:cNvSpPr/>
+          <p:nvPr/>
+        </p:nvSpPr>
+        <p:spPr>
+          <a:xfrm>
+            <a:off x="4892040" y="3977640"/>
+            <a:ext cx="2651760" cy="1371600"/>
+          </a:xfrm>
+          <a:prstGeom prst="rect">
+            <a:avLst/>
+          </a:prstGeom>
+          <a:noFill/>
+          <a:ln/>
+        </p:spPr>
+        <p:txBody>
+          <a:bodyPr wrap="square" rtlCol="0" anchor="t">
+            <a:spAutoFit/>
+          </a:bodyPr>
           <a:lstStyle/>
           <a:p>
             <a:pPr indent="0" marL="0">
-              <a:buNone/>
-            </a:pPr>
-            <a:r>
-              <a:rPr lang="en-US" sz="1200" dirty="0">
-                <a:solidFill>
-                  <a:srgbClr val="E8DCD6"/>
+              <a:lnSpc>
+                <a:spcPct val="115000"/>
+              </a:lnSpc>
+              <a:buNone/>
+            </a:pPr>
+            <a:r>
+              <a:rPr lang="en-US" sz="1500" dirty="0">
+                <a:solidFill>
+                  <a:srgbClr val="1A1A1A"/>
                 </a:solidFill>
                 <a:latin typeface="Calibri" pitchFamily="34" charset="0"/>
                 <a:ea typeface="Calibri" pitchFamily="34" charset="-122"/>
                 <a:cs typeface="Calibri" pitchFamily="34" charset="-120"/>
               </a:rPr>
-              <a:t>Culture as Data  ·  Week 5</a:t>
-            </a:r>
-            <a:endParaRPr lang="en-US" sz="1200" dirty="0"/>
-          </a:p>
-        </p:txBody>
-      </p:sp>
-      <p:sp>
-        <p:nvSpPr>
-          <p:cNvPr id="5" name="Shape 3"/>
-          <p:cNvSpPr/>
-          <p:nvPr/>
-        </p:nvSpPr>
-        <p:spPr>
-          <a:xfrm>
-            <a:off x="9604541" y="5211088"/>
-            <a:ext cx="51907" cy="51907"/>
+              <a:t>Build hands-on on your own data.</a:t>
+            </a:r>
+            <a:endParaRPr lang="en-US" sz="1500" dirty="0"/>
+          </a:p>
+        </p:txBody>
+      </p:sp>
+      <p:sp>
+        <p:nvSpPr>
+          <p:cNvPr id="12" name="Shape 10"/>
+          <p:cNvSpPr/>
+          <p:nvPr/>
+        </p:nvSpPr>
+        <p:spPr>
+          <a:xfrm>
+            <a:off x="8412480" y="2194560"/>
+            <a:ext cx="3383280" cy="3291840"/>
+          </a:xfrm>
+          <a:prstGeom prst="roundRect">
+            <a:avLst>
+              <a:gd name="adj" fmla="val 3333"/>
+            </a:avLst>
+          </a:prstGeom>
+          <a:solidFill>
+            <a:srgbClr val="F4EEE8"/>
+          </a:solidFill>
+          <a:ln/>
+        </p:spPr>
+      </p:sp>
+      <p:sp>
+        <p:nvSpPr>
+          <p:cNvPr id="13" name="Shape 11"/>
+          <p:cNvSpPr/>
+          <p:nvPr/>
+        </p:nvSpPr>
+        <p:spPr>
+          <a:xfrm>
+            <a:off x="8823960" y="2606040"/>
+            <a:ext cx="548640" cy="548640"/>
           </a:xfrm>
           <a:prstGeom prst="ellipse">
             <a:avLst/>
           </a:prstGeom>
           <a:solidFill>
+            <a:srgbClr val="B9852F"/>
+          </a:solidFill>
+          <a:ln/>
+        </p:spPr>
+      </p:sp>
+      <p:sp>
+        <p:nvSpPr>
+          <p:cNvPr id="14" name="Text 12"/>
+          <p:cNvSpPr/>
+          <p:nvPr/>
+        </p:nvSpPr>
+        <p:spPr>
+          <a:xfrm>
+            <a:off x="8778240" y="3383280"/>
+            <a:ext cx="2651760" cy="548640"/>
+          </a:xfrm>
+          <a:prstGeom prst="rect">
+            <a:avLst/>
+          </a:prstGeom>
+          <a:noFill/>
+          <a:ln/>
+        </p:spPr>
+        <p:txBody>
+          <a:bodyPr wrap="square" rtlCol="0" anchor="ctr"/>
+          <a:lstStyle/>
+          <a:p>
+            <a:pPr indent="0" marL="0">
+              <a:buNone/>
+            </a:pPr>
+            <a:r>
+              <a:rPr lang="en-US" sz="2100" b="1" dirty="0">
+                <a:solidFill>
+                  <a:srgbClr val="1A1A1A"/>
+                </a:solidFill>
+                <a:latin typeface="Cambria" pitchFamily="34" charset="0"/>
+                <a:ea typeface="Cambria" pitchFamily="34" charset="-122"/>
+                <a:cs typeface="Cambria" pitchFamily="34" charset="-120"/>
+              </a:rPr>
+              <a:t>Discussion</a:t>
+            </a:r>
+            <a:endParaRPr lang="en-US" sz="2100" dirty="0"/>
+          </a:p>
+        </p:txBody>
+      </p:sp>
+      <p:sp>
+        <p:nvSpPr>
+          <p:cNvPr id="15" name="Text 13"/>
+          <p:cNvSpPr/>
+          <p:nvPr/>
+        </p:nvSpPr>
+        <p:spPr>
+          <a:xfrm>
+            <a:off x="8778240" y="3977640"/>
+            <a:ext cx="2651760" cy="1371600"/>
+          </a:xfrm>
+          <a:prstGeom prst="rect">
+            <a:avLst/>
+          </a:prstGeom>
+          <a:noFill/>
+          <a:ln/>
+        </p:spPr>
+        <p:txBody>
+          <a:bodyPr wrap="square" rtlCol="0" anchor="t">
+            <a:spAutoFit/>
+          </a:bodyPr>
+          <a:lstStyle/>
+          <a:p>
+            <a:pPr indent="0" marL="0">
+              <a:lnSpc>
+                <a:spcPct val="115000"/>
+              </a:lnSpc>
+              <a:buNone/>
+            </a:pPr>
+            <a:r>
+              <a:rPr lang="en-US" sz="1500" dirty="0">
+                <a:solidFill>
+                  <a:srgbClr val="1A1A1A"/>
+                </a:solidFill>
+                <a:latin typeface="Calibri" pitchFamily="34" charset="0"/>
+                <a:ea typeface="Calibri" pitchFamily="34" charset="-122"/>
+                <a:cs typeface="Calibri" pitchFamily="34" charset="-120"/>
+              </a:rPr>
+              <a:t>Interrogate the study, debate it, or critique each other's work.</a:t>
+            </a:r>
+            <a:endParaRPr lang="en-US" sz="1500" dirty="0"/>
+          </a:p>
+        </p:txBody>
+      </p:sp>
+    </p:spTree>
+  </p:cSld>
+  <p:clrMapOvr>
+    <a:masterClrMapping/>
+  </p:clrMapOvr>
+</p:sld>
+</file>
+
+<file path=ppt/slides/slide9.xml><?xml version="1.0" encoding="utf-8"?>
+<p:sld xmlns:a="http://schemas.openxmlformats.org/drawingml/2006/main" xmlns:r="http://schemas.openxmlformats.org/officeDocument/2006/relationships" xmlns:p="http://schemas.openxmlformats.org/presentationml/2006/main">
+  <p:cSld name="Slide 9">
+    <p:bg>
+      <p:bgPr>
+        <a:solidFill>
+          <a:srgbClr val="FFFFFF"/>
+        </a:solidFill>
+      </p:bgPr>
+    </p:bg>
+    <p:spTree>
+      <p:nvGrpSpPr>
+        <p:cNvPr id="1" name=""/>
+        <p:cNvGrpSpPr/>
+        <p:nvPr/>
+      </p:nvGrpSpPr>
+      <p:grpSpPr>
+        <a:xfrm>
+          <a:off x="0" y="0"/>
+          <a:ext cx="0" cy="0"/>
+          <a:chOff x="0" y="0"/>
+          <a:chExt cx="0" cy="0"/>
+        </a:xfrm>
+      </p:grpSpPr>
+      <p:sp>
+        <p:nvSpPr>
+          <p:cNvPr id="2" name="Text 0"/>
+          <p:cNvSpPr/>
+          <p:nvPr/>
+        </p:nvSpPr>
+        <p:spPr>
+          <a:xfrm>
+            <a:off x="640080" y="640080"/>
+            <a:ext cx="10058400" cy="731520"/>
+          </a:xfrm>
+          <a:prstGeom prst="rect">
+            <a:avLst/>
+          </a:prstGeom>
+          <a:noFill/>
+          <a:ln/>
+        </p:spPr>
+        <p:txBody>
+          <a:bodyPr wrap="square" rtlCol="0" anchor="ctr"/>
+          <a:lstStyle/>
+          <a:p>
+            <a:pPr indent="0" marL="0">
+              <a:buNone/>
+            </a:pPr>
+            <a:r>
+              <a:rPr lang="en-US" sz="3000" b="1" dirty="0">
+                <a:solidFill>
+                  <a:srgbClr val="1A1A1A"/>
+                </a:solidFill>
+                <a:latin typeface="Cambria" pitchFamily="34" charset="0"/>
+                <a:ea typeface="Cambria" pitchFamily="34" charset="-122"/>
+                <a:cs typeface="Cambria" pitchFamily="34" charset="-120"/>
+              </a:rPr>
+              <a:t>The session</a:t>
+            </a:r>
+            <a:endParaRPr lang="en-US" sz="3000" dirty="0"/>
+          </a:p>
+        </p:txBody>
+      </p:sp>
+      <p:sp>
+        <p:nvSpPr>
+          <p:cNvPr id="3" name="Shape 1"/>
+          <p:cNvSpPr/>
+          <p:nvPr/>
+        </p:nvSpPr>
+        <p:spPr>
+          <a:xfrm>
+            <a:off x="640080" y="1572768"/>
+            <a:ext cx="868680" cy="457200"/>
+          </a:xfrm>
+          <a:prstGeom prst="roundRect">
+            <a:avLst>
+              <a:gd name="adj" fmla="val 12000"/>
+            </a:avLst>
+          </a:prstGeom>
+          <a:solidFill>
             <a:srgbClr val="7A3B2E"/>
           </a:solidFill>
           <a:ln/>
@@ -4784,57 +6298,99 @@
       </p:sp>
       <p:sp>
         <p:nvSpPr>
+          <p:cNvPr id="4" name="Text 2"/>
+          <p:cNvSpPr/>
+          <p:nvPr/>
+        </p:nvSpPr>
+        <p:spPr>
+          <a:xfrm>
+            <a:off x="640080" y="1572768"/>
+            <a:ext cx="868680" cy="457200"/>
+          </a:xfrm>
+          <a:prstGeom prst="rect">
+            <a:avLst/>
+          </a:prstGeom>
+          <a:noFill/>
+          <a:ln/>
+        </p:spPr>
+        <p:txBody>
+          <a:bodyPr wrap="square" rtlCol="0" anchor="ctr"/>
+          <a:lstStyle/>
+          <a:p>
+            <a:pPr algn="ctr" indent="0" marL="0">
+              <a:buNone/>
+            </a:pPr>
+            <a:r>
+              <a:rPr lang="en-US" sz="1100" b="1" dirty="0">
+                <a:solidFill>
+                  <a:srgbClr val="FFFFFF"/>
+                </a:solidFill>
+                <a:latin typeface="Calibri" pitchFamily="34" charset="0"/>
+                <a:ea typeface="Calibri" pitchFamily="34" charset="-122"/>
+                <a:cs typeface="Calibri" pitchFamily="34" charset="-120"/>
+              </a:rPr>
+              <a:t>0:00</a:t>
+            </a:r>
+            <a:endParaRPr lang="en-US" sz="1100" dirty="0"/>
+          </a:p>
+        </p:txBody>
+      </p:sp>
+      <p:sp>
+        <p:nvSpPr>
+          <p:cNvPr id="5" name="Text 3"/>
+          <p:cNvSpPr/>
+          <p:nvPr/>
+        </p:nvSpPr>
+        <p:spPr>
+          <a:xfrm>
+            <a:off x="1691640" y="1554480"/>
+            <a:ext cx="9646920" cy="566928"/>
+          </a:xfrm>
+          <a:prstGeom prst="rect">
+            <a:avLst/>
+          </a:prstGeom>
+          <a:noFill/>
+          <a:ln/>
+        </p:spPr>
+        <p:txBody>
+          <a:bodyPr wrap="square" rtlCol="0" anchor="ctr">
+            <a:spAutoFit/>
+          </a:bodyPr>
+          <a:lstStyle/>
+          <a:p>
+            <a:pPr indent="0" marL="0">
+              <a:buNone/>
+            </a:pPr>
+            <a:r>
+              <a:rPr lang="en-US" sz="1250" dirty="0">
+                <a:solidFill>
+                  <a:srgbClr val="1A1A1A"/>
+                </a:solidFill>
+                <a:latin typeface="Calibri" pitchFamily="34" charset="0"/>
+                <a:ea typeface="Calibri" pitchFamily="34" charset="-122"/>
+                <a:cs typeface="Calibri" pitchFamily="34" charset="-120"/>
+              </a:rPr>
+              <a:t>Warm-up + Look at This, room names the choice first: the embeddings debate.</a:t>
+            </a:r>
+            <a:endParaRPr lang="en-US" sz="1250" dirty="0"/>
+          </a:p>
+        </p:txBody>
+      </p:sp>
+      <p:sp>
+        <p:nvSpPr>
           <p:cNvPr id="6" name="Shape 4"/>
           <p:cNvSpPr/>
           <p:nvPr/>
         </p:nvSpPr>
         <p:spPr>
           <a:xfrm>
-            <a:off x="9271891" y="6190521"/>
-            <a:ext cx="74666" cy="74666"/>
-          </a:xfrm>
-          <a:prstGeom prst="ellipse">
-            <a:avLst/>
-          </a:prstGeom>
-          <a:solidFill>
-            <a:srgbClr val="3F6F5F"/>
-          </a:solidFill>
-          <a:ln/>
-        </p:spPr>
-      </p:sp>
-      <p:sp>
-        <p:nvSpPr>
-          <p:cNvPr id="7" name="Shape 5"/>
-          <p:cNvSpPr/>
-          <p:nvPr/>
-        </p:nvSpPr>
-        <p:spPr>
-          <a:xfrm>
-            <a:off x="10071233" y="5862911"/>
-            <a:ext cx="82058" cy="82058"/>
-          </a:xfrm>
-          <a:prstGeom prst="ellipse">
-            <a:avLst/>
-          </a:prstGeom>
-          <a:solidFill>
-            <a:srgbClr val="B9852F"/>
-          </a:solidFill>
-          <a:ln/>
-        </p:spPr>
-      </p:sp>
-      <p:sp>
-        <p:nvSpPr>
-          <p:cNvPr id="8" name="Shape 6"/>
-          <p:cNvSpPr/>
-          <p:nvPr/>
-        </p:nvSpPr>
-        <p:spPr>
-          <a:xfrm>
-            <a:off x="10509049" y="4952160"/>
-            <a:ext cx="96943" cy="96943"/>
-          </a:xfrm>
-          <a:prstGeom prst="ellipse">
-            <a:avLst/>
+            <a:off x="640080" y="2139696"/>
+            <a:ext cx="868680" cy="457200"/>
+          </a:xfrm>
+          <a:prstGeom prst="roundRect">
+            <a:avLst>
+              <a:gd name="adj" fmla="val 12000"/>
+            </a:avLst>
           </a:prstGeom>
           <a:solidFill>
             <a:srgbClr val="7A3B2E"/>
@@ -4844,57 +6400,99 @@
       </p:sp>
       <p:sp>
         <p:nvSpPr>
+          <p:cNvPr id="7" name="Text 5"/>
+          <p:cNvSpPr/>
+          <p:nvPr/>
+        </p:nvSpPr>
+        <p:spPr>
+          <a:xfrm>
+            <a:off x="640080" y="2139696"/>
+            <a:ext cx="868680" cy="457200"/>
+          </a:xfrm>
+          <a:prstGeom prst="rect">
+            <a:avLst/>
+          </a:prstGeom>
+          <a:noFill/>
+          <a:ln/>
+        </p:spPr>
+        <p:txBody>
+          <a:bodyPr wrap="square" rtlCol="0" anchor="ctr"/>
+          <a:lstStyle/>
+          <a:p>
+            <a:pPr algn="ctr" indent="0" marL="0">
+              <a:buNone/>
+            </a:pPr>
+            <a:r>
+              <a:rPr lang="en-US" sz="1100" b="1" dirty="0">
+                <a:solidFill>
+                  <a:srgbClr val="FFFFFF"/>
+                </a:solidFill>
+                <a:latin typeface="Calibri" pitchFamily="34" charset="0"/>
+                <a:ea typeface="Calibri" pitchFamily="34" charset="-122"/>
+                <a:cs typeface="Calibri" pitchFamily="34" charset="-120"/>
+              </a:rPr>
+              <a:t>0:10</a:t>
+            </a:r>
+            <a:endParaRPr lang="en-US" sz="1100" dirty="0"/>
+          </a:p>
+        </p:txBody>
+      </p:sp>
+      <p:sp>
+        <p:nvSpPr>
+          <p:cNvPr id="8" name="Text 6"/>
+          <p:cNvSpPr/>
+          <p:nvPr/>
+        </p:nvSpPr>
+        <p:spPr>
+          <a:xfrm>
+            <a:off x="1691640" y="2121408"/>
+            <a:ext cx="9646920" cy="566928"/>
+          </a:xfrm>
+          <a:prstGeom prst="rect">
+            <a:avLst/>
+          </a:prstGeom>
+          <a:noFill/>
+          <a:ln/>
+        </p:spPr>
+        <p:txBody>
+          <a:bodyPr wrap="square" rtlCol="0" anchor="ctr">
+            <a:spAutoFit/>
+          </a:bodyPr>
+          <a:lstStyle/>
+          <a:p>
+            <a:pPr indent="0" marL="0">
+              <a:buNone/>
+            </a:pPr>
+            <a:r>
+              <a:rPr lang="en-US" sz="1250" dirty="0">
+                <a:solidFill>
+                  <a:srgbClr val="1A1A1A"/>
+                </a:solidFill>
+                <a:latin typeface="Calibri" pitchFamily="34" charset="0"/>
+                <a:ea typeface="Calibri" pitchFamily="34" charset="-122"/>
+                <a:cs typeface="Calibri" pitchFamily="34" charset="-120"/>
+              </a:rPr>
+              <a:t>The beyond-counting moment: put Week 2 beside today. There you counted the words around an axis you care about; now embed them and watch them cluster. Run it on something the room enjoys, a beloved artist's songs sorted by mood and era, and groupings appear that counting couldn't see. Same question, two tools, the second visibly richer. Name the idea: an item becomes a vector, position learned from the company it keeps.</a:t>
+            </a:r>
+            <a:endParaRPr lang="en-US" sz="1250" dirty="0"/>
+          </a:p>
+        </p:txBody>
+      </p:sp>
+      <p:sp>
+        <p:nvSpPr>
           <p:cNvPr id="9" name="Shape 7"/>
           <p:cNvSpPr/>
           <p:nvPr/>
         </p:nvSpPr>
         <p:spPr>
           <a:xfrm>
-            <a:off x="9091819" y="5919527"/>
-            <a:ext cx="87317" cy="87317"/>
-          </a:xfrm>
-          <a:prstGeom prst="ellipse">
-            <a:avLst/>
-          </a:prstGeom>
-          <a:solidFill>
-            <a:srgbClr val="3F6F5F"/>
-          </a:solidFill>
-          <a:ln/>
-        </p:spPr>
-      </p:sp>
-      <p:sp>
-        <p:nvSpPr>
-          <p:cNvPr id="10" name="Shape 8"/>
-          <p:cNvSpPr/>
-          <p:nvPr/>
-        </p:nvSpPr>
-        <p:spPr>
-          <a:xfrm>
-            <a:off x="9446661" y="6014193"/>
-            <a:ext cx="76041" cy="76041"/>
-          </a:xfrm>
-          <a:prstGeom prst="ellipse">
-            <a:avLst/>
-          </a:prstGeom>
-          <a:solidFill>
-            <a:srgbClr val="B9852F"/>
-          </a:solidFill>
-          <a:ln/>
-        </p:spPr>
-      </p:sp>
-      <p:sp>
-        <p:nvSpPr>
-          <p:cNvPr id="11" name="Shape 9"/>
-          <p:cNvSpPr/>
-          <p:nvPr/>
-        </p:nvSpPr>
-        <p:spPr>
-          <a:xfrm>
-            <a:off x="10080057" y="5960057"/>
-            <a:ext cx="85973" cy="85973"/>
-          </a:xfrm>
-          <a:prstGeom prst="ellipse">
-            <a:avLst/>
+            <a:off x="640080" y="2706624"/>
+            <a:ext cx="868680" cy="457200"/>
+          </a:xfrm>
+          <a:prstGeom prst="roundRect">
+            <a:avLst>
+              <a:gd name="adj" fmla="val 12000"/>
+            </a:avLst>
           </a:prstGeom>
           <a:solidFill>
             <a:srgbClr val="7A3B2E"/>
@@ -4904,57 +6502,99 @@
       </p:sp>
       <p:sp>
         <p:nvSpPr>
+          <p:cNvPr id="10" name="Text 8"/>
+          <p:cNvSpPr/>
+          <p:nvPr/>
+        </p:nvSpPr>
+        <p:spPr>
+          <a:xfrm>
+            <a:off x="640080" y="2706624"/>
+            <a:ext cx="868680" cy="457200"/>
+          </a:xfrm>
+          <a:prstGeom prst="rect">
+            <a:avLst/>
+          </a:prstGeom>
+          <a:noFill/>
+          <a:ln/>
+        </p:spPr>
+        <p:txBody>
+          <a:bodyPr wrap="square" rtlCol="0" anchor="ctr"/>
+          <a:lstStyle/>
+          <a:p>
+            <a:pPr algn="ctr" indent="0" marL="0">
+              <a:buNone/>
+            </a:pPr>
+            <a:r>
+              <a:rPr lang="en-US" sz="1100" b="1" dirty="0">
+                <a:solidFill>
+                  <a:srgbClr val="FFFFFF"/>
+                </a:solidFill>
+                <a:latin typeface="Calibri" pitchFamily="34" charset="0"/>
+                <a:ea typeface="Calibri" pitchFamily="34" charset="-122"/>
+                <a:cs typeface="Calibri" pitchFamily="34" charset="-120"/>
+              </a:rPr>
+              <a:t>0:25</a:t>
+            </a:r>
+            <a:endParaRPr lang="en-US" sz="1100" dirty="0"/>
+          </a:p>
+        </p:txBody>
+      </p:sp>
+      <p:sp>
+        <p:nvSpPr>
+          <p:cNvPr id="11" name="Text 9"/>
+          <p:cNvSpPr/>
+          <p:nvPr/>
+        </p:nvSpPr>
+        <p:spPr>
+          <a:xfrm>
+            <a:off x="1691640" y="2688336"/>
+            <a:ext cx="9646920" cy="566928"/>
+          </a:xfrm>
+          <a:prstGeom prst="rect">
+            <a:avLst/>
+          </a:prstGeom>
+          <a:noFill/>
+          <a:ln/>
+        </p:spPr>
+        <p:txBody>
+          <a:bodyPr wrap="square" rtlCol="0" anchor="ctr">
+            <a:spAutoFit/>
+          </a:bodyPr>
+          <a:lstStyle/>
+          <a:p>
+            <a:pPr indent="0" marL="0">
+              <a:buNone/>
+            </a:pPr>
+            <a:r>
+              <a:rPr lang="en-US" sz="1250" dirty="0">
+                <a:solidFill>
+                  <a:srgbClr val="1A1A1A"/>
+                </a:solidFill>
+                <a:latin typeface="Calibri" pitchFamily="34" charset="0"/>
+                <a:ea typeface="Calibri" pitchFamily="34" charset="-122"/>
+                <a:cs typeface="Calibri" pitchFamily="34" charset="-120"/>
+              </a:rPr>
+              <a:t>Embed your own corpus, text or images. Image projects embed their pictures and watch them group by untagged style. The embedding model is an open one from Hugging Face, the hub where open models live (the same place Week 8's period models come from). And here charts stop being neutral: switch PCA to t-SNE and the same data rearranges. A visualization is an argument with decisions baked in.</a:t>
+            </a:r>
+            <a:endParaRPr lang="en-US" sz="1250" dirty="0"/>
+          </a:p>
+        </p:txBody>
+      </p:sp>
+      <p:sp>
+        <p:nvSpPr>
           <p:cNvPr id="12" name="Shape 10"/>
           <p:cNvSpPr/>
           <p:nvPr/>
         </p:nvSpPr>
         <p:spPr>
           <a:xfrm>
-            <a:off x="9498487" y="4743659"/>
-            <a:ext cx="85110" cy="85110"/>
-          </a:xfrm>
-          <a:prstGeom prst="ellipse">
-            <a:avLst/>
-          </a:prstGeom>
-          <a:solidFill>
-            <a:srgbClr val="3F6F5F"/>
-          </a:solidFill>
-          <a:ln/>
-        </p:spPr>
-      </p:sp>
-      <p:sp>
-        <p:nvSpPr>
-          <p:cNvPr id="13" name="Shape 11"/>
-          <p:cNvSpPr/>
-          <p:nvPr/>
-        </p:nvSpPr>
-        <p:spPr>
-          <a:xfrm>
-            <a:off x="11329069" y="4826259"/>
-            <a:ext cx="96312" cy="96312"/>
-          </a:xfrm>
-          <a:prstGeom prst="ellipse">
-            <a:avLst/>
-          </a:prstGeom>
-          <a:solidFill>
-            <a:srgbClr val="B9852F"/>
-          </a:solidFill>
-          <a:ln/>
-        </p:spPr>
-      </p:sp>
-      <p:sp>
-        <p:nvSpPr>
-          <p:cNvPr id="14" name="Shape 12"/>
-          <p:cNvSpPr/>
-          <p:nvPr/>
-        </p:nvSpPr>
-        <p:spPr>
-          <a:xfrm>
-            <a:off x="11517966" y="5194398"/>
-            <a:ext cx="87575" cy="87575"/>
-          </a:xfrm>
-          <a:prstGeom prst="ellipse">
-            <a:avLst/>
+            <a:off x="640080" y="3273552"/>
+            <a:ext cx="868680" cy="457200"/>
+          </a:xfrm>
+          <a:prstGeom prst="roundRect">
+            <a:avLst>
+              <a:gd name="adj" fmla="val 12000"/>
+            </a:avLst>
           </a:prstGeom>
           <a:solidFill>
             <a:srgbClr val="7A3B2E"/>
@@ -4964,57 +6604,99 @@
       </p:sp>
       <p:sp>
         <p:nvSpPr>
+          <p:cNvPr id="13" name="Text 11"/>
+          <p:cNvSpPr/>
+          <p:nvPr/>
+        </p:nvSpPr>
+        <p:spPr>
+          <a:xfrm>
+            <a:off x="640080" y="3273552"/>
+            <a:ext cx="868680" cy="457200"/>
+          </a:xfrm>
+          <a:prstGeom prst="rect">
+            <a:avLst/>
+          </a:prstGeom>
+          <a:noFill/>
+          <a:ln/>
+        </p:spPr>
+        <p:txBody>
+          <a:bodyPr wrap="square" rtlCol="0" anchor="ctr"/>
+          <a:lstStyle/>
+          <a:p>
+            <a:pPr algn="ctr" indent="0" marL="0">
+              <a:buNone/>
+            </a:pPr>
+            <a:r>
+              <a:rPr lang="en-US" sz="1100" b="1" dirty="0">
+                <a:solidFill>
+                  <a:srgbClr val="FFFFFF"/>
+                </a:solidFill>
+                <a:latin typeface="Calibri" pitchFamily="34" charset="0"/>
+                <a:ea typeface="Calibri" pitchFamily="34" charset="-122"/>
+                <a:cs typeface="Calibri" pitchFamily="34" charset="-120"/>
+              </a:rPr>
+              <a:t>0:55</a:t>
+            </a:r>
+            <a:endParaRPr lang="en-US" sz="1100" dirty="0"/>
+          </a:p>
+        </p:txBody>
+      </p:sp>
+      <p:sp>
+        <p:nvSpPr>
+          <p:cNvPr id="14" name="Text 12"/>
+          <p:cNvSpPr/>
+          <p:nvPr/>
+        </p:nvSpPr>
+        <p:spPr>
+          <a:xfrm>
+            <a:off x="1691640" y="3255264"/>
+            <a:ext cx="9646920" cy="566928"/>
+          </a:xfrm>
+          <a:prstGeom prst="rect">
+            <a:avLst/>
+          </a:prstGeom>
+          <a:noFill/>
+          <a:ln/>
+        </p:spPr>
+        <p:txBody>
+          <a:bodyPr wrap="square" rtlCol="0" anchor="ctr">
+            <a:spAutoFit/>
+          </a:bodyPr>
+          <a:lstStyle/>
+          <a:p>
+            <a:pPr indent="0" marL="0">
+              <a:buNone/>
+            </a:pPr>
+            <a:r>
+              <a:rPr lang="en-US" sz="1250" dirty="0">
+                <a:solidFill>
+                  <a:srgbClr val="1A1A1A"/>
+                </a:solidFill>
+                <a:latin typeface="Calibri" pitchFamily="34" charset="0"/>
+                <a:ea typeface="Calibri" pitchFamily="34" charset="-122"/>
+                <a:cs typeface="Calibri" pitchFamily="34" charset="-120"/>
+              </a:rPr>
+              <a:t>Break</a:t>
+            </a:r>
+            <a:endParaRPr lang="en-US" sz="1250" dirty="0"/>
+          </a:p>
+        </p:txBody>
+      </p:sp>
+      <p:sp>
+        <p:nvSpPr>
           <p:cNvPr id="15" name="Shape 13"/>
           <p:cNvSpPr/>
           <p:nvPr/>
         </p:nvSpPr>
         <p:spPr>
           <a:xfrm>
-            <a:off x="11131975" y="4834616"/>
-            <a:ext cx="81759" cy="81759"/>
-          </a:xfrm>
-          <a:prstGeom prst="ellipse">
-            <a:avLst/>
-          </a:prstGeom>
-          <a:solidFill>
-            <a:srgbClr val="3F6F5F"/>
-          </a:solidFill>
-          <a:ln/>
-        </p:spPr>
-      </p:sp>
-      <p:sp>
-        <p:nvSpPr>
-          <p:cNvPr id="16" name="Shape 14"/>
-          <p:cNvSpPr/>
-          <p:nvPr/>
-        </p:nvSpPr>
-        <p:spPr>
-          <a:xfrm>
-            <a:off x="11237898" y="6208171"/>
-            <a:ext cx="46860" cy="46860"/>
-          </a:xfrm>
-          <a:prstGeom prst="ellipse">
-            <a:avLst/>
-          </a:prstGeom>
-          <a:solidFill>
-            <a:srgbClr val="B9852F"/>
-          </a:solidFill>
-          <a:ln/>
-        </p:spPr>
-      </p:sp>
-      <p:sp>
-        <p:nvSpPr>
-          <p:cNvPr id="17" name="Shape 15"/>
-          <p:cNvSpPr/>
-          <p:nvPr/>
-        </p:nvSpPr>
-        <p:spPr>
-          <a:xfrm>
-            <a:off x="10342214" y="4826885"/>
-            <a:ext cx="60602" cy="60602"/>
-          </a:xfrm>
-          <a:prstGeom prst="ellipse">
-            <a:avLst/>
+            <a:off x="640080" y="3840480"/>
+            <a:ext cx="868680" cy="457200"/>
+          </a:xfrm>
+          <a:prstGeom prst="roundRect">
+            <a:avLst>
+              <a:gd name="adj" fmla="val 12000"/>
+            </a:avLst>
           </a:prstGeom>
           <a:solidFill>
             <a:srgbClr val="7A3B2E"/>
@@ -5024,23 +6706,185 @@
       </p:sp>
       <p:sp>
         <p:nvSpPr>
+          <p:cNvPr id="16" name="Text 14"/>
+          <p:cNvSpPr/>
+          <p:nvPr/>
+        </p:nvSpPr>
+        <p:spPr>
+          <a:xfrm>
+            <a:off x="640080" y="3840480"/>
+            <a:ext cx="868680" cy="457200"/>
+          </a:xfrm>
+          <a:prstGeom prst="rect">
+            <a:avLst/>
+          </a:prstGeom>
+          <a:noFill/>
+          <a:ln/>
+        </p:spPr>
+        <p:txBody>
+          <a:bodyPr wrap="square" rtlCol="0" anchor="ctr"/>
+          <a:lstStyle/>
+          <a:p>
+            <a:pPr algn="ctr" indent="0" marL="0">
+              <a:buNone/>
+            </a:pPr>
+            <a:r>
+              <a:rPr lang="en-US" sz="1100" b="1" dirty="0">
+                <a:solidFill>
+                  <a:srgbClr val="FFFFFF"/>
+                </a:solidFill>
+                <a:latin typeface="Calibri" pitchFamily="34" charset="0"/>
+                <a:ea typeface="Calibri" pitchFamily="34" charset="-122"/>
+                <a:cs typeface="Calibri" pitchFamily="34" charset="-120"/>
+              </a:rPr>
+              <a:t>1:05</a:t>
+            </a:r>
+            <a:endParaRPr lang="en-US" sz="1100" dirty="0"/>
+          </a:p>
+        </p:txBody>
+      </p:sp>
+      <p:sp>
+        <p:nvSpPr>
+          <p:cNvPr id="17" name="Text 15"/>
+          <p:cNvSpPr/>
+          <p:nvPr/>
+        </p:nvSpPr>
+        <p:spPr>
+          <a:xfrm>
+            <a:off x="1691640" y="3822192"/>
+            <a:ext cx="9646920" cy="566928"/>
+          </a:xfrm>
+          <a:prstGeom prst="rect">
+            <a:avLst/>
+          </a:prstGeom>
+          <a:noFill/>
+          <a:ln/>
+        </p:spPr>
+        <p:txBody>
+          <a:bodyPr wrap="square" rtlCol="0" anchor="ctr">
+            <a:spAutoFit/>
+          </a:bodyPr>
+          <a:lstStyle/>
+          <a:p>
+            <a:pPr indent="0" marL="0">
+              <a:buNone/>
+            </a:pPr>
+            <a:r>
+              <a:rPr lang="en-US" sz="1250" dirty="0">
+                <a:solidFill>
+                  <a:srgbClr val="1A1A1A"/>
+                </a:solidFill>
+                <a:latin typeface="Calibri" pitchFamily="34" charset="0"/>
+                <a:ea typeface="Calibri" pitchFamily="34" charset="-122"/>
+                <a:cs typeface="Calibri" pitchFamily="34" charset="-120"/>
+              </a:rPr>
+              <a:t>Project lab: push your embeddings, hunt the surprise cluster. A five-minute recommenders aside: "For You" is this same map plus your history. One-on-ones begin at the side.</a:t>
+            </a:r>
+            <a:endParaRPr lang="en-US" sz="1250" dirty="0"/>
+          </a:p>
+        </p:txBody>
+      </p:sp>
+      <p:sp>
+        <p:nvSpPr>
           <p:cNvPr id="18" name="Shape 16"/>
           <p:cNvSpPr/>
           <p:nvPr/>
         </p:nvSpPr>
         <p:spPr>
           <a:xfrm>
-            <a:off x="9511723" y="4889377"/>
-            <a:ext cx="90981" cy="90981"/>
-          </a:xfrm>
-          <a:prstGeom prst="ellipse">
-            <a:avLst/>
-          </a:prstGeom>
-          <a:solidFill>
-            <a:srgbClr val="3F6F5F"/>
-          </a:solidFill>
-          <a:ln/>
-        </p:spPr>
+            <a:off x="640080" y="4407408"/>
+            <a:ext cx="868680" cy="457200"/>
+          </a:xfrm>
+          <a:prstGeom prst="roundRect">
+            <a:avLst>
+              <a:gd name="adj" fmla="val 12000"/>
+            </a:avLst>
+          </a:prstGeom>
+          <a:solidFill>
+            <a:srgbClr val="7A3B2E"/>
+          </a:solidFill>
+          <a:ln/>
+        </p:spPr>
+      </p:sp>
+      <p:sp>
+        <p:nvSpPr>
+          <p:cNvPr id="19" name="Text 17"/>
+          <p:cNvSpPr/>
+          <p:nvPr/>
+        </p:nvSpPr>
+        <p:spPr>
+          <a:xfrm>
+            <a:off x="640080" y="4407408"/>
+            <a:ext cx="868680" cy="457200"/>
+          </a:xfrm>
+          <a:prstGeom prst="rect">
+            <a:avLst/>
+          </a:prstGeom>
+          <a:noFill/>
+          <a:ln/>
+        </p:spPr>
+        <p:txBody>
+          <a:bodyPr wrap="square" rtlCol="0" anchor="ctr"/>
+          <a:lstStyle/>
+          <a:p>
+            <a:pPr algn="ctr" indent="0" marL="0">
+              <a:buNone/>
+            </a:pPr>
+            <a:r>
+              <a:rPr lang="en-US" sz="1100" b="1" dirty="0">
+                <a:solidFill>
+                  <a:srgbClr val="FFFFFF"/>
+                </a:solidFill>
+                <a:latin typeface="Calibri" pitchFamily="34" charset="0"/>
+                <a:ea typeface="Calibri" pitchFamily="34" charset="-122"/>
+                <a:cs typeface="Calibri" pitchFamily="34" charset="-120"/>
+              </a:rPr>
+              <a:t>1:50</a:t>
+            </a:r>
+            <a:endParaRPr lang="en-US" sz="1100" dirty="0"/>
+          </a:p>
+        </p:txBody>
+      </p:sp>
+      <p:sp>
+        <p:nvSpPr>
+          <p:cNvPr id="20" name="Text 18"/>
+          <p:cNvSpPr/>
+          <p:nvPr/>
+        </p:nvSpPr>
+        <p:spPr>
+          <a:xfrm>
+            <a:off x="1691640" y="4389120"/>
+            <a:ext cx="9646920" cy="566928"/>
+          </a:xfrm>
+          <a:prstGeom prst="rect">
+            <a:avLst/>
+          </a:prstGeom>
+          <a:noFill/>
+          <a:ln/>
+        </p:spPr>
+        <p:txBody>
+          <a:bodyPr wrap="square" rtlCol="0" anchor="ctr">
+            <a:spAutoFit/>
+          </a:bodyPr>
+          <a:lstStyle/>
+          <a:p>
+            <a:pPr indent="0" marL="0">
+              <a:buNone/>
+            </a:pPr>
+            <a:r>
+              <a:rPr lang="en-US" sz="1250" dirty="0">
+                <a:solidFill>
+                  <a:srgbClr val="1A1A1A"/>
+                </a:solidFill>
+                <a:latin typeface="Calibri" pitchFamily="34" charset="0"/>
+                <a:ea typeface="Calibri" pitchFamily="34" charset="-122"/>
+                <a:cs typeface="Calibri" pitchFamily="34" charset="-120"/>
+              </a:rPr>
+              <a:t>Gemini-free check and check-out.</a:t>
+            </a:r>
+            <a:endParaRPr lang="en-US" sz="1250" dirty="0"/>
+          </a:p>
+        </p:txBody>
       </p:sp>
     </p:spTree>
   </p:cSld>

--- a/slides/pptx/week-05.pptx
+++ b/slides/pptx/week-05.pptx
@@ -4315,7 +4315,7 @@
                 <a:ea typeface="Calibri" pitchFamily="34" charset="-122"/>
                 <a:cs typeface="Calibri" pitchFamily="34" charset="-120"/>
               </a:rPr>
-              <a:t>WEEK 5 · THE MATERIAL</a:t>
+              <a:t>WEEK 5 · KEY POINTS</a:t>
             </a:r>
             <a:endParaRPr lang="en-US" sz="1200" dirty="0"/>
           </a:p>
@@ -4703,7 +4703,7 @@
                 <a:ea typeface="Calibri" pitchFamily="34" charset="-122"/>
                 <a:cs typeface="Calibri" pitchFamily="34" charset="-120"/>
               </a:rPr>
-              <a:t>WEEK 5 · THE MATERIAL</a:t>
+              <a:t>WEEK 5 · KEY POINTS</a:t>
             </a:r>
             <a:endParaRPr lang="en-US" sz="1200" dirty="0"/>
           </a:p>
@@ -5091,7 +5091,7 @@
                 <a:ea typeface="Calibri" pitchFamily="34" charset="-122"/>
                 <a:cs typeface="Calibri" pitchFamily="34" charset="-120"/>
               </a:rPr>
-              <a:t>WEEK 5 · THE MATERIAL</a:t>
+              <a:t>WEEK 5 · KEY POINTS</a:t>
             </a:r>
             <a:endParaRPr lang="en-US" sz="1200" dirty="0"/>
           </a:p>
@@ -5479,7 +5479,7 @@
                 <a:ea typeface="Calibri" pitchFamily="34" charset="-122"/>
                 <a:cs typeface="Calibri" pitchFamily="34" charset="-120"/>
               </a:rPr>
-              <a:t>WEEK 5 · THE MATERIAL</a:t>
+              <a:t>WEEK 5 · KEY POINTS</a:t>
             </a:r>
             <a:endParaRPr lang="en-US" sz="1200" dirty="0"/>
           </a:p>
@@ -5712,7 +5712,7 @@
                 <a:ea typeface="Calibri" pitchFamily="34" charset="-122"/>
                 <a:cs typeface="Calibri" pitchFamily="34" charset="-120"/>
               </a:rPr>
-              <a:t>You built the machinery of the feed today. That is the whole aside.</a:t>
+              <a:t>You built the same machinery today.</a:t>
             </a:r>
             <a:endParaRPr lang="en-US" sz="1650" dirty="0"/>
           </a:p>

--- a/slides/pptx/week-05.pptx
+++ b/slides/pptx/week-05.pptx
@@ -2008,7 +2008,7 @@
                 <a:ea typeface="Calibri" pitchFamily="34" charset="-122"/>
                 <a:cs typeface="Calibri" pitchFamily="34" charset="-120"/>
               </a:rPr>
-              <a:t>Watch your own corpus, text or images, sort itself by meaning, see the finding counting couldn't give you, and learn the same trick is how "For You" feeds place you.</a:t>
+              <a:t>Watch your own corpus, text or images, sort itself by meaning, see the finding counting could not give you, and learn that the same technique drives "For You" recommendation feeds.</a:t>
             </a:r>
             <a:endParaRPr lang="en-US" sz="1600" dirty="0"/>
           </a:p>
@@ -4612,7 +4612,7 @@
                 <a:ea typeface="Calibri" pitchFamily="34" charset="-122"/>
                 <a:cs typeface="Calibri" pitchFamily="34" charset="-120"/>
               </a:rPr>
-              <a:t>Neighbors are context-mates, NOT dictionary synonyms. Kill that misconception today, out loud.</a:t>
+              <a:t>Neighbors are context-mates, not dictionary synonyms. Correct this misconception explicitly.</a:t>
             </a:r>
             <a:endParaRPr lang="en-US" sz="1650" dirty="0"/>
           </a:p>
@@ -5388,7 +5388,7 @@
                 <a:ea typeface="Calibri" pitchFamily="34" charset="-122"/>
                 <a:cs typeface="Calibri" pitchFamily="34" charset="-120"/>
               </a:rPr>
-              <a:t>Tonight's toggle: PCA vs. t-SNE on your own map. Name one cluster you believe and one you don't.</a:t>
+              <a:t>Homework: toggle PCA against t-SNE on your own map. Name one cluster you believe and one you do not.</a:t>
             </a:r>
             <a:endParaRPr lang="en-US" sz="1650" dirty="0"/>
           </a:p>
@@ -5520,7 +5520,7 @@
                 <a:ea typeface="Cambria" pitchFamily="34" charset="-122"/>
                 <a:cs typeface="Cambria" pitchFamily="34" charset="-120"/>
               </a:rPr>
-              <a:t>The recommender aside (five minutes, boxed)</a:t>
+              <a:t>The recommender aside (five minutes, strictly limited)</a:t>
             </a:r>
             <a:endParaRPr lang="en-US" sz="3000" dirty="0"/>
           </a:p>
@@ -6778,7 +6778,7 @@
                 <a:ea typeface="Calibri" pitchFamily="34" charset="-122"/>
                 <a:cs typeface="Calibri" pitchFamily="34" charset="-120"/>
               </a:rPr>
-              <a:t>Project lab: push your embeddings, hunt the surprise cluster. A five-minute recommenders aside: "For You" is this same map plus your history. One-on-ones begin at the side.</a:t>
+              <a:t>Project lab: extend your embeddings and look for unexpected clusters. A five-minute aside on recommenders: "For You" is this same map plus your history. One-on-ones begin at the side.</a:t>
             </a:r>
             <a:endParaRPr lang="en-US" sz="1250" dirty="0"/>
           </a:p>

--- a/slides/pptx/week-05.pptx
+++ b/slides/pptx/week-05.pptx
@@ -2452,7 +2452,7 @@
         </p:nvSpPr>
         <p:spPr>
           <a:xfrm>
-            <a:off x="640080" y="1810512"/>
+            <a:off x="640080" y="1673352"/>
             <a:ext cx="219456" cy="219456"/>
           </a:xfrm>
           <a:prstGeom prst="ellipse">
@@ -2472,7 +2472,7 @@
         </p:nvSpPr>
         <p:spPr>
           <a:xfrm>
-            <a:off x="1051560" y="1737360"/>
+            <a:off x="1051560" y="1600200"/>
             <a:ext cx="10424160" cy="365760"/>
           </a:xfrm>
           <a:prstGeom prst="rect">
@@ -2511,7 +2511,7 @@
         </p:nvSpPr>
         <p:spPr>
           <a:xfrm>
-            <a:off x="1051560" y="2121408"/>
+            <a:off x="1051560" y="1984248"/>
             <a:ext cx="10424160" cy="731520"/>
           </a:xfrm>
           <a:prstGeom prst="rect">
@@ -2552,7 +2552,7 @@
         </p:nvSpPr>
         <p:spPr>
           <a:xfrm>
-            <a:off x="640080" y="2953512"/>
+            <a:off x="640080" y="2633472"/>
             <a:ext cx="219456" cy="219456"/>
           </a:xfrm>
           <a:prstGeom prst="ellipse">
@@ -2572,7 +2572,7 @@
         </p:nvSpPr>
         <p:spPr>
           <a:xfrm>
-            <a:off x="1051560" y="2880360"/>
+            <a:off x="1051560" y="2560320"/>
             <a:ext cx="10424160" cy="365760"/>
           </a:xfrm>
           <a:prstGeom prst="rect">
@@ -2611,7 +2611,7 @@
         </p:nvSpPr>
         <p:spPr>
           <a:xfrm>
-            <a:off x="1051560" y="3264408"/>
+            <a:off x="1051560" y="2944368"/>
             <a:ext cx="10424160" cy="731520"/>
           </a:xfrm>
           <a:prstGeom prst="rect">
@@ -2652,7 +2652,7 @@
         </p:nvSpPr>
         <p:spPr>
           <a:xfrm>
-            <a:off x="640080" y="4096512"/>
+            <a:off x="640080" y="3593592"/>
             <a:ext cx="219456" cy="219456"/>
           </a:xfrm>
           <a:prstGeom prst="ellipse">
@@ -2672,7 +2672,7 @@
         </p:nvSpPr>
         <p:spPr>
           <a:xfrm>
-            <a:off x="1051560" y="4023360"/>
+            <a:off x="1051560" y="3520440"/>
             <a:ext cx="10424160" cy="365760"/>
           </a:xfrm>
           <a:prstGeom prst="rect">
@@ -2697,7 +2697,7 @@
                 <a:ea typeface="Calibri" pitchFamily="34" charset="-122"/>
                 <a:cs typeface="Calibri" pitchFamily="34" charset="-120"/>
               </a:rPr>
-              <a:t>Sketch</a:t>
+              <a:t>Deeper (optional)</a:t>
             </a:r>
             <a:endParaRPr lang="en-US" sz="1500" dirty="0"/>
           </a:p>
@@ -2711,7 +2711,7 @@
         </p:nvSpPr>
         <p:spPr>
           <a:xfrm>
-            <a:off x="1051560" y="4407408"/>
+            <a:off x="1051560" y="3904488"/>
             <a:ext cx="10424160" cy="731520"/>
           </a:xfrm>
           <a:prstGeom prst="rect">
@@ -2738,7 +2738,7 @@
                 <a:ea typeface="Calibri" pitchFamily="34" charset="-122"/>
                 <a:cs typeface="Calibri" pitchFamily="34" charset="-120"/>
               </a:rPr>
-              <a:t>Toggle PCA vs. t-SNE and screenshot how the map changes; name one cluster you believe and one you don't.</a:t>
+              <a:t>Kozlowski et al., The Geometry of Culture (2019) in full; Wattenberg, Viégas &amp;amp; Johnson, How to Use t-SNE Effectively (Distill 2016)</a:t>
             </a:r>
             <a:endParaRPr lang="en-US" sz="1400" dirty="0"/>
           </a:p>
@@ -2752,14 +2752,14 @@
         </p:nvSpPr>
         <p:spPr>
           <a:xfrm>
-            <a:off x="640080" y="5239512"/>
+            <a:off x="640080" y="4553712"/>
             <a:ext cx="219456" cy="219456"/>
           </a:xfrm>
           <a:prstGeom prst="ellipse">
             <a:avLst/>
           </a:prstGeom>
           <a:solidFill>
-            <a:srgbClr val="7A3B2E"/>
+            <a:srgbClr val="3F6F5F"/>
           </a:solidFill>
           <a:ln/>
         </p:spPr>
@@ -2772,7 +2772,7 @@
         </p:nvSpPr>
         <p:spPr>
           <a:xfrm>
-            <a:off x="1051560" y="5166360"/>
+            <a:off x="1051560" y="4480560"/>
             <a:ext cx="10424160" cy="365760"/>
           </a:xfrm>
           <a:prstGeom prst="rect">
@@ -2791,12 +2791,112 @@
             <a:r>
               <a:rPr lang="en-US" sz="1500" b="1" dirty="0">
                 <a:solidFill>
-                  <a:srgbClr val="7A3B2E"/>
+                  <a:srgbClr val="3F6F5F"/>
                 </a:solidFill>
                 <a:latin typeface="Calibri" pitchFamily="34" charset="0"/>
                 <a:ea typeface="Calibri" pitchFamily="34" charset="-122"/>
                 <a:cs typeface="Calibri" pitchFamily="34" charset="-120"/>
               </a:rPr>
+              <a:t>Sketch</a:t>
+            </a:r>
+            <a:endParaRPr lang="en-US" sz="1500" dirty="0"/>
+          </a:p>
+        </p:txBody>
+      </p:sp>
+      <p:sp>
+        <p:nvSpPr>
+          <p:cNvPr id="14" name="Text 12"/>
+          <p:cNvSpPr/>
+          <p:nvPr/>
+        </p:nvSpPr>
+        <p:spPr>
+          <a:xfrm>
+            <a:off x="1051560" y="4864608"/>
+            <a:ext cx="10424160" cy="731520"/>
+          </a:xfrm>
+          <a:prstGeom prst="rect">
+            <a:avLst/>
+          </a:prstGeom>
+          <a:noFill/>
+          <a:ln/>
+        </p:spPr>
+        <p:txBody>
+          <a:bodyPr wrap="square" rtlCol="0" anchor="t">
+            <a:spAutoFit/>
+          </a:bodyPr>
+          <a:lstStyle/>
+          <a:p>
+            <a:pPr indent="0" marL="0">
+              <a:buNone/>
+            </a:pPr>
+            <a:r>
+              <a:rPr lang="en-US" sz="1400" dirty="0">
+                <a:solidFill>
+                  <a:srgbClr val="1A1A1A"/>
+                </a:solidFill>
+                <a:latin typeface="Calibri" pitchFamily="34" charset="0"/>
+                <a:ea typeface="Calibri" pitchFamily="34" charset="-122"/>
+                <a:cs typeface="Calibri" pitchFamily="34" charset="-120"/>
+              </a:rPr>
+              <a:t>Toggle PCA vs. t-SNE and screenshot how the map changes; name one cluster you believe and one you don't.</a:t>
+            </a:r>
+            <a:endParaRPr lang="en-US" sz="1400" dirty="0"/>
+          </a:p>
+        </p:txBody>
+      </p:sp>
+      <p:sp>
+        <p:nvSpPr>
+          <p:cNvPr id="15" name="Shape 13"/>
+          <p:cNvSpPr/>
+          <p:nvPr/>
+        </p:nvSpPr>
+        <p:spPr>
+          <a:xfrm>
+            <a:off x="640080" y="5513832"/>
+            <a:ext cx="219456" cy="219456"/>
+          </a:xfrm>
+          <a:prstGeom prst="ellipse">
+            <a:avLst/>
+          </a:prstGeom>
+          <a:solidFill>
+            <a:srgbClr val="7A3B2E"/>
+          </a:solidFill>
+          <a:ln/>
+        </p:spPr>
+      </p:sp>
+      <p:sp>
+        <p:nvSpPr>
+          <p:cNvPr id="16" name="Text 14"/>
+          <p:cNvSpPr/>
+          <p:nvPr/>
+        </p:nvSpPr>
+        <p:spPr>
+          <a:xfrm>
+            <a:off x="1051560" y="5440680"/>
+            <a:ext cx="10424160" cy="365760"/>
+          </a:xfrm>
+          <a:prstGeom prst="rect">
+            <a:avLst/>
+          </a:prstGeom>
+          <a:noFill/>
+          <a:ln/>
+        </p:spPr>
+        <p:txBody>
+          <a:bodyPr wrap="square" rtlCol="0" anchor="ctr"/>
+          <a:lstStyle/>
+          <a:p>
+            <a:pPr indent="0" marL="0">
+              <a:buNone/>
+            </a:pPr>
+            <a:r>
+              <a:rPr lang="en-US" sz="1500" b="1" dirty="0">
+                <a:solidFill>
+                  <a:srgbClr val="7A3B2E"/>
+                </a:solidFill>
+                <a:latin typeface="Calibri" pitchFamily="34" charset="0"/>
+                <a:ea typeface="Calibri" pitchFamily="34" charset="-122"/>
+                <a:cs typeface="Calibri" pitchFamily="34" charset="-120"/>
+              </a:rPr>
               <a:t>Check (AI closed)</a:t>
             </a:r>
             <a:endParaRPr lang="en-US" sz="1500" dirty="0"/>
@@ -2805,13 +2905,13 @@
       </p:sp>
       <p:sp>
         <p:nvSpPr>
-          <p:cNvPr id="14" name="Text 12"/>
-          <p:cNvSpPr/>
-          <p:nvPr/>
-        </p:nvSpPr>
-        <p:spPr>
-          <a:xfrm>
-            <a:off x="1051560" y="5550408"/>
+          <p:cNvPr id="17" name="Text 15"/>
+          <p:cNvSpPr/>
+          <p:nvPr/>
+        </p:nvSpPr>
+        <p:spPr>
+          <a:xfrm>
+            <a:off x="1051560" y="5824728"/>
             <a:ext cx="10424160" cy="731520"/>
           </a:xfrm>
           <a:prstGeom prst="rect">

--- a/slides/pptx/week-05.pptx
+++ b/slides/pptx/week-05.pptx
@@ -2538,7 +2538,7 @@
                 <a:ea typeface="Calibri" pitchFamily="34" charset="-122"/>
                 <a:cs typeface="Calibri" pitchFamily="34" charset="-120"/>
               </a:rPr>
-              <a:t>Alammar, The Illustrated Word2Vec, plus the debate: Kozlowski/Taddy/Evans, The Geometry of Culture (ASR 2019) vs. Bolukbasi et al. (2016)</a:t>
+              <a:t>Alammar, The Illustrated Word2Vec: the space of meaning, drawn one picture at a time</a:t>
             </a:r>
             <a:endParaRPr lang="en-US" sz="1400" dirty="0"/>
           </a:p>
@@ -2638,7 +2638,7 @@
                 <a:ea typeface="Calibri" pitchFamily="34" charset="-122"/>
                 <a:cs typeface="Calibri" pitchFamily="34" charset="-120"/>
               </a:rPr>
-              <a:t>The second pairing: Caliskan et al. (2017) vs. Soni/Klein, How Words Lead to Justice; Anderson et al., Spotify diversity</a:t>
+              <a:t>The debates, for the curious: Kozlowski/Taddy/Evans, The Geometry of Culture (2019) vs. Bolukbasi et al. (2016); Caliskan et al. (2017) vs. Soni/Klein, How Words Lead to Justice; Anderson et al., Spotify diversity</a:t>
             </a:r>
             <a:endParaRPr lang="en-US" sz="1400" dirty="0"/>
           </a:p>

--- a/slides/pptx/week-05.pptx
+++ b/slides/pptx/week-05.pptx
@@ -2538,7 +2538,7 @@
                 <a:ea typeface="Calibri" pitchFamily="34" charset="-122"/>
                 <a:cs typeface="Calibri" pitchFamily="34" charset="-120"/>
               </a:rPr>
-              <a:t>Alammar, The Illustrated Word2Vec: the space of meaning, drawn one picture at a time</a:t>
+              <a:t>Kozlowski, Taddy &amp;amp; Evans, The Geometry of Culture (2019): the argument that directions in an embedding space are cultural findings rather than artifacts</a:t>
             </a:r>
             <a:endParaRPr lang="en-US" sz="1400" dirty="0"/>
           </a:p>
@@ -2638,7 +2638,7 @@
                 <a:ea typeface="Calibri" pitchFamily="34" charset="-122"/>
                 <a:cs typeface="Calibri" pitchFamily="34" charset="-120"/>
               </a:rPr>
-              <a:t>The debates, for the curious: Kozlowski/Taddy/Evans, The Geometry of Culture (2019) vs. Bolukbasi et al. (2016); Caliskan et al. (2017) vs. Soni/Klein, How Words Lead to Justice; Anderson et al., Spotify diversity</a:t>
+              <a:t>The debates, for the curious: Bolukbasi et al. (2016) on the same geometry; Caliskan et al. (2017) vs. Soni/Klein, How Words Lead to Justice; Anderson et al., Spotify diversity</a:t>
             </a:r>
             <a:endParaRPr lang="en-US" sz="1400" dirty="0"/>
           </a:p>
@@ -2738,7 +2738,7 @@
                 <a:ea typeface="Calibri" pitchFamily="34" charset="-122"/>
                 <a:cs typeface="Calibri" pitchFamily="34" charset="-120"/>
               </a:rPr>
-              <a:t>Kozlowski et al., The Geometry of Culture (2019) in full; Wattenberg, Viégas &amp;amp; Johnson, How to Use t-SNE Effectively (Distill 2016)</a:t>
+              <a:t>Wattenberg, Vi&amp;eacute;gas &amp;amp; Johnson, How to Use t-SNE Effectively (Distill 2016), before you believe any cluster you see</a:t>
             </a:r>
             <a:endParaRPr lang="en-US" sz="1400" dirty="0"/>
           </a:p>
